--- a/docs/hedwig-spam-gateway-intro.pptx
+++ b/docs/hedwig-spam-gateway-intro.pptx
@@ -4,25 +4,24 @@
   <p:sldMasterIdLst>
     <p:sldMasterId id="2147483648" r:id="rId1"/>
   </p:sldMasterIdLst>
+  <p:notesMasterIdLst>
+    <p:notesMasterId r:id="rId14"/>
+  </p:notesMasterIdLst>
   <p:sldIdLst>
     <p:sldId id="256" r:id="rId2"/>
     <p:sldId id="257" r:id="rId3"/>
-    <p:sldId id="258" r:id="rId4"/>
-    <p:sldId id="259" r:id="rId5"/>
-    <p:sldId id="260" r:id="rId6"/>
-    <p:sldId id="261" r:id="rId7"/>
-    <p:sldId id="262" r:id="rId8"/>
-    <p:sldId id="263" r:id="rId9"/>
-    <p:sldId id="264" r:id="rId10"/>
-    <p:sldId id="265" r:id="rId11"/>
-    <p:sldId id="266" r:id="rId12"/>
-    <p:sldId id="267" r:id="rId13"/>
-    <p:sldId id="268" r:id="rId14"/>
+    <p:sldId id="299" r:id="rId4"/>
+    <p:sldId id="258" r:id="rId5"/>
+    <p:sldId id="259" r:id="rId6"/>
+    <p:sldId id="260" r:id="rId7"/>
+    <p:sldId id="261" r:id="rId8"/>
+    <p:sldId id="262" r:id="rId9"/>
+    <p:sldId id="263" r:id="rId10"/>
+    <p:sldId id="264" r:id="rId11"/>
+    <p:sldId id="265" r:id="rId12"/>
+    <p:sldId id="268" r:id="rId13"/>
   </p:sldIdLst>
-  <p:notesMasterIdLst>
-    <p:notesMasterId r:id="rId15"/>
-  </p:notesMasterIdLst>
-  <p:sldSz cx="9144000" cy="5143500"/>
+  <p:sldSz cx="9144000" cy="5143500" type="screen16x9"/>
   <p:notesSz cx="5143500" cy="9144000"/>
   <p:defaultTextStyle>
     <a:lvl1pPr marL="0" algn="l" defTabSz="914400" rtl="0" eaLnBrk="1" latinLnBrk="0" hangingPunct="1">
@@ -116,6 +115,11 @@
       </a:defRPr>
     </a:lvl9pPr>
   </p:defaultTextStyle>
+  <p:extLst>
+    <p:ext uri="{EFAFB233-063F-42B5-8137-9DF3F51BA10A}">
+      <p15:sldGuideLst xmlns:p15="http://schemas.microsoft.com/office/powerpoint/2012/main"/>
+    </p:ext>
+  </p:extLst>
 </p:presentation>
 </file>
 
@@ -141,240 +145,16 @@
           <a:chExt cx="0" cy="0"/>
         </a:xfrm>
       </p:grpSpPr>
-      <p:sp>
-        <p:nvSpPr>
-          <p:cNvPr id="2" name="Header Placeholder 1"/>
-          <p:cNvSpPr>
-            <a:spLocks noGrp="1"/>
-          </p:cNvSpPr>
-          <p:nvPr>
-            <p:ph type="hdr" sz="quarter"/>
-          </p:nvPr>
-        </p:nvSpPr>
-        <p:spPr>
-          <a:xfrm>
-            <a:off x="0" y="0"/>
-            <a:ext cx="2971800" cy="458788"/>
-          </a:xfrm>
-          <a:prstGeom prst="rect">
-            <a:avLst/>
-          </a:prstGeom>
-        </p:spPr>
-        <p:txBody>
-          <a:bodyPr vert="horz" lIns="91440" tIns="45720" rIns="91440" bIns="45720" rtlCol="0"/>
-          <a:lstStyle>
-            <a:lvl1pPr algn="l">
-              <a:defRPr sz="1200"/>
-            </a:lvl1pPr>
-          </a:lstStyle>
-          <a:p>
-            <a:endParaRPr lang="en-US"/>
-          </a:p>
-        </p:txBody>
-      </p:sp>
-      <p:sp>
-        <p:nvSpPr>
-          <p:cNvPr id="3" name="Date Placeholder 2"/>
-          <p:cNvSpPr>
-            <a:spLocks noGrp="1"/>
-          </p:cNvSpPr>
-          <p:nvPr>
-            <p:ph type="dt" idx="1"/>
-          </p:nvPr>
-        </p:nvSpPr>
-        <p:spPr>
-          <a:xfrm>
-            <a:off x="3884613" y="0"/>
-            <a:ext cx="2971800" cy="458788"/>
-          </a:xfrm>
-          <a:prstGeom prst="rect">
-            <a:avLst/>
-          </a:prstGeom>
-        </p:spPr>
-        <p:txBody>
-          <a:bodyPr vert="horz" lIns="91440" tIns="45720" rIns="91440" bIns="45720" rtlCol="0"/>
-          <a:lstStyle>
-            <a:lvl1pPr algn="r">
-              <a:defRPr sz="1200"/>
-            </a:lvl1pPr>
-          </a:lstStyle>
-          <a:p>
-            <a:fld id="{5282F153-3F37-0F45-9E97-73ACFA13230C}" type="datetimeFigureOut">
-              <a:rPr lang="en-US"/>
-              <a:t>7/23/19</a:t>
-            </a:fld>
-            <a:endParaRPr lang="en-US"/>
-          </a:p>
-        </p:txBody>
-      </p:sp>
-      <p:sp>
-        <p:nvSpPr>
-          <p:cNvPr id="4" name="Slide Image Placeholder 3"/>
-          <p:cNvSpPr>
-            <a:spLocks noGrp="1" noRot="1" noChangeAspect="1"/>
-          </p:cNvSpPr>
-          <p:nvPr>
-            <p:ph type="sldImg" idx="2"/>
-          </p:nvPr>
-        </p:nvSpPr>
-        <p:spPr>
-          <a:xfrm>
-            <a:off x="685800" y="1143000"/>
-            <a:ext cx="5486400" cy="3086100"/>
-          </a:xfrm>
-          <a:prstGeom prst="rect">
-            <a:avLst/>
-          </a:prstGeom>
-          <a:noFill/>
-          <a:ln w="12700">
-            <a:solidFill>
-              <a:prstClr val="black"/>
-            </a:solidFill>
-          </a:ln>
-        </p:spPr>
-        <p:txBody>
-          <a:bodyPr vert="horz" lIns="91440" tIns="45720" rIns="91440" bIns="45720" rtlCol="0" anchor="ctr"/>
-          <a:lstStyle/>
-          <a:p>
-            <a:endParaRPr lang="en-US"/>
-          </a:p>
-        </p:txBody>
-      </p:sp>
-      <p:sp>
-        <p:nvSpPr>
-          <p:cNvPr id="5" name="Notes Placeholder 4"/>
-          <p:cNvSpPr>
-            <a:spLocks noGrp="1"/>
-          </p:cNvSpPr>
-          <p:nvPr>
-            <p:ph type="body" sz="quarter" idx="3"/>
-          </p:nvPr>
-        </p:nvSpPr>
-        <p:spPr>
-          <a:xfrm>
-            <a:off x="685800" y="4400550"/>
-            <a:ext cx="5486400" cy="3600450"/>
-          </a:xfrm>
-          <a:prstGeom prst="rect">
-            <a:avLst/>
-          </a:prstGeom>
-        </p:spPr>
-        <p:txBody>
-          <a:bodyPr vert="horz" lIns="91440" tIns="45720" rIns="91440" bIns="45720" rtlCol="0"/>
-          <a:lstStyle/>
-          <a:p>
-            <a:pPr lvl="0"/>
-            <a:r>
-              <a:rPr lang="en-US"/>
-              <a:t>Click to edit Master text styles</a:t>
-            </a:r>
-          </a:p>
-          <a:p>
-            <a:pPr lvl="1"/>
-            <a:r>
-              <a:rPr lang="en-US"/>
-              <a:t>Second level</a:t>
-            </a:r>
-          </a:p>
-          <a:p>
-            <a:pPr lvl="2"/>
-            <a:r>
-              <a:rPr lang="en-US"/>
-              <a:t>Third level</a:t>
-            </a:r>
-          </a:p>
-          <a:p>
-            <a:pPr lvl="3"/>
-            <a:r>
-              <a:rPr lang="en-US"/>
-              <a:t>Fourth level</a:t>
-            </a:r>
-          </a:p>
-          <a:p>
-            <a:pPr lvl="4"/>
-            <a:r>
-              <a:rPr lang="en-US"/>
-              <a:t>Fifth level</a:t>
-            </a:r>
-          </a:p>
-        </p:txBody>
-      </p:sp>
-      <p:sp>
-        <p:nvSpPr>
-          <p:cNvPr id="6" name="Footer Placeholder 5"/>
-          <p:cNvSpPr>
-            <a:spLocks noGrp="1"/>
-          </p:cNvSpPr>
-          <p:nvPr>
-            <p:ph type="ftr" sz="quarter" idx="4"/>
-          </p:nvPr>
-        </p:nvSpPr>
-        <p:spPr>
-          <a:xfrm>
-            <a:off x="0" y="8685213"/>
-            <a:ext cx="2971800" cy="458787"/>
-          </a:xfrm>
-          <a:prstGeom prst="rect">
-            <a:avLst/>
-          </a:prstGeom>
-        </p:spPr>
-        <p:txBody>
-          <a:bodyPr vert="horz" lIns="91440" tIns="45720" rIns="91440" bIns="45720" rtlCol="0" anchor="b"/>
-          <a:lstStyle>
-            <a:lvl1pPr algn="l">
-              <a:defRPr sz="1200"/>
-            </a:lvl1pPr>
-          </a:lstStyle>
-          <a:p>
-            <a:endParaRPr lang="en-US"/>
-          </a:p>
-        </p:txBody>
-      </p:sp>
-      <p:sp>
-        <p:nvSpPr>
-          <p:cNvPr id="7" name="Slide Number Placeholder 6"/>
-          <p:cNvSpPr>
-            <a:spLocks noGrp="1"/>
-          </p:cNvSpPr>
-          <p:nvPr>
-            <p:ph type="sldNum" sz="quarter" idx="5"/>
-          </p:nvPr>
-        </p:nvSpPr>
-        <p:spPr>
-          <a:xfrm>
-            <a:off x="3884613" y="8685213"/>
-            <a:ext cx="2971800" cy="458787"/>
-          </a:xfrm>
-          <a:prstGeom prst="rect">
-            <a:avLst/>
-          </a:prstGeom>
-        </p:spPr>
-        <p:txBody>
-          <a:bodyPr vert="horz" lIns="91440" tIns="45720" rIns="91440" bIns="45720" rtlCol="0" anchor="b"/>
-          <a:lstStyle>
-            <a:lvl1pPr algn="r">
-              <a:defRPr sz="1200"/>
-            </a:lvl1pPr>
-          </a:lstStyle>
-          <a:p>
-            <a:fld id="{CE5E9CC1-C706-0F49-92D6-E571CC5EEA8F}" type="slidenum">
-              <a:rPr lang="en-US"/>
-              <a:t>‹#›</a:t>
-            </a:fld>
-            <a:endParaRPr lang="en-US"/>
-          </a:p>
-        </p:txBody>
-      </p:sp>
     </p:spTree>
     <p:extLst>
       <p:ext uri="{BB962C8B-B14F-4D97-AF65-F5344CB8AC3E}">
-        <p14:creationId xmlns:p14="http://schemas.microsoft.com/office/powerpoint/2010/main" val="1024086991"/>
+        <p14:creationId xmlns:p14="http://schemas.microsoft.com/office/powerpoint/2010/main" val="1055226967"/>
       </p:ext>
     </p:extLst>
   </p:cSld>
   <p:clrMap bg1="lt1" tx1="dk1" bg2="lt2" tx2="dk2" accent1="accent1" accent2="accent2" accent3="accent3" accent4="accent4" accent5="accent5" accent6="accent6" hlink="hlink" folHlink="folHlink"/>
   <p:notesStyle>
-    <a:lvl1pPr marL="0" algn="l" defTabSz="914400" rtl="0" eaLnBrk="1" latinLnBrk="0" hangingPunct="1">
+    <a:lvl1pPr marL="0" algn="l" defTabSz="914400" rtl="0" eaLnBrk="1" latinLnBrk="1" hangingPunct="1">
       <a:defRPr sz="1200" kern="1200">
         <a:solidFill>
           <a:schemeClr val="tx1"/>
@@ -384,7 +164,7 @@
         <a:cs typeface="+mn-cs"/>
       </a:defRPr>
     </a:lvl1pPr>
-    <a:lvl2pPr marL="457200" algn="l" defTabSz="914400" rtl="0" eaLnBrk="1" latinLnBrk="0" hangingPunct="1">
+    <a:lvl2pPr marL="457200" algn="l" defTabSz="914400" rtl="0" eaLnBrk="1" latinLnBrk="1" hangingPunct="1">
       <a:defRPr sz="1200" kern="1200">
         <a:solidFill>
           <a:schemeClr val="tx1"/>
@@ -394,7 +174,7 @@
         <a:cs typeface="+mn-cs"/>
       </a:defRPr>
     </a:lvl2pPr>
-    <a:lvl3pPr marL="914400" algn="l" defTabSz="914400" rtl="0" eaLnBrk="1" latinLnBrk="0" hangingPunct="1">
+    <a:lvl3pPr marL="914400" algn="l" defTabSz="914400" rtl="0" eaLnBrk="1" latinLnBrk="1" hangingPunct="1">
       <a:defRPr sz="1200" kern="1200">
         <a:solidFill>
           <a:schemeClr val="tx1"/>
@@ -404,7 +184,7 @@
         <a:cs typeface="+mn-cs"/>
       </a:defRPr>
     </a:lvl3pPr>
-    <a:lvl4pPr marL="1371600" algn="l" defTabSz="914400" rtl="0" eaLnBrk="1" latinLnBrk="0" hangingPunct="1">
+    <a:lvl4pPr marL="1371600" algn="l" defTabSz="914400" rtl="0" eaLnBrk="1" latinLnBrk="1" hangingPunct="1">
       <a:defRPr sz="1200" kern="1200">
         <a:solidFill>
           <a:schemeClr val="tx1"/>
@@ -414,7 +194,7 @@
         <a:cs typeface="+mn-cs"/>
       </a:defRPr>
     </a:lvl4pPr>
-    <a:lvl5pPr marL="1828800" algn="l" defTabSz="914400" rtl="0" eaLnBrk="1" latinLnBrk="0" hangingPunct="1">
+    <a:lvl5pPr marL="1828800" algn="l" defTabSz="914400" rtl="0" eaLnBrk="1" latinLnBrk="1" hangingPunct="1">
       <a:defRPr sz="1200" kern="1200">
         <a:solidFill>
           <a:schemeClr val="tx1"/>
@@ -424,7 +204,7 @@
         <a:cs typeface="+mn-cs"/>
       </a:defRPr>
     </a:lvl5pPr>
-    <a:lvl6pPr marL="2286000" algn="l" defTabSz="914400" rtl="0" eaLnBrk="1" latinLnBrk="0" hangingPunct="1">
+    <a:lvl6pPr marL="2286000" algn="l" defTabSz="914400" rtl="0" eaLnBrk="1" latinLnBrk="1" hangingPunct="1">
       <a:defRPr sz="1200" kern="1200">
         <a:solidFill>
           <a:schemeClr val="tx1"/>
@@ -434,7 +214,7 @@
         <a:cs typeface="+mn-cs"/>
       </a:defRPr>
     </a:lvl6pPr>
-    <a:lvl7pPr marL="2743200" algn="l" defTabSz="914400" rtl="0" eaLnBrk="1" latinLnBrk="0" hangingPunct="1">
+    <a:lvl7pPr marL="2743200" algn="l" defTabSz="914400" rtl="0" eaLnBrk="1" latinLnBrk="1" hangingPunct="1">
       <a:defRPr sz="1200" kern="1200">
         <a:solidFill>
           <a:schemeClr val="tx1"/>
@@ -444,7 +224,7 @@
         <a:cs typeface="+mn-cs"/>
       </a:defRPr>
     </a:lvl7pPr>
-    <a:lvl8pPr marL="3200400" algn="l" defTabSz="914400" rtl="0" eaLnBrk="1" latinLnBrk="0" hangingPunct="1">
+    <a:lvl8pPr marL="3200400" algn="l" defTabSz="914400" rtl="0" eaLnBrk="1" latinLnBrk="1" hangingPunct="1">
       <a:defRPr sz="1200" kern="1200">
         <a:solidFill>
           <a:schemeClr val="tx1"/>
@@ -454,7 +234,7 @@
         <a:cs typeface="+mn-cs"/>
       </a:defRPr>
     </a:lvl8pPr>
-    <a:lvl9pPr marL="3657600" algn="l" defTabSz="914400" rtl="0" eaLnBrk="1" latinLnBrk="0" hangingPunct="1">
+    <a:lvl9pPr marL="3657600" algn="l" defTabSz="914400" rtl="0" eaLnBrk="1" latinLnBrk="1" hangingPunct="1">
       <a:defRPr sz="1200" kern="1200">
         <a:solidFill>
           <a:schemeClr val="tx1"/>
@@ -516,7 +296,6 @@
               <a:rPr lang="en-US" dirty="0"/>
               <a:t>Hedwig 본체를 수정하지 않는 독립 프로세스입니다. 오늘은 구조, 스팸 대응 방식, 관리자가 쓰는 화면, 그리고 사용자 신고 흐름을 시연합니다.</a:t>
             </a:r>
-            <a:endParaRPr lang="en-US" dirty="0"/>
           </a:p>
         </p:txBody>
       </p:sp>
@@ -600,10 +379,6 @@
           <a:bodyPr/>
           <a:lstStyle/>
           <a:p>
-            <a:r>
-              <a:rPr lang="en-US" dirty="0"/>
-              <a:t/>
-            </a:r>
             <a:endParaRPr lang="en-US" dirty="0"/>
           </a:p>
         </p:txBody>
@@ -625,7 +400,7 @@
           <a:p>
             <a:fld id="{F7021451-1387-4CA6-816F-3879F97B5CBC}" type="slidenum">
               <a:rPr lang="en-US"/>
-              <a:t>10</a:t>
+              <a:t>11</a:t>
             </a:fld>
             <a:endParaRPr lang="en-US"/>
           </a:p>
@@ -688,10 +463,6 @@
           <a:bodyPr/>
           <a:lstStyle/>
           <a:p>
-            <a:r>
-              <a:rPr lang="en-US" dirty="0"/>
-              <a:t>4번에서 만든 시험 룰은 시연 후 삭제합니다. 5번은 운영 그레이리스팅이 5분이라 사전 준비한 결과를 보여 줘도 됩니다.</a:t>
-            </a:r>
             <a:endParaRPr lang="en-US" dirty="0"/>
           </a:p>
         </p:txBody>
@@ -713,183 +484,7 @@
           <a:p>
             <a:fld id="{F7021451-1387-4CA6-816F-3879F97B5CBC}" type="slidenum">
               <a:rPr lang="en-US"/>
-              <a:t>11</a:t>
-            </a:fld>
-            <a:endParaRPr lang="en-US"/>
-          </a:p>
-        </p:txBody>
-      </p:sp>
-    </p:spTree>
-    <p:extLst>
-      <p:ext uri="{BB962C8B-B14F-4D97-AF65-F5344CB8AC3E}">
-        <p14:creationId xmlns:p14="http://schemas.microsoft.com/office/powerpoint/2010/main" val="1024086991"/>
-      </p:ext>
-    </p:extLst>
-  </p:cSld>
-  <p:clrMapOvr>
-    <a:masterClrMapping/>
-  </p:clrMapOvr>
-</p:notes>
-</file>
-
-<file path=ppt/notesSlides/notesSlide12.xml><?xml version="1.0" encoding="utf-8"?>
-<p:notes xmlns:a="http://schemas.openxmlformats.org/drawingml/2006/main" xmlns:r="http://schemas.openxmlformats.org/officeDocument/2006/relationships" xmlns:p="http://schemas.openxmlformats.org/presentationml/2006/main">
-  <p:cSld>
-    <p:spTree>
-      <p:nvGrpSpPr>
-        <p:cNvPr id="1" name=""/>
-        <p:cNvGrpSpPr/>
-        <p:nvPr/>
-      </p:nvGrpSpPr>
-      <p:grpSpPr>
-        <a:xfrm>
-          <a:off x="0" y="0"/>
-          <a:ext cx="0" cy="0"/>
-          <a:chOff x="0" y="0"/>
-          <a:chExt cx="0" cy="0"/>
-        </a:xfrm>
-      </p:grpSpPr>
-      <p:sp>
-        <p:nvSpPr>
-          <p:cNvPr id="2" name="Slide Image Placeholder 1"/>
-          <p:cNvSpPr>
-            <a:spLocks noGrp="1" noRot="1" noChangeAspect="1"/>
-          </p:cNvSpPr>
-          <p:nvPr>
-            <p:ph type="sldImg"/>
-          </p:nvPr>
-        </p:nvSpPr>
-        <p:spPr/>
-      </p:sp>
-      <p:sp>
-        <p:nvSpPr>
-          <p:cNvPr id="3" name="Notes Placeholder 2"/>
-          <p:cNvSpPr>
-            <a:spLocks noGrp="1"/>
-          </p:cNvSpPr>
-          <p:nvPr>
-            <p:ph type="body" idx="1"/>
-          </p:nvPr>
-        </p:nvSpPr>
-        <p:spPr/>
-        <p:txBody>
-          <a:bodyPr/>
-          <a:lstStyle/>
-          <a:p>
-            <a:r>
-              <a:rPr lang="en-US" dirty="0"/>
-              <a:t/>
-            </a:r>
-            <a:endParaRPr lang="en-US" dirty="0"/>
-          </a:p>
-        </p:txBody>
-      </p:sp>
-      <p:sp>
-        <p:nvSpPr>
-          <p:cNvPr id="4" name="Slide Number Placeholder 3"/>
-          <p:cNvSpPr>
-            <a:spLocks noGrp="1"/>
-          </p:cNvSpPr>
-          <p:nvPr>
-            <p:ph type="sldNum" sz="quarter" idx="10"/>
-          </p:nvPr>
-        </p:nvSpPr>
-        <p:spPr/>
-        <p:txBody>
-          <a:bodyPr/>
-          <a:lstStyle/>
-          <a:p>
-            <a:fld id="{F7021451-1387-4CA6-816F-3879F97B5CBC}" type="slidenum">
-              <a:rPr lang="en-US"/>
               <a:t>12</a:t>
-            </a:fld>
-            <a:endParaRPr lang="en-US"/>
-          </a:p>
-        </p:txBody>
-      </p:sp>
-    </p:spTree>
-    <p:extLst>
-      <p:ext uri="{BB962C8B-B14F-4D97-AF65-F5344CB8AC3E}">
-        <p14:creationId xmlns:p14="http://schemas.microsoft.com/office/powerpoint/2010/main" val="1024086991"/>
-      </p:ext>
-    </p:extLst>
-  </p:cSld>
-  <p:clrMapOvr>
-    <a:masterClrMapping/>
-  </p:clrMapOvr>
-</p:notes>
-</file>
-
-<file path=ppt/notesSlides/notesSlide13.xml><?xml version="1.0" encoding="utf-8"?>
-<p:notes xmlns:a="http://schemas.openxmlformats.org/drawingml/2006/main" xmlns:r="http://schemas.openxmlformats.org/officeDocument/2006/relationships" xmlns:p="http://schemas.openxmlformats.org/presentationml/2006/main">
-  <p:cSld>
-    <p:spTree>
-      <p:nvGrpSpPr>
-        <p:cNvPr id="1" name=""/>
-        <p:cNvGrpSpPr/>
-        <p:nvPr/>
-      </p:nvGrpSpPr>
-      <p:grpSpPr>
-        <a:xfrm>
-          <a:off x="0" y="0"/>
-          <a:ext cx="0" cy="0"/>
-          <a:chOff x="0" y="0"/>
-          <a:chExt cx="0" cy="0"/>
-        </a:xfrm>
-      </p:grpSpPr>
-      <p:sp>
-        <p:nvSpPr>
-          <p:cNvPr id="2" name="Slide Image Placeholder 1"/>
-          <p:cNvSpPr>
-            <a:spLocks noGrp="1" noRot="1" noChangeAspect="1"/>
-          </p:cNvSpPr>
-          <p:nvPr>
-            <p:ph type="sldImg"/>
-          </p:nvPr>
-        </p:nvSpPr>
-        <p:spPr/>
-      </p:sp>
-      <p:sp>
-        <p:nvSpPr>
-          <p:cNvPr id="3" name="Notes Placeholder 2"/>
-          <p:cNvSpPr>
-            <a:spLocks noGrp="1"/>
-          </p:cNvSpPr>
-          <p:nvPr>
-            <p:ph type="body" idx="1"/>
-          </p:nvPr>
-        </p:nvSpPr>
-        <p:spPr/>
-        <p:txBody>
-          <a:bodyPr/>
-          <a:lstStyle/>
-          <a:p>
-            <a:r>
-              <a:rPr lang="en-US" dirty="0"/>
-              <a:t/>
-            </a:r>
-            <a:endParaRPr lang="en-US" dirty="0"/>
-          </a:p>
-        </p:txBody>
-      </p:sp>
-      <p:sp>
-        <p:nvSpPr>
-          <p:cNvPr id="4" name="Slide Number Placeholder 3"/>
-          <p:cNvSpPr>
-            <a:spLocks noGrp="1"/>
-          </p:cNvSpPr>
-          <p:nvPr>
-            <p:ph type="sldNum" sz="quarter" idx="10"/>
-          </p:nvPr>
-        </p:nvSpPr>
-        <p:spPr/>
-        <p:txBody>
-          <a:bodyPr/>
-          <a:lstStyle/>
-          <a:p>
-            <a:fld id="{F7021451-1387-4CA6-816F-3879F97B5CBC}" type="slidenum">
-              <a:rPr lang="en-US"/>
-              <a:t>13</a:t>
             </a:fld>
             <a:endParaRPr lang="en-US"/>
           </a:p>
@@ -956,7 +551,6 @@
               <a:rPr lang="en-US" dirty="0"/>
               <a:t>32,575건은 사내 두 달치 스팸 EML 분석 결과입니다. 원본 데이터는 저장소에 없습니다.</a:t>
             </a:r>
-            <a:endParaRPr lang="en-US" dirty="0"/>
           </a:p>
         </p:txBody>
       </p:sp>
@@ -1044,7 +638,6 @@
               <a:rPr lang="en-US" dirty="0"/>
               <a:t>블랙리스트는 설정에 따라 SMTP 단계에서 거절할 수 있습니다. 화이트리스트는 이후 검사를 모두 건너뜁니다.</a:t>
             </a:r>
-            <a:endParaRPr lang="en-US" dirty="0"/>
           </a:p>
         </p:txBody>
       </p:sp>
@@ -1065,7 +658,7 @@
           <a:p>
             <a:fld id="{F7021451-1387-4CA6-816F-3879F97B5CBC}" type="slidenum">
               <a:rPr lang="en-US"/>
-              <a:t>3</a:t>
+              <a:t>4</a:t>
             </a:fld>
             <a:endParaRPr lang="en-US"/>
           </a:p>
@@ -1132,7 +725,6 @@
               <a:rPr lang="en-US" dirty="0"/>
               <a:t>보류 표본은 룰을 만들 때 쓰지 않은 데이터입니다. '정상 대용'은 발신 도메인 기준 근사치라 오탐 수치는 참고용입니다.</a:t>
             </a:r>
-            <a:endParaRPr lang="en-US" dirty="0"/>
           </a:p>
         </p:txBody>
       </p:sp>
@@ -1153,7 +745,7 @@
           <a:p>
             <a:fld id="{F7021451-1387-4CA6-816F-3879F97B5CBC}" type="slidenum">
               <a:rPr lang="en-US"/>
-              <a:t>4</a:t>
+              <a:t>5</a:t>
             </a:fld>
             <a:endParaRPr lang="en-US"/>
           </a:p>
@@ -1220,7 +812,6 @@
               <a:rPr lang="en-US" dirty="0"/>
               <a:t>효과가 없다는 결과도 문서에 남겼습니다. 이미 Gemini가 대부분을 잡아 개선 여지가 작았습니다.</a:t>
             </a:r>
-            <a:endParaRPr lang="en-US" dirty="0"/>
           </a:p>
         </p:txBody>
       </p:sp>
@@ -1241,7 +832,7 @@
           <a:p>
             <a:fld id="{F7021451-1387-4CA6-816F-3879F97B5CBC}" type="slidenum">
               <a:rPr lang="en-US"/>
-              <a:t>5</a:t>
+              <a:t>6</a:t>
             </a:fld>
             <a:endParaRPr lang="en-US"/>
           </a:p>
@@ -1304,10 +895,6 @@
           <a:bodyPr/>
           <a:lstStyle/>
           <a:p>
-            <a:r>
-              <a:rPr lang="en-US" dirty="0"/>
-              <a:t/>
-            </a:r>
             <a:endParaRPr lang="en-US" dirty="0"/>
           </a:p>
         </p:txBody>
@@ -1329,7 +916,7 @@
           <a:p>
             <a:fld id="{F7021451-1387-4CA6-816F-3879F97B5CBC}" type="slidenum">
               <a:rPr lang="en-US"/>
-              <a:t>6</a:t>
+              <a:t>7</a:t>
             </a:fld>
             <a:endParaRPr lang="en-US"/>
           </a:p>
@@ -1396,7 +983,6 @@
               <a:rPr lang="en-US" dirty="0"/>
               <a:t>신고 키는 관리자 키와 분리했습니다. 그룹웨어 서버가 호출하며 키를 브라우저에 내리지 않습니다.</a:t>
             </a:r>
-            <a:endParaRPr lang="en-US" dirty="0"/>
           </a:p>
         </p:txBody>
       </p:sp>
@@ -1417,7 +1003,7 @@
           <a:p>
             <a:fld id="{F7021451-1387-4CA6-816F-3879F97B5CBC}" type="slidenum">
               <a:rPr lang="en-US"/>
-              <a:t>7</a:t>
+              <a:t>8</a:t>
             </a:fld>
             <a:endParaRPr lang="en-US"/>
           </a:p>
@@ -1484,7 +1070,6 @@
               <a:rPr lang="en-US" dirty="0"/>
               <a:t>실제 화면 캡처 대신 구성을 도식으로 나타냈습니다. 시연에서는 실제 화면을 보여 줍니다.</a:t>
             </a:r>
-            <a:endParaRPr lang="en-US" dirty="0"/>
           </a:p>
         </p:txBody>
       </p:sp>
@@ -1505,7 +1090,7 @@
           <a:p>
             <a:fld id="{F7021451-1387-4CA6-816F-3879F97B5CBC}" type="slidenum">
               <a:rPr lang="en-US"/>
-              <a:t>8</a:t>
+              <a:t>9</a:t>
             </a:fld>
             <a:endParaRPr lang="en-US"/>
           </a:p>
@@ -1572,7 +1157,6 @@
               <a:rPr lang="en-US" dirty="0"/>
               <a:t>LLM이 위조 헤더를 보고 정상 메일을 스팸으로 판정하는 문제가 실제로 확인되어 판정 전에 제거하도록 했습니다.</a:t>
             </a:r>
-            <a:endParaRPr lang="en-US" dirty="0"/>
           </a:p>
         </p:txBody>
       </p:sp>
@@ -1593,7 +1177,7 @@
           <a:p>
             <a:fld id="{F7021451-1387-4CA6-816F-3879F97B5CBC}" type="slidenum">
               <a:rPr lang="en-US"/>
-              <a:t>9</a:t>
+              <a:t>10</a:t>
             </a:fld>
             <a:endParaRPr lang="en-US"/>
           </a:p>
@@ -1650,6 +1234,7 @@
         <a:solidFill>
           <a:srgbClr val="FFFFFF"/>
         </a:solidFill>
+        <a:effectLst/>
       </p:bgPr>
     </p:bg>
     <p:spTree>
@@ -1686,7 +1271,7 @@
           </a:prstGeom>
           <a:extLst>
             <a:ext uri="{C572A759-6A51-4108-AA02-DFA0A04FC94B}">
-              <ma14:wrappingTextBoxFlag xmlns:ma14="http://schemas.microsoft.com/office/mac/drawingml/2011/main" val="0"/>
+              <ma14:wrappingTextBoxFlag xmlns="" xmlns:ma14="http://schemas.microsoft.com/office/mac/drawingml/2011/main" val="0"/>
             </a:ext>
           </a:extLst>
         </p:spPr>
@@ -1707,8 +1292,8 @@
           <a:p>
             <a:pPr algn="l"/>
             <a:fld id="{F7021451-1387-4CA6-816F-3879F97B5CBC}" type="slidenum">
-              <a:rPr b="0" lang="en-US"/>
-              <a:t>1002</a:t>
+              <a:rPr lang="en-US" b="0"/>
+              <a:t>‹#›</a:t>
             </a:fld>
             <a:endParaRPr lang="en-US"/>
           </a:p>
@@ -1730,6 +1315,7 @@
         <a:solidFill>
           <a:srgbClr val="14213D"/>
         </a:solidFill>
+        <a:effectLst/>
       </p:bgPr>
     </p:bg>
     <p:spTree>
@@ -1757,6 +1343,11 @@
 <file path=ppt/slideMasters/slideMaster1.xml><?xml version="1.0" encoding="utf-8"?>
 <p:sldMaster xmlns:a="http://schemas.openxmlformats.org/drawingml/2006/main" xmlns:r="http://schemas.openxmlformats.org/officeDocument/2006/relationships" xmlns:p="http://schemas.openxmlformats.org/presentationml/2006/main">
   <p:cSld>
+    <p:bg>
+      <p:bgRef idx="1001">
+        <a:schemeClr val="bg1"/>
+      </p:bgRef>
+    </p:bg>
     <p:spTree>
       <p:nvGrpSpPr>
         <p:cNvPr id="1" name=""/>
@@ -1791,7 +1382,7 @@
           </a:prstGeom>
           <a:extLst>
             <a:ext uri="{C572A759-6A51-4108-AA02-DFA0A04FC94B}">
-              <ma14:wrappingTextBoxFlag xmlns:ma14="http://schemas.microsoft.com/office/mac/drawingml/2011/main" val="0"/>
+              <ma14:wrappingTextBoxFlag xmlns="" xmlns:ma14="http://schemas.microsoft.com/office/mac/drawingml/2011/main" val="0"/>
             </a:ext>
           </a:extLst>
         </p:spPr>
@@ -1812,8 +1403,8 @@
           <a:p>
             <a:pPr algn="l"/>
             <a:fld id="{F7021451-1387-4CA6-816F-3879F97B5CBC}" type="slidenum">
-              <a:rPr b="0" lang="en-US"/>
-              <a:t>null</a:t>
+              <a:rPr lang="en-US" b="0"/>
+              <a:t>‹#›</a:t>
             </a:fld>
             <a:endParaRPr lang="en-US"/>
           </a:p>
@@ -2119,7 +1710,7 @@
           <a:bodyPr wrap="square" lIns="0" tIns="0" rIns="0" bIns="0" rtlCol="0" anchor="ctr"/>
           <a:lstStyle/>
           <a:p>
-            <a:pPr indent="0" marL="0">
+            <a:pPr marL="0" indent="0">
               <a:buNone/>
             </a:pPr>
             <a:r>
@@ -2158,7 +1749,7 @@
           <a:bodyPr wrap="square" lIns="0" tIns="0" rIns="0" bIns="0" rtlCol="0" anchor="ctr"/>
           <a:lstStyle/>
           <a:p>
-            <a:pPr indent="0" marL="0">
+            <a:pPr marL="0" indent="0">
               <a:buNone/>
             </a:pPr>
             <a:r>
@@ -2197,7 +1788,7 @@
           <a:bodyPr wrap="square" lIns="0" tIns="0" rIns="0" bIns="0" rtlCol="0" anchor="ctr"/>
           <a:lstStyle/>
           <a:p>
-            <a:pPr indent="0" marL="0">
+            <a:pPr marL="0" indent="0">
               <a:buNone/>
             </a:pPr>
             <a:r>
@@ -2224,6 +1815,463 @@
 </file>
 
 <file path=ppt/slides/slide10.xml><?xml version="1.0" encoding="utf-8"?>
+<p:sld xmlns:a="http://schemas.openxmlformats.org/drawingml/2006/main" xmlns:r="http://schemas.openxmlformats.org/officeDocument/2006/relationships" xmlns:p="http://schemas.openxmlformats.org/presentationml/2006/main">
+  <p:cSld name="Slide 9">
+    <p:spTree>
+      <p:nvGrpSpPr>
+        <p:cNvPr id="1" name=""/>
+        <p:cNvGrpSpPr/>
+        <p:nvPr/>
+      </p:nvGrpSpPr>
+      <p:grpSpPr>
+        <a:xfrm>
+          <a:off x="0" y="0"/>
+          <a:ext cx="0" cy="0"/>
+          <a:chOff x="0" y="0"/>
+          <a:chExt cx="0" cy="0"/>
+        </a:xfrm>
+      </p:grpSpPr>
+      <p:sp>
+        <p:nvSpPr>
+          <p:cNvPr id="2" name="Text 0"/>
+          <p:cNvSpPr txBox="1"/>
+          <p:nvPr/>
+        </p:nvSpPr>
+        <p:spPr>
+          <a:xfrm>
+            <a:off x="548640" y="320040"/>
+            <a:ext cx="8046720" cy="640080"/>
+          </a:xfrm>
+          <a:prstGeom prst="rect">
+            <a:avLst/>
+          </a:prstGeom>
+          <a:noFill/>
+          <a:ln/>
+        </p:spPr>
+        <p:txBody>
+          <a:bodyPr wrap="square" lIns="0" tIns="0" rIns="0" bIns="0" rtlCol="0" anchor="ctr"/>
+          <a:lstStyle/>
+          <a:p>
+            <a:pPr marL="0" indent="0">
+              <a:buNone/>
+            </a:pPr>
+            <a:r>
+              <a:rPr lang="en-US" sz="2800" b="1" dirty="0">
+                <a:solidFill>
+                  <a:srgbClr val="14213D"/>
+                </a:solidFill>
+                <a:latin typeface="Malgun Gothic" pitchFamily="34" charset="0"/>
+                <a:ea typeface="Malgun Gothic" pitchFamily="34" charset="-122"/>
+                <a:cs typeface="Malgun Gothic" pitchFamily="34" charset="-120"/>
+              </a:rPr>
+              <a:t>보안: 신고와 헤더를 믿지 않습니다</a:t>
+            </a:r>
+            <a:endParaRPr lang="en-US" sz="2800" dirty="0"/>
+          </a:p>
+        </p:txBody>
+      </p:sp>
+      <p:sp>
+        <p:nvSpPr>
+          <p:cNvPr id="3" name="Shape 1"/>
+          <p:cNvSpPr/>
+          <p:nvPr/>
+        </p:nvSpPr>
+        <p:spPr>
+          <a:xfrm>
+            <a:off x="548640" y="1280160"/>
+            <a:ext cx="2514600" cy="3200400"/>
+          </a:xfrm>
+          <a:prstGeom prst="roundRect">
+            <a:avLst>
+              <a:gd name="adj" fmla="val 2909"/>
+            </a:avLst>
+          </a:prstGeom>
+          <a:solidFill>
+            <a:srgbClr val="F3F4F6"/>
+          </a:solidFill>
+          <a:ln w="12700">
+            <a:solidFill>
+              <a:srgbClr val="F3F4F6"/>
+            </a:solidFill>
+            <a:prstDash val="solid"/>
+          </a:ln>
+        </p:spPr>
+        <p:txBody>
+          <a:bodyPr/>
+          <a:lstStyle/>
+          <a:p>
+            <a:endParaRPr lang="ko-KR" altLang="en-US"/>
+          </a:p>
+        </p:txBody>
+      </p:sp>
+      <p:sp>
+        <p:nvSpPr>
+          <p:cNvPr id="4" name="Text 2"/>
+          <p:cNvSpPr txBox="1"/>
+          <p:nvPr/>
+        </p:nvSpPr>
+        <p:spPr>
+          <a:xfrm>
+            <a:off x="731520" y="1389888"/>
+            <a:ext cx="2148840" cy="365760"/>
+          </a:xfrm>
+          <a:prstGeom prst="rect">
+            <a:avLst/>
+          </a:prstGeom>
+          <a:noFill/>
+          <a:ln/>
+        </p:spPr>
+        <p:txBody>
+          <a:bodyPr wrap="square" lIns="0" tIns="0" rIns="0" bIns="0" rtlCol="0" anchor="ctr"/>
+          <a:lstStyle/>
+          <a:p>
+            <a:pPr marL="0" indent="0">
+              <a:buNone/>
+            </a:pPr>
+            <a:r>
+              <a:rPr lang="en-US" sz="1600" b="1" dirty="0">
+                <a:solidFill>
+                  <a:srgbClr val="14213D"/>
+                </a:solidFill>
+                <a:latin typeface="Malgun Gothic" pitchFamily="34" charset="0"/>
+                <a:ea typeface="Malgun Gothic" pitchFamily="34" charset="-122"/>
+                <a:cs typeface="Malgun Gothic" pitchFamily="34" charset="-120"/>
+              </a:rPr>
+              <a:t>위조 헤더 제거</a:t>
+            </a:r>
+            <a:endParaRPr lang="en-US" sz="1600" dirty="0"/>
+          </a:p>
+        </p:txBody>
+      </p:sp>
+      <p:sp>
+        <p:nvSpPr>
+          <p:cNvPr id="5" name="Text 3"/>
+          <p:cNvSpPr txBox="1"/>
+          <p:nvPr/>
+        </p:nvSpPr>
+        <p:spPr>
+          <a:xfrm>
+            <a:off x="731520" y="1783080"/>
+            <a:ext cx="2148840" cy="2560320"/>
+          </a:xfrm>
+          <a:prstGeom prst="rect">
+            <a:avLst/>
+          </a:prstGeom>
+          <a:noFill/>
+          <a:ln/>
+        </p:spPr>
+        <p:txBody>
+          <a:bodyPr wrap="square" lIns="0" tIns="0" rIns="0" bIns="0" rtlCol="0" anchor="t"/>
+          <a:lstStyle/>
+          <a:p>
+            <a:pPr marL="0" indent="0">
+              <a:spcAft>
+                <a:spcPts val="400"/>
+              </a:spcAft>
+              <a:buNone/>
+            </a:pPr>
+            <a:r>
+              <a:rPr lang="en-US" sz="1300" dirty="0">
+                <a:solidFill>
+                  <a:srgbClr val="1F2937"/>
+                </a:solidFill>
+                <a:latin typeface="Malgun Gothic" pitchFamily="34" charset="0"/>
+                <a:ea typeface="Malgun Gothic" pitchFamily="34" charset="-122"/>
+                <a:cs typeface="Malgun Gothic" pitchFamily="34" charset="-120"/>
+              </a:rPr>
+              <a:t>외부 메일이 미리 달고 온 X-Spam-* 헤더는 판정 전에 지웁니다. Hedwig가 이 헤더로 스팸함 이동을 정하기 때문입니다.</a:t>
+            </a:r>
+            <a:endParaRPr lang="en-US" sz="1300" dirty="0"/>
+          </a:p>
+        </p:txBody>
+      </p:sp>
+      <p:sp>
+        <p:nvSpPr>
+          <p:cNvPr id="6" name="Shape 4"/>
+          <p:cNvSpPr/>
+          <p:nvPr/>
+        </p:nvSpPr>
+        <p:spPr>
+          <a:xfrm>
+            <a:off x="3291840" y="1280160"/>
+            <a:ext cx="2514600" cy="3200400"/>
+          </a:xfrm>
+          <a:prstGeom prst="roundRect">
+            <a:avLst>
+              <a:gd name="adj" fmla="val 2909"/>
+            </a:avLst>
+          </a:prstGeom>
+          <a:solidFill>
+            <a:srgbClr val="F3F4F6"/>
+          </a:solidFill>
+          <a:ln w="12700">
+            <a:solidFill>
+              <a:srgbClr val="F3F4F6"/>
+            </a:solidFill>
+            <a:prstDash val="solid"/>
+          </a:ln>
+        </p:spPr>
+        <p:txBody>
+          <a:bodyPr/>
+          <a:lstStyle/>
+          <a:p>
+            <a:endParaRPr lang="ko-KR" altLang="en-US"/>
+          </a:p>
+        </p:txBody>
+      </p:sp>
+      <p:sp>
+        <p:nvSpPr>
+          <p:cNvPr id="7" name="Text 5"/>
+          <p:cNvSpPr txBox="1"/>
+          <p:nvPr/>
+        </p:nvSpPr>
+        <p:spPr>
+          <a:xfrm>
+            <a:off x="3474720" y="1389888"/>
+            <a:ext cx="2148840" cy="365760"/>
+          </a:xfrm>
+          <a:prstGeom prst="rect">
+            <a:avLst/>
+          </a:prstGeom>
+          <a:noFill/>
+          <a:ln/>
+        </p:spPr>
+        <p:txBody>
+          <a:bodyPr wrap="square" lIns="0" tIns="0" rIns="0" bIns="0" rtlCol="0" anchor="ctr"/>
+          <a:lstStyle/>
+          <a:p>
+            <a:pPr marL="0" indent="0">
+              <a:buNone/>
+            </a:pPr>
+            <a:r>
+              <a:rPr lang="en-US" sz="1600" b="1" dirty="0">
+                <a:solidFill>
+                  <a:srgbClr val="14213D"/>
+                </a:solidFill>
+                <a:latin typeface="Malgun Gothic" pitchFamily="34" charset="0"/>
+                <a:ea typeface="Malgun Gothic" pitchFamily="34" charset="-122"/>
+                <a:cs typeface="Malgun Gothic" pitchFamily="34" charset="-120"/>
+              </a:rPr>
+              <a:t>관리자 로그인</a:t>
+            </a:r>
+            <a:endParaRPr lang="en-US" sz="1600" dirty="0"/>
+          </a:p>
+        </p:txBody>
+      </p:sp>
+      <p:sp>
+        <p:nvSpPr>
+          <p:cNvPr id="8" name="Text 6"/>
+          <p:cNvSpPr txBox="1"/>
+          <p:nvPr/>
+        </p:nvSpPr>
+        <p:spPr>
+          <a:xfrm>
+            <a:off x="3474720" y="1783080"/>
+            <a:ext cx="2148840" cy="2560320"/>
+          </a:xfrm>
+          <a:prstGeom prst="rect">
+            <a:avLst/>
+          </a:prstGeom>
+          <a:noFill/>
+          <a:ln/>
+        </p:spPr>
+        <p:txBody>
+          <a:bodyPr wrap="square" lIns="0" tIns="0" rIns="0" bIns="0" rtlCol="0" anchor="t"/>
+          <a:lstStyle/>
+          <a:p>
+            <a:pPr marL="0" indent="0">
+              <a:spcAft>
+                <a:spcPts val="400"/>
+              </a:spcAft>
+              <a:buNone/>
+            </a:pPr>
+            <a:r>
+              <a:rPr lang="en-US" sz="1300" dirty="0">
+                <a:solidFill>
+                  <a:srgbClr val="1F2937"/>
+                </a:solidFill>
+                <a:latin typeface="Malgun Gothic" pitchFamily="34" charset="0"/>
+                <a:ea typeface="Malgun Gothic" pitchFamily="34" charset="-122"/>
+                <a:cs typeface="Malgun Gothic" pitchFamily="34" charset="-120"/>
+              </a:rPr>
+              <a:t>ID/PW 로그인과 BCrypt 해시, HttpOnly 세션 쿠키, CSRF 토큰을 쓰고 연속 실패하면 잠급니다.</a:t>
+            </a:r>
+            <a:endParaRPr lang="en-US" sz="1300" dirty="0"/>
+          </a:p>
+        </p:txBody>
+      </p:sp>
+      <p:sp>
+        <p:nvSpPr>
+          <p:cNvPr id="9" name="Shape 7"/>
+          <p:cNvSpPr/>
+          <p:nvPr/>
+        </p:nvSpPr>
+        <p:spPr>
+          <a:xfrm>
+            <a:off x="6035040" y="1280160"/>
+            <a:ext cx="2560320" cy="3200400"/>
+          </a:xfrm>
+          <a:prstGeom prst="roundRect">
+            <a:avLst>
+              <a:gd name="adj" fmla="val 2857"/>
+            </a:avLst>
+          </a:prstGeom>
+          <a:solidFill>
+            <a:srgbClr val="F3F4F6"/>
+          </a:solidFill>
+          <a:ln w="12700">
+            <a:solidFill>
+              <a:srgbClr val="F3F4F6"/>
+            </a:solidFill>
+            <a:prstDash val="solid"/>
+          </a:ln>
+        </p:spPr>
+        <p:txBody>
+          <a:bodyPr/>
+          <a:lstStyle/>
+          <a:p>
+            <a:endParaRPr lang="ko-KR" altLang="en-US"/>
+          </a:p>
+        </p:txBody>
+      </p:sp>
+      <p:sp>
+        <p:nvSpPr>
+          <p:cNvPr id="10" name="Text 8"/>
+          <p:cNvSpPr txBox="1"/>
+          <p:nvPr/>
+        </p:nvSpPr>
+        <p:spPr>
+          <a:xfrm>
+            <a:off x="6217920" y="1389888"/>
+            <a:ext cx="2194560" cy="365760"/>
+          </a:xfrm>
+          <a:prstGeom prst="rect">
+            <a:avLst/>
+          </a:prstGeom>
+          <a:noFill/>
+          <a:ln/>
+        </p:spPr>
+        <p:txBody>
+          <a:bodyPr wrap="square" lIns="0" tIns="0" rIns="0" bIns="0" rtlCol="0" anchor="ctr"/>
+          <a:lstStyle/>
+          <a:p>
+            <a:pPr marL="0" indent="0">
+              <a:buNone/>
+            </a:pPr>
+            <a:r>
+              <a:rPr lang="en-US" sz="1600" b="1" dirty="0">
+                <a:solidFill>
+                  <a:srgbClr val="14213D"/>
+                </a:solidFill>
+                <a:latin typeface="Malgun Gothic" pitchFamily="34" charset="0"/>
+                <a:ea typeface="Malgun Gothic" pitchFamily="34" charset="-122"/>
+                <a:cs typeface="Malgun Gothic" pitchFamily="34" charset="-120"/>
+              </a:rPr>
+              <a:t>신고는 조작될 수 있다</a:t>
+            </a:r>
+            <a:endParaRPr lang="en-US" sz="1600" dirty="0"/>
+          </a:p>
+        </p:txBody>
+      </p:sp>
+      <p:sp>
+        <p:nvSpPr>
+          <p:cNvPr id="11" name="Text 9"/>
+          <p:cNvSpPr txBox="1"/>
+          <p:nvPr/>
+        </p:nvSpPr>
+        <p:spPr>
+          <a:xfrm>
+            <a:off x="6217920" y="1783080"/>
+            <a:ext cx="2194560" cy="2560320"/>
+          </a:xfrm>
+          <a:prstGeom prst="rect">
+            <a:avLst/>
+          </a:prstGeom>
+          <a:noFill/>
+          <a:ln/>
+        </p:spPr>
+        <p:txBody>
+          <a:bodyPr wrap="square" lIns="0" tIns="0" rIns="0" bIns="0" rtlCol="0" anchor="t"/>
+          <a:lstStyle/>
+          <a:p>
+            <a:pPr marL="0" indent="0">
+              <a:spcAft>
+                <a:spcPts val="400"/>
+              </a:spcAft>
+              <a:buNone/>
+            </a:pPr>
+            <a:r>
+              <a:rPr lang="en-US" sz="1300" dirty="0">
+                <a:solidFill>
+                  <a:srgbClr val="1F2937"/>
+                </a:solidFill>
+                <a:latin typeface="Malgun Gothic" pitchFamily="34" charset="0"/>
+                <a:ea typeface="Malgun Gothic" pitchFamily="34" charset="-122"/>
+                <a:cs typeface="Malgun Gothic" pitchFamily="34" charset="-120"/>
+              </a:rPr>
+              <a:t>신고 본문은 외부 텍스트로 취급하고 개인정보를 가려 저장합니다. 신고 키는 관리자 키와 분리했습니다.</a:t>
+            </a:r>
+            <a:endParaRPr lang="en-US" sz="1300" dirty="0"/>
+          </a:p>
+        </p:txBody>
+      </p:sp>
+      <p:sp>
+        <p:nvSpPr>
+          <p:cNvPr id="25" name="Slide Number Placeholder 0"/>
+          <p:cNvSpPr>
+            <a:spLocks noGrp="1"/>
+          </p:cNvSpPr>
+          <p:nvPr>
+            <p:ph type="sldNum" sz="quarter" idx="4294967295"/>
+          </p:nvPr>
+        </p:nvSpPr>
+        <p:spPr>
+          <a:xfrm>
+            <a:off x="8321040" y="4800600"/>
+            <a:ext cx="457200" cy="274320"/>
+          </a:xfrm>
+          <a:prstGeom prst="rect">
+            <a:avLst/>
+          </a:prstGeom>
+          <a:extLst>
+            <a:ext uri="{C572A759-6A51-4108-AA02-DFA0A04FC94B}">
+              <ma14:wrappingTextBoxFlag xmlns="" xmlns:ma14="http://schemas.microsoft.com/office/mac/drawingml/2011/main" val="0"/>
+            </a:ext>
+          </a:extLst>
+        </p:spPr>
+        <p:txBody>
+          <a:bodyPr/>
+          <a:lstStyle>
+            <a:lvl1pPr>
+              <a:defRPr sz="1000">
+                <a:solidFill>
+                  <a:srgbClr val="6B7280"/>
+                </a:solidFill>
+                <a:latin typeface="Malgun Gothic"/>
+                <a:ea typeface="Malgun Gothic"/>
+                <a:cs typeface="Malgun Gothic"/>
+              </a:defRPr>
+            </a:lvl1pPr>
+          </a:lstStyle>
+          <a:p>
+            <a:pPr algn="l"/>
+            <a:fld id="{F7021451-1387-4CA6-816F-3879F97B5CBC}" type="slidenum">
+              <a:rPr lang="en-US" b="0"/>
+              <a:t>10</a:t>
+            </a:fld>
+            <a:endParaRPr lang="en-US"/>
+          </a:p>
+        </p:txBody>
+      </p:sp>
+    </p:spTree>
+  </p:cSld>
+  <p:clrMapOvr>
+    <a:masterClrMapping/>
+  </p:clrMapOvr>
+</p:sld>
+</file>
+
+<file path=ppt/slides/slide11.xml><?xml version="1.0" encoding="utf-8"?>
 <p:sld xmlns:a="http://schemas.openxmlformats.org/drawingml/2006/main" xmlns:r="http://schemas.openxmlformats.org/officeDocument/2006/relationships" xmlns:p="http://schemas.openxmlformats.org/presentationml/2006/main">
   <p:cSld name="Slide 10">
     <p:spTree>
@@ -2261,9 +2309,20 @@
           <a:bodyPr wrap="square" lIns="0" tIns="0" rIns="0" bIns="0" rtlCol="0" anchor="ctr"/>
           <a:lstStyle/>
           <a:p>
-            <a:pPr indent="0" marL="0">
-              <a:buNone/>
-            </a:pPr>
+            <a:pPr marL="0" indent="0">
+              <a:buNone/>
+            </a:pPr>
+            <a:r>
+              <a:rPr lang="en-US" sz="2800" b="1" dirty="0" err="1">
+                <a:solidFill>
+                  <a:srgbClr val="14213D"/>
+                </a:solidFill>
+                <a:latin typeface="Malgun Gothic" pitchFamily="34" charset="0"/>
+                <a:ea typeface="Malgun Gothic" pitchFamily="34" charset="-122"/>
+                <a:cs typeface="Malgun Gothic" pitchFamily="34" charset="-120"/>
+              </a:rPr>
+              <a:t>운영</a:t>
+            </a:r>
             <a:r>
               <a:rPr lang="en-US" sz="2800" b="1" dirty="0">
                 <a:solidFill>
@@ -2273,7 +2332,18 @@
                 <a:ea typeface="Malgun Gothic" pitchFamily="34" charset="-122"/>
                 <a:cs typeface="Malgun Gothic" pitchFamily="34" charset="-120"/>
               </a:rPr>
-              <a:t>운영 구성 (egov 개발서버)</a:t>
+              <a:t> </a:t>
+            </a:r>
+            <a:r>
+              <a:rPr lang="en-US" sz="2800" b="1" dirty="0" err="1">
+                <a:solidFill>
+                  <a:srgbClr val="14213D"/>
+                </a:solidFill>
+                <a:latin typeface="Malgun Gothic" pitchFamily="34" charset="0"/>
+                <a:ea typeface="Malgun Gothic" pitchFamily="34" charset="-122"/>
+                <a:cs typeface="Malgun Gothic" pitchFamily="34" charset="-120"/>
+              </a:rPr>
+              <a:t>구성</a:t>
             </a:r>
             <a:endParaRPr lang="en-US" sz="2800" dirty="0"/>
           </a:p>
@@ -2305,6 +2375,13 @@
             <a:prstDash val="solid"/>
           </a:ln>
         </p:spPr>
+        <p:txBody>
+          <a:bodyPr/>
+          <a:lstStyle/>
+          <a:p>
+            <a:endParaRPr lang="ko-KR" altLang="en-US"/>
+          </a:p>
+        </p:txBody>
       </p:sp>
       <p:sp>
         <p:nvSpPr>
@@ -2327,7 +2404,7 @@
           <a:bodyPr wrap="square" lIns="635" tIns="635" rIns="635" bIns="635" rtlCol="0" anchor="ctr"/>
           <a:lstStyle/>
           <a:p>
-            <a:pPr algn="ctr" indent="0" marL="0">
+            <a:pPr marL="0" indent="0" algn="ctr">
               <a:buNone/>
             </a:pPr>
             <a:r>
@@ -2371,6 +2448,13 @@
             <a:prstDash val="solid"/>
           </a:ln>
         </p:spPr>
+        <p:txBody>
+          <a:bodyPr/>
+          <a:lstStyle/>
+          <a:p>
+            <a:endParaRPr lang="ko-KR" altLang="en-US"/>
+          </a:p>
+        </p:txBody>
       </p:sp>
       <p:sp>
         <p:nvSpPr>
@@ -2393,7 +2477,7 @@
           <a:bodyPr wrap="square" lIns="635" tIns="635" rIns="635" bIns="635" rtlCol="0" anchor="ctr"/>
           <a:lstStyle/>
           <a:p>
-            <a:pPr algn="ctr" indent="0" marL="0">
+            <a:pPr marL="0" indent="0" algn="ctr">
               <a:buNone/>
             </a:pPr>
             <a:r>
@@ -2410,7 +2494,7 @@
             <a:endParaRPr lang="en-US" sz="1300" dirty="0"/>
           </a:p>
           <a:p>
-            <a:pPr algn="ctr" indent="0" marL="0">
+            <a:pPr marL="0" indent="0" algn="ctr">
               <a:buNone/>
             </a:pPr>
             <a:r>
@@ -2454,6 +2538,13 @@
             <a:prstDash val="solid"/>
           </a:ln>
         </p:spPr>
+        <p:txBody>
+          <a:bodyPr/>
+          <a:lstStyle/>
+          <a:p>
+            <a:endParaRPr lang="ko-KR" altLang="en-US"/>
+          </a:p>
+        </p:txBody>
       </p:sp>
       <p:sp>
         <p:nvSpPr>
@@ -2476,7 +2567,7 @@
           <a:bodyPr wrap="square" lIns="635" tIns="635" rIns="635" bIns="635" rtlCol="0" anchor="ctr"/>
           <a:lstStyle/>
           <a:p>
-            <a:pPr algn="ctr" indent="0" marL="0">
+            <a:pPr marL="0" indent="0" algn="ctr">
               <a:buNone/>
             </a:pPr>
             <a:r>
@@ -2493,7 +2584,7 @@
             <a:endParaRPr lang="en-US" sz="1300" dirty="0"/>
           </a:p>
           <a:p>
-            <a:pPr algn="ctr" indent="0" marL="0">
+            <a:pPr marL="0" indent="0" algn="ctr">
               <a:buNone/>
             </a:pPr>
             <a:r>
@@ -2534,6 +2625,13 @@
             <a:tailEnd type="triangle"/>
           </a:ln>
         </p:spPr>
+        <p:txBody>
+          <a:bodyPr/>
+          <a:lstStyle/>
+          <a:p>
+            <a:endParaRPr lang="ko-KR" altLang="en-US"/>
+          </a:p>
+        </p:txBody>
       </p:sp>
       <p:sp>
         <p:nvSpPr>
@@ -2558,6 +2656,13 @@
             <a:tailEnd type="triangle"/>
           </a:ln>
         </p:spPr>
+        <p:txBody>
+          <a:bodyPr/>
+          <a:lstStyle/>
+          <a:p>
+            <a:endParaRPr lang="ko-KR" altLang="en-US"/>
+          </a:p>
+        </p:txBody>
       </p:sp>
       <p:sp>
         <p:nvSpPr>
@@ -2585,6 +2690,13 @@
             <a:prstDash val="solid"/>
           </a:ln>
         </p:spPr>
+        <p:txBody>
+          <a:bodyPr/>
+          <a:lstStyle/>
+          <a:p>
+            <a:endParaRPr lang="ko-KR" altLang="en-US"/>
+          </a:p>
+        </p:txBody>
       </p:sp>
       <p:sp>
         <p:nvSpPr>
@@ -2607,7 +2719,7 @@
           <a:bodyPr wrap="square" lIns="635" tIns="635" rIns="635" bIns="635" rtlCol="0" anchor="ctr"/>
           <a:lstStyle/>
           <a:p>
-            <a:pPr algn="ctr" indent="0" marL="0">
+            <a:pPr marL="0" indent="0" algn="ctr">
               <a:buNone/>
             </a:pPr>
             <a:r>
@@ -2624,7 +2736,7 @@
             <a:endParaRPr lang="en-US" sz="1300" dirty="0"/>
           </a:p>
           <a:p>
-            <a:pPr algn="ctr" indent="0" marL="0">
+            <a:pPr marL="0" indent="0" algn="ctr">
               <a:buNone/>
             </a:pPr>
             <a:r>
@@ -2665,6 +2777,13 @@
             <a:tailEnd type="triangle"/>
           </a:ln>
         </p:spPr>
+        <p:txBody>
+          <a:bodyPr/>
+          <a:lstStyle/>
+          <a:p>
+            <a:endParaRPr lang="ko-KR" altLang="en-US"/>
+          </a:p>
+        </p:txBody>
       </p:sp>
       <p:sp>
         <p:nvSpPr>
@@ -2692,6 +2811,13 @@
             <a:prstDash val="solid"/>
           </a:ln>
         </p:spPr>
+        <p:txBody>
+          <a:bodyPr/>
+          <a:lstStyle/>
+          <a:p>
+            <a:endParaRPr lang="ko-KR" altLang="en-US"/>
+          </a:p>
+        </p:txBody>
       </p:sp>
       <p:sp>
         <p:nvSpPr>
@@ -2714,7 +2840,7 @@
           <a:bodyPr wrap="square" lIns="635" tIns="635" rIns="635" bIns="635" rtlCol="0" anchor="ctr"/>
           <a:lstStyle/>
           <a:p>
-            <a:pPr algn="ctr" indent="0" marL="0">
+            <a:pPr marL="0" indent="0" algn="ctr">
               <a:buNone/>
             </a:pPr>
             <a:r>
@@ -2726,7 +2852,7 @@
                 <a:ea typeface="Malgun Gothic" pitchFamily="34" charset="-122"/>
                 <a:cs typeface="Malgun Gothic" pitchFamily="34" charset="-120"/>
               </a:rPr>
-              <a:t>Gemini API</a:t>
+              <a:t>LLM API</a:t>
             </a:r>
             <a:endParaRPr lang="en-US" sz="1300" dirty="0"/>
           </a:p>
@@ -2755,6 +2881,13 @@
             <a:tailEnd type="triangle"/>
           </a:ln>
         </p:spPr>
+        <p:txBody>
+          <a:bodyPr/>
+          <a:lstStyle/>
+          <a:p>
+            <a:endParaRPr lang="ko-KR" altLang="en-US"/>
+          </a:p>
+        </p:txBody>
       </p:sp>
       <p:sp>
         <p:nvSpPr>
@@ -2777,7 +2910,7 @@
           <a:bodyPr wrap="square" lIns="0" tIns="0" rIns="0" bIns="0" rtlCol="0" anchor="ctr"/>
           <a:lstStyle/>
           <a:p>
-            <a:pPr indent="0" marL="0">
+            <a:pPr marL="0" indent="0">
               <a:buNone/>
             </a:pPr>
             <a:r>
@@ -2816,7 +2949,7 @@
           <a:bodyPr wrap="square" lIns="0" tIns="0" rIns="0" bIns="0" rtlCol="0" anchor="ctr"/>
           <a:lstStyle/>
           <a:p>
-            <a:pPr indent="0" marL="0">
+            <a:pPr marL="0" indent="0">
               <a:buNone/>
             </a:pPr>
             <a:r>
@@ -2854,7 +2987,7 @@
           </a:prstGeom>
           <a:extLst>
             <a:ext uri="{C572A759-6A51-4108-AA02-DFA0A04FC94B}">
-              <ma14:wrappingTextBoxFlag xmlns:ma14="http://schemas.microsoft.com/office/mac/drawingml/2011/main" val="0"/>
+              <ma14:wrappingTextBoxFlag xmlns="" xmlns:ma14="http://schemas.microsoft.com/office/mac/drawingml/2011/main" val="0"/>
             </a:ext>
           </a:extLst>
         </p:spPr>
@@ -2875,829 +3008,7 @@
           <a:p>
             <a:pPr algn="l"/>
             <a:fld id="{F7021451-1387-4CA6-816F-3879F97B5CBC}" type="slidenum">
-              <a:rPr b="0" lang="en-US"/>
-              <a:t>10</a:t>
-            </a:fld>
-            <a:endParaRPr lang="en-US"/>
-          </a:p>
-        </p:txBody>
-      </p:sp>
-    </p:spTree>
-  </p:cSld>
-  <p:clrMapOvr>
-    <a:masterClrMapping/>
-  </p:clrMapOvr>
-</p:sld>
-</file>
-
-<file path=ppt/slides/slide11.xml><?xml version="1.0" encoding="utf-8"?>
-<p:sld xmlns:a="http://schemas.openxmlformats.org/drawingml/2006/main" xmlns:r="http://schemas.openxmlformats.org/officeDocument/2006/relationships" xmlns:p="http://schemas.openxmlformats.org/presentationml/2006/main">
-  <p:cSld name="Slide 11">
-    <p:spTree>
-      <p:nvGrpSpPr>
-        <p:cNvPr id="1" name=""/>
-        <p:cNvGrpSpPr/>
-        <p:nvPr/>
-      </p:nvGrpSpPr>
-      <p:grpSpPr>
-        <a:xfrm>
-          <a:off x="0" y="0"/>
-          <a:ext cx="0" cy="0"/>
-          <a:chOff x="0" y="0"/>
-          <a:chExt cx="0" cy="0"/>
-        </a:xfrm>
-      </p:grpSpPr>
-      <p:sp>
-        <p:nvSpPr>
-          <p:cNvPr id="2" name="Text 0"/>
-          <p:cNvSpPr txBox="1"/>
-          <p:nvPr/>
-        </p:nvSpPr>
-        <p:spPr>
-          <a:xfrm>
-            <a:off x="548640" y="320040"/>
-            <a:ext cx="8046720" cy="640080"/>
-          </a:xfrm>
-          <a:prstGeom prst="rect">
-            <a:avLst/>
-          </a:prstGeom>
-          <a:noFill/>
-          <a:ln/>
-        </p:spPr>
-        <p:txBody>
-          <a:bodyPr wrap="square" lIns="0" tIns="0" rIns="0" bIns="0" rtlCol="0" anchor="ctr"/>
-          <a:lstStyle/>
-          <a:p>
-            <a:pPr indent="0" marL="0">
-              <a:buNone/>
-            </a:pPr>
-            <a:r>
-              <a:rPr lang="en-US" sz="2800" b="1" dirty="0">
-                <a:solidFill>
-                  <a:srgbClr val="14213D"/>
-                </a:solidFill>
-                <a:latin typeface="Malgun Gothic" pitchFamily="34" charset="0"/>
-                <a:ea typeface="Malgun Gothic" pitchFamily="34" charset="-122"/>
-                <a:cs typeface="Malgun Gothic" pitchFamily="34" charset="-120"/>
-              </a:rPr>
-              <a:t>시연 시나리오</a:t>
-            </a:r>
-            <a:endParaRPr lang="en-US" sz="2800" dirty="0"/>
-          </a:p>
-        </p:txBody>
-      </p:sp>
-      <p:sp>
-        <p:nvSpPr>
-          <p:cNvPr id="3" name="Shape 1"/>
-          <p:cNvSpPr/>
-          <p:nvPr/>
-        </p:nvSpPr>
-        <p:spPr>
-          <a:xfrm>
-            <a:off x="548640" y="1188720"/>
-            <a:ext cx="411480" cy="411480"/>
-          </a:xfrm>
-          <a:prstGeom prst="ellipse">
-            <a:avLst/>
-          </a:prstGeom>
-          <a:solidFill>
-            <a:srgbClr val="14213D"/>
-          </a:solidFill>
-          <a:ln w="12700">
-            <a:solidFill>
-              <a:srgbClr val="14213D"/>
-            </a:solidFill>
-            <a:prstDash val="solid"/>
-          </a:ln>
-        </p:spPr>
-      </p:sp>
-      <p:sp>
-        <p:nvSpPr>
-          <p:cNvPr id="4" name="Text 2"/>
-          <p:cNvSpPr txBox="1"/>
-          <p:nvPr/>
-        </p:nvSpPr>
-        <p:spPr>
-          <a:xfrm>
-            <a:off x="548640" y="1188720"/>
-            <a:ext cx="411480" cy="411480"/>
-          </a:xfrm>
-          <a:prstGeom prst="rect">
-            <a:avLst/>
-          </a:prstGeom>
-          <a:noFill/>
-          <a:ln/>
-        </p:spPr>
-        <p:txBody>
-          <a:bodyPr wrap="square" lIns="0" tIns="0" rIns="0" bIns="0" rtlCol="0" anchor="ctr"/>
-          <a:lstStyle/>
-          <a:p>
-            <a:pPr algn="ctr" indent="0" marL="0">
-              <a:buNone/>
-            </a:pPr>
-            <a:r>
-              <a:rPr lang="en-US" sz="1400" b="1" dirty="0">
-                <a:solidFill>
-                  <a:srgbClr val="FFFFFF"/>
-                </a:solidFill>
-                <a:latin typeface="Malgun Gothic" pitchFamily="34" charset="0"/>
-                <a:ea typeface="Malgun Gothic" pitchFamily="34" charset="-122"/>
-                <a:cs typeface="Malgun Gothic" pitchFamily="34" charset="-120"/>
-              </a:rPr>
-              <a:t>1</a:t>
-            </a:r>
-            <a:endParaRPr lang="en-US" sz="1400" dirty="0"/>
-          </a:p>
-        </p:txBody>
-      </p:sp>
-      <p:sp>
-        <p:nvSpPr>
-          <p:cNvPr id="5" name="Text 3"/>
-          <p:cNvSpPr txBox="1"/>
-          <p:nvPr/>
-        </p:nvSpPr>
-        <p:spPr>
-          <a:xfrm>
-            <a:off x="1188720" y="1188720"/>
-            <a:ext cx="3657600" cy="411480"/>
-          </a:xfrm>
-          <a:prstGeom prst="rect">
-            <a:avLst/>
-          </a:prstGeom>
-          <a:noFill/>
-          <a:ln/>
-        </p:spPr>
-        <p:txBody>
-          <a:bodyPr wrap="square" lIns="0" tIns="0" rIns="0" bIns="0" rtlCol="0" anchor="ctr"/>
-          <a:lstStyle/>
-          <a:p>
-            <a:pPr indent="0" marL="0">
-              <a:buNone/>
-            </a:pPr>
-            <a:r>
-              <a:rPr lang="en-US" sz="1400" b="1" dirty="0">
-                <a:solidFill>
-                  <a:srgbClr val="1F2937"/>
-                </a:solidFill>
-                <a:latin typeface="Malgun Gothic" pitchFamily="34" charset="0"/>
-                <a:ea typeface="Malgun Gothic" pitchFamily="34" charset="-122"/>
-                <a:cs typeface="Malgun Gothic" pitchFamily="34" charset="-120"/>
-              </a:rPr>
-              <a:t>대시보드 접속, ID/PW 로그인</a:t>
-            </a:r>
-            <a:endParaRPr lang="en-US" sz="1400" dirty="0"/>
-          </a:p>
-        </p:txBody>
-      </p:sp>
-      <p:sp>
-        <p:nvSpPr>
-          <p:cNvPr id="6" name="Text 4"/>
-          <p:cNvSpPr txBox="1"/>
-          <p:nvPr/>
-        </p:nvSpPr>
-        <p:spPr>
-          <a:xfrm>
-            <a:off x="4937760" y="1188720"/>
-            <a:ext cx="3657600" cy="411480"/>
-          </a:xfrm>
-          <a:prstGeom prst="rect">
-            <a:avLst/>
-          </a:prstGeom>
-          <a:noFill/>
-          <a:ln/>
-        </p:spPr>
-        <p:txBody>
-          <a:bodyPr wrap="square" lIns="0" tIns="0" rIns="0" bIns="0" rtlCol="0" anchor="ctr"/>
-          <a:lstStyle/>
-          <a:p>
-            <a:pPr indent="0" marL="0">
-              <a:buNone/>
-            </a:pPr>
-            <a:r>
-              <a:rPr lang="en-US" sz="1300" dirty="0">
-                <a:solidFill>
-                  <a:srgbClr val="6B7280"/>
-                </a:solidFill>
-                <a:latin typeface="Malgun Gothic" pitchFamily="34" charset="0"/>
-                <a:ea typeface="Malgun Gothic" pitchFamily="34" charset="-122"/>
-                <a:cs typeface="Malgun Gothic" pitchFamily="34" charset="-120"/>
-              </a:rPr>
-              <a:t>룰 표와 적중 열 확인</a:t>
-            </a:r>
-            <a:endParaRPr lang="en-US" sz="1300" dirty="0"/>
-          </a:p>
-        </p:txBody>
-      </p:sp>
-      <p:sp>
-        <p:nvSpPr>
-          <p:cNvPr id="7" name="Shape 5"/>
-          <p:cNvSpPr/>
-          <p:nvPr/>
-        </p:nvSpPr>
-        <p:spPr>
-          <a:xfrm>
-            <a:off x="548640" y="1828800"/>
-            <a:ext cx="411480" cy="411480"/>
-          </a:xfrm>
-          <a:prstGeom prst="ellipse">
-            <a:avLst/>
-          </a:prstGeom>
-          <a:solidFill>
-            <a:srgbClr val="14213D"/>
-          </a:solidFill>
-          <a:ln w="12700">
-            <a:solidFill>
-              <a:srgbClr val="14213D"/>
-            </a:solidFill>
-            <a:prstDash val="solid"/>
-          </a:ln>
-        </p:spPr>
-      </p:sp>
-      <p:sp>
-        <p:nvSpPr>
-          <p:cNvPr id="8" name="Text 6"/>
-          <p:cNvSpPr txBox="1"/>
-          <p:nvPr/>
-        </p:nvSpPr>
-        <p:spPr>
-          <a:xfrm>
-            <a:off x="548640" y="1828800"/>
-            <a:ext cx="411480" cy="411480"/>
-          </a:xfrm>
-          <a:prstGeom prst="rect">
-            <a:avLst/>
-          </a:prstGeom>
-          <a:noFill/>
-          <a:ln/>
-        </p:spPr>
-        <p:txBody>
-          <a:bodyPr wrap="square" lIns="0" tIns="0" rIns="0" bIns="0" rtlCol="0" anchor="ctr"/>
-          <a:lstStyle/>
-          <a:p>
-            <a:pPr algn="ctr" indent="0" marL="0">
-              <a:buNone/>
-            </a:pPr>
-            <a:r>
-              <a:rPr lang="en-US" sz="1400" b="1" dirty="0">
-                <a:solidFill>
-                  <a:srgbClr val="FFFFFF"/>
-                </a:solidFill>
-                <a:latin typeface="Malgun Gothic" pitchFamily="34" charset="0"/>
-                <a:ea typeface="Malgun Gothic" pitchFamily="34" charset="-122"/>
-                <a:cs typeface="Malgun Gothic" pitchFamily="34" charset="-120"/>
-              </a:rPr>
-              <a:t>2</a:t>
-            </a:r>
-            <a:endParaRPr lang="en-US" sz="1400" dirty="0"/>
-          </a:p>
-        </p:txBody>
-      </p:sp>
-      <p:sp>
-        <p:nvSpPr>
-          <p:cNvPr id="9" name="Text 7"/>
-          <p:cNvSpPr txBox="1"/>
-          <p:nvPr/>
-        </p:nvSpPr>
-        <p:spPr>
-          <a:xfrm>
-            <a:off x="1188720" y="1828800"/>
-            <a:ext cx="3657600" cy="411480"/>
-          </a:xfrm>
-          <a:prstGeom prst="rect">
-            <a:avLst/>
-          </a:prstGeom>
-          <a:noFill/>
-          <a:ln/>
-        </p:spPr>
-        <p:txBody>
-          <a:bodyPr wrap="square" lIns="0" tIns="0" rIns="0" bIns="0" rtlCol="0" anchor="ctr"/>
-          <a:lstStyle/>
-          <a:p>
-            <a:pPr indent="0" marL="0">
-              <a:buNone/>
-            </a:pPr>
-            <a:r>
-              <a:rPr lang="en-US" sz="1400" b="1" dirty="0">
-                <a:solidFill>
-                  <a:srgbClr val="1F2937"/>
-                </a:solidFill>
-                <a:latin typeface="Malgun Gothic" pitchFamily="34" charset="0"/>
-                <a:ea typeface="Malgun Gothic" pitchFamily="34" charset="-122"/>
-                <a:cs typeface="Malgun Gothic" pitchFamily="34" charset="-120"/>
-              </a:rPr>
-              <a:t>룰의 [분석] 클릭</a:t>
-            </a:r>
-            <a:endParaRPr lang="en-US" sz="1400" dirty="0"/>
-          </a:p>
-        </p:txBody>
-      </p:sp>
-      <p:sp>
-        <p:nvSpPr>
-          <p:cNvPr id="10" name="Text 8"/>
-          <p:cNvSpPr txBox="1"/>
-          <p:nvPr/>
-        </p:nvSpPr>
-        <p:spPr>
-          <a:xfrm>
-            <a:off x="4937760" y="1828800"/>
-            <a:ext cx="3657600" cy="411480"/>
-          </a:xfrm>
-          <a:prstGeom prst="rect">
-            <a:avLst/>
-          </a:prstGeom>
-          <a:noFill/>
-          <a:ln/>
-        </p:spPr>
-        <p:txBody>
-          <a:bodyPr wrap="square" lIns="0" tIns="0" rIns="0" bIns="0" rtlCol="0" anchor="ctr"/>
-          <a:lstStyle/>
-          <a:p>
-            <a:pPr indent="0" marL="0">
-              <a:buNone/>
-            </a:pPr>
-            <a:r>
-              <a:rPr lang="en-US" sz="1300" dirty="0">
-                <a:solidFill>
-                  <a:srgbClr val="6B7280"/>
-                </a:solidFill>
-                <a:latin typeface="Malgun Gothic" pitchFamily="34" charset="0"/>
-                <a:ea typeface="Malgun Gothic" pitchFamily="34" charset="-122"/>
-                <a:cs typeface="Malgun Gothic" pitchFamily="34" charset="-120"/>
-              </a:rPr>
-              <a:t>팝업에서 샘플과 LLM 조언 확인</a:t>
-            </a:r>
-            <a:endParaRPr lang="en-US" sz="1300" dirty="0"/>
-          </a:p>
-        </p:txBody>
-      </p:sp>
-      <p:sp>
-        <p:nvSpPr>
-          <p:cNvPr id="11" name="Shape 9"/>
-          <p:cNvSpPr/>
-          <p:nvPr/>
-        </p:nvSpPr>
-        <p:spPr>
-          <a:xfrm>
-            <a:off x="548640" y="2468880"/>
-            <a:ext cx="411480" cy="411480"/>
-          </a:xfrm>
-          <a:prstGeom prst="ellipse">
-            <a:avLst/>
-          </a:prstGeom>
-          <a:solidFill>
-            <a:srgbClr val="14213D"/>
-          </a:solidFill>
-          <a:ln w="12700">
-            <a:solidFill>
-              <a:srgbClr val="14213D"/>
-            </a:solidFill>
-            <a:prstDash val="solid"/>
-          </a:ln>
-        </p:spPr>
-      </p:sp>
-      <p:sp>
-        <p:nvSpPr>
-          <p:cNvPr id="12" name="Text 10"/>
-          <p:cNvSpPr txBox="1"/>
-          <p:nvPr/>
-        </p:nvSpPr>
-        <p:spPr>
-          <a:xfrm>
-            <a:off x="548640" y="2468880"/>
-            <a:ext cx="411480" cy="411480"/>
-          </a:xfrm>
-          <a:prstGeom prst="rect">
-            <a:avLst/>
-          </a:prstGeom>
-          <a:noFill/>
-          <a:ln/>
-        </p:spPr>
-        <p:txBody>
-          <a:bodyPr wrap="square" lIns="0" tIns="0" rIns="0" bIns="0" rtlCol="0" anchor="ctr"/>
-          <a:lstStyle/>
-          <a:p>
-            <a:pPr algn="ctr" indent="0" marL="0">
-              <a:buNone/>
-            </a:pPr>
-            <a:r>
-              <a:rPr lang="en-US" sz="1400" b="1" dirty="0">
-                <a:solidFill>
-                  <a:srgbClr val="FFFFFF"/>
-                </a:solidFill>
-                <a:latin typeface="Malgun Gothic" pitchFamily="34" charset="0"/>
-                <a:ea typeface="Malgun Gothic" pitchFamily="34" charset="-122"/>
-                <a:cs typeface="Malgun Gothic" pitchFamily="34" charset="-120"/>
-              </a:rPr>
-              <a:t>3</a:t>
-            </a:r>
-            <a:endParaRPr lang="en-US" sz="1400" dirty="0"/>
-          </a:p>
-        </p:txBody>
-      </p:sp>
-      <p:sp>
-        <p:nvSpPr>
-          <p:cNvPr id="13" name="Text 11"/>
-          <p:cNvSpPr txBox="1"/>
-          <p:nvPr/>
-        </p:nvSpPr>
-        <p:spPr>
-          <a:xfrm>
-            <a:off x="1188720" y="2468880"/>
-            <a:ext cx="3657600" cy="411480"/>
-          </a:xfrm>
-          <a:prstGeom prst="rect">
-            <a:avLst/>
-          </a:prstGeom>
-          <a:noFill/>
-          <a:ln/>
-        </p:spPr>
-        <p:txBody>
-          <a:bodyPr wrap="square" lIns="0" tIns="0" rIns="0" bIns="0" rtlCol="0" anchor="ctr"/>
-          <a:lstStyle/>
-          <a:p>
-            <a:pPr indent="0" marL="0">
-              <a:buNone/>
-            </a:pPr>
-            <a:r>
-              <a:rPr lang="en-US" sz="1400" b="1" dirty="0">
-                <a:solidFill>
-                  <a:srgbClr val="1F2937"/>
-                </a:solidFill>
-                <a:latin typeface="Malgun Gothic" pitchFamily="34" charset="0"/>
-                <a:ea typeface="Malgun Gothic" pitchFamily="34" charset="-122"/>
-                <a:cs typeface="Malgun Gothic" pitchFamily="34" charset="-120"/>
-              </a:rPr>
-              <a:t>신고 API 호출(curl)</a:t>
-            </a:r>
-            <a:endParaRPr lang="en-US" sz="1400" dirty="0"/>
-          </a:p>
-        </p:txBody>
-      </p:sp>
-      <p:sp>
-        <p:nvSpPr>
-          <p:cNvPr id="14" name="Text 12"/>
-          <p:cNvSpPr txBox="1"/>
-          <p:nvPr/>
-        </p:nvSpPr>
-        <p:spPr>
-          <a:xfrm>
-            <a:off x="4937760" y="2468880"/>
-            <a:ext cx="3657600" cy="411480"/>
-          </a:xfrm>
-          <a:prstGeom prst="rect">
-            <a:avLst/>
-          </a:prstGeom>
-          <a:noFill/>
-          <a:ln/>
-        </p:spPr>
-        <p:txBody>
-          <a:bodyPr wrap="square" lIns="0" tIns="0" rIns="0" bIns="0" rtlCol="0" anchor="ctr"/>
-          <a:lstStyle/>
-          <a:p>
-            <a:pPr indent="0" marL="0">
-              <a:buNone/>
-            </a:pPr>
-            <a:r>
-              <a:rPr lang="en-US" sz="1300" dirty="0">
-                <a:solidFill>
-                  <a:srgbClr val="6B7280"/>
-                </a:solidFill>
-                <a:latin typeface="Malgun Gothic" pitchFamily="34" charset="0"/>
-                <a:ea typeface="Malgun Gothic" pitchFamily="34" charset="-122"/>
-                <a:cs typeface="Malgun Gothic" pitchFamily="34" charset="-120"/>
-              </a:rPr>
-              <a:t>202 접수, 수 초 뒤 신고 탭에 판정 표시</a:t>
-            </a:r>
-            <a:endParaRPr lang="en-US" sz="1300" dirty="0"/>
-          </a:p>
-        </p:txBody>
-      </p:sp>
-      <p:sp>
-        <p:nvSpPr>
-          <p:cNvPr id="15" name="Shape 13"/>
-          <p:cNvSpPr/>
-          <p:nvPr/>
-        </p:nvSpPr>
-        <p:spPr>
-          <a:xfrm>
-            <a:off x="548640" y="3108960"/>
-            <a:ext cx="411480" cy="411480"/>
-          </a:xfrm>
-          <a:prstGeom prst="ellipse">
-            <a:avLst/>
-          </a:prstGeom>
-          <a:solidFill>
-            <a:srgbClr val="14213D"/>
-          </a:solidFill>
-          <a:ln w="12700">
-            <a:solidFill>
-              <a:srgbClr val="14213D"/>
-            </a:solidFill>
-            <a:prstDash val="solid"/>
-          </a:ln>
-        </p:spPr>
-      </p:sp>
-      <p:sp>
-        <p:nvSpPr>
-          <p:cNvPr id="16" name="Text 14"/>
-          <p:cNvSpPr txBox="1"/>
-          <p:nvPr/>
-        </p:nvSpPr>
-        <p:spPr>
-          <a:xfrm>
-            <a:off x="548640" y="3108960"/>
-            <a:ext cx="411480" cy="411480"/>
-          </a:xfrm>
-          <a:prstGeom prst="rect">
-            <a:avLst/>
-          </a:prstGeom>
-          <a:noFill/>
-          <a:ln/>
-        </p:spPr>
-        <p:txBody>
-          <a:bodyPr wrap="square" lIns="0" tIns="0" rIns="0" bIns="0" rtlCol="0" anchor="ctr"/>
-          <a:lstStyle/>
-          <a:p>
-            <a:pPr algn="ctr" indent="0" marL="0">
-              <a:buNone/>
-            </a:pPr>
-            <a:r>
-              <a:rPr lang="en-US" sz="1400" b="1" dirty="0">
-                <a:solidFill>
-                  <a:srgbClr val="FFFFFF"/>
-                </a:solidFill>
-                <a:latin typeface="Malgun Gothic" pitchFamily="34" charset="0"/>
-                <a:ea typeface="Malgun Gothic" pitchFamily="34" charset="-122"/>
-                <a:cs typeface="Malgun Gothic" pitchFamily="34" charset="-120"/>
-              </a:rPr>
-              <a:t>4</a:t>
-            </a:r>
-            <a:endParaRPr lang="en-US" sz="1400" dirty="0"/>
-          </a:p>
-        </p:txBody>
-      </p:sp>
-      <p:sp>
-        <p:nvSpPr>
-          <p:cNvPr id="17" name="Text 15"/>
-          <p:cNvSpPr txBox="1"/>
-          <p:nvPr/>
-        </p:nvSpPr>
-        <p:spPr>
-          <a:xfrm>
-            <a:off x="1188720" y="3108960"/>
-            <a:ext cx="3657600" cy="411480"/>
-          </a:xfrm>
-          <a:prstGeom prst="rect">
-            <a:avLst/>
-          </a:prstGeom>
-          <a:noFill/>
-          <a:ln/>
-        </p:spPr>
-        <p:txBody>
-          <a:bodyPr wrap="square" lIns="0" tIns="0" rIns="0" bIns="0" rtlCol="0" anchor="ctr"/>
-          <a:lstStyle/>
-          <a:p>
-            <a:pPr indent="0" marL="0">
-              <a:buNone/>
-            </a:pPr>
-            <a:r>
-              <a:rPr lang="en-US" sz="1400" b="1" dirty="0">
-                <a:solidFill>
-                  <a:srgbClr val="1F2937"/>
-                </a:solidFill>
-                <a:latin typeface="Malgun Gothic" pitchFamily="34" charset="0"/>
-                <a:ea typeface="Malgun Gothic" pitchFamily="34" charset="-122"/>
-                <a:cs typeface="Malgun Gothic" pitchFamily="34" charset="-120"/>
-              </a:rPr>
-              <a:t>제안 룰 [룰 추가] 승인(수동 모드)</a:t>
-            </a:r>
-            <a:endParaRPr lang="en-US" sz="1400" dirty="0"/>
-          </a:p>
-        </p:txBody>
-      </p:sp>
-      <p:sp>
-        <p:nvSpPr>
-          <p:cNvPr id="18" name="Text 16"/>
-          <p:cNvSpPr txBox="1"/>
-          <p:nvPr/>
-        </p:nvSpPr>
-        <p:spPr>
-          <a:xfrm>
-            <a:off x="4937760" y="3108960"/>
-            <a:ext cx="3657600" cy="411480"/>
-          </a:xfrm>
-          <a:prstGeom prst="rect">
-            <a:avLst/>
-          </a:prstGeom>
-          <a:noFill/>
-          <a:ln/>
-        </p:spPr>
-        <p:txBody>
-          <a:bodyPr wrap="square" lIns="0" tIns="0" rIns="0" bIns="0" rtlCol="0" anchor="ctr"/>
-          <a:lstStyle/>
-          <a:p>
-            <a:pPr indent="0" marL="0">
-              <a:buNone/>
-            </a:pPr>
-            <a:r>
-              <a:rPr lang="en-US" sz="1300" dirty="0">
-                <a:solidFill>
-                  <a:srgbClr val="6B7280"/>
-                </a:solidFill>
-                <a:latin typeface="Malgun Gothic" pitchFamily="34" charset="0"/>
-                <a:ea typeface="Malgun Gothic" pitchFamily="34" charset="-122"/>
-                <a:cs typeface="Malgun Gothic" pitchFamily="34" charset="-120"/>
-              </a:rPr>
-              <a:t>룰 표에 새 룰 등장</a:t>
-            </a:r>
-            <a:endParaRPr lang="en-US" sz="1300" dirty="0"/>
-          </a:p>
-        </p:txBody>
-      </p:sp>
-      <p:sp>
-        <p:nvSpPr>
-          <p:cNvPr id="19" name="Shape 17"/>
-          <p:cNvSpPr/>
-          <p:nvPr/>
-        </p:nvSpPr>
-        <p:spPr>
-          <a:xfrm>
-            <a:off x="548640" y="3749040"/>
-            <a:ext cx="411480" cy="411480"/>
-          </a:xfrm>
-          <a:prstGeom prst="ellipse">
-            <a:avLst/>
-          </a:prstGeom>
-          <a:solidFill>
-            <a:srgbClr val="14213D"/>
-          </a:solidFill>
-          <a:ln w="12700">
-            <a:solidFill>
-              <a:srgbClr val="14213D"/>
-            </a:solidFill>
-            <a:prstDash val="solid"/>
-          </a:ln>
-        </p:spPr>
-      </p:sp>
-      <p:sp>
-        <p:nvSpPr>
-          <p:cNvPr id="20" name="Text 18"/>
-          <p:cNvSpPr txBox="1"/>
-          <p:nvPr/>
-        </p:nvSpPr>
-        <p:spPr>
-          <a:xfrm>
-            <a:off x="548640" y="3749040"/>
-            <a:ext cx="411480" cy="411480"/>
-          </a:xfrm>
-          <a:prstGeom prst="rect">
-            <a:avLst/>
-          </a:prstGeom>
-          <a:noFill/>
-          <a:ln/>
-        </p:spPr>
-        <p:txBody>
-          <a:bodyPr wrap="square" lIns="0" tIns="0" rIns="0" bIns="0" rtlCol="0" anchor="ctr"/>
-          <a:lstStyle/>
-          <a:p>
-            <a:pPr algn="ctr" indent="0" marL="0">
-              <a:buNone/>
-            </a:pPr>
-            <a:r>
-              <a:rPr lang="en-US" sz="1400" b="1" dirty="0">
-                <a:solidFill>
-                  <a:srgbClr val="FFFFFF"/>
-                </a:solidFill>
-                <a:latin typeface="Malgun Gothic" pitchFamily="34" charset="0"/>
-                <a:ea typeface="Malgun Gothic" pitchFamily="34" charset="-122"/>
-                <a:cs typeface="Malgun Gothic" pitchFamily="34" charset="-120"/>
-              </a:rPr>
-              <a:t>5</a:t>
-            </a:r>
-            <a:endParaRPr lang="en-US" sz="1400" dirty="0"/>
-          </a:p>
-        </p:txBody>
-      </p:sp>
-      <p:sp>
-        <p:nvSpPr>
-          <p:cNvPr id="21" name="Text 19"/>
-          <p:cNvSpPr txBox="1"/>
-          <p:nvPr/>
-        </p:nvSpPr>
-        <p:spPr>
-          <a:xfrm>
-            <a:off x="1188720" y="3749040"/>
-            <a:ext cx="3657600" cy="411480"/>
-          </a:xfrm>
-          <a:prstGeom prst="rect">
-            <a:avLst/>
-          </a:prstGeom>
-          <a:noFill/>
-          <a:ln/>
-        </p:spPr>
-        <p:txBody>
-          <a:bodyPr wrap="square" lIns="0" tIns="0" rIns="0" bIns="0" rtlCol="0" anchor="ctr"/>
-          <a:lstStyle/>
-          <a:p>
-            <a:pPr indent="0" marL="0">
-              <a:buNone/>
-            </a:pPr>
-            <a:r>
-              <a:rPr lang="en-US" sz="1400" b="1" dirty="0">
-                <a:solidFill>
-                  <a:srgbClr val="1F2937"/>
-                </a:solidFill>
-                <a:latin typeface="Malgun Gothic" pitchFamily="34" charset="0"/>
-                <a:ea typeface="Malgun Gothic" pitchFamily="34" charset="-122"/>
-                <a:cs typeface="Malgun Gothic" pitchFamily="34" charset="-120"/>
-              </a:rPr>
-              <a:t>SMTP로 테스트 메일 전송</a:t>
-            </a:r>
-            <a:endParaRPr lang="en-US" sz="1400" dirty="0"/>
-          </a:p>
-        </p:txBody>
-      </p:sp>
-      <p:sp>
-        <p:nvSpPr>
-          <p:cNvPr id="22" name="Text 20"/>
-          <p:cNvSpPr txBox="1"/>
-          <p:nvPr/>
-        </p:nvSpPr>
-        <p:spPr>
-          <a:xfrm>
-            <a:off x="4937760" y="3749040"/>
-            <a:ext cx="3657600" cy="411480"/>
-          </a:xfrm>
-          <a:prstGeom prst="rect">
-            <a:avLst/>
-          </a:prstGeom>
-          <a:noFill/>
-          <a:ln/>
-        </p:spPr>
-        <p:txBody>
-          <a:bodyPr wrap="square" lIns="0" tIns="0" rIns="0" bIns="0" rtlCol="0" anchor="ctr"/>
-          <a:lstStyle/>
-          <a:p>
-            <a:pPr indent="0" marL="0">
-              <a:buNone/>
-            </a:pPr>
-            <a:r>
-              <a:rPr lang="en-US" sz="1300" dirty="0">
-                <a:solidFill>
-                  <a:srgbClr val="6B7280"/>
-                </a:solidFill>
-                <a:latin typeface="Malgun Gothic" pitchFamily="34" charset="0"/>
-                <a:ea typeface="Malgun Gothic" pitchFamily="34" charset="-122"/>
-                <a:cs typeface="Malgun Gothic" pitchFamily="34" charset="-120"/>
-              </a:rPr>
-              <a:t>그레이리스팅 450, 재시도 후 통과</a:t>
-            </a:r>
-            <a:endParaRPr lang="en-US" sz="1300" dirty="0"/>
-          </a:p>
-        </p:txBody>
-      </p:sp>
-      <p:sp>
-        <p:nvSpPr>
-          <p:cNvPr id="25" name="Slide Number Placeholder 0"/>
-          <p:cNvSpPr>
-            <a:spLocks noGrp="1"/>
-          </p:cNvSpPr>
-          <p:nvPr>
-            <p:ph type="sldNum" sz="quarter" idx="4294967295"/>
-          </p:nvPr>
-        </p:nvSpPr>
-        <p:spPr>
-          <a:xfrm>
-            <a:off x="8321040" y="4800600"/>
-            <a:ext cx="457200" cy="274320"/>
-          </a:xfrm>
-          <a:prstGeom prst="rect">
-            <a:avLst/>
-          </a:prstGeom>
-          <a:extLst>
-            <a:ext uri="{C572A759-6A51-4108-AA02-DFA0A04FC94B}">
-              <ma14:wrappingTextBoxFlag xmlns:ma14="http://schemas.microsoft.com/office/mac/drawingml/2011/main" val="0"/>
-            </a:ext>
-          </a:extLst>
-        </p:spPr>
-        <p:txBody>
-          <a:bodyPr/>
-          <a:lstStyle>
-            <a:lvl1pPr>
-              <a:defRPr sz="1000">
-                <a:solidFill>
-                  <a:srgbClr val="6B7280"/>
-                </a:solidFill>
-                <a:latin typeface="Malgun Gothic"/>
-                <a:ea typeface="Malgun Gothic"/>
-                <a:cs typeface="Malgun Gothic"/>
-              </a:defRPr>
-            </a:lvl1pPr>
-          </a:lstStyle>
-          <a:p>
-            <a:pPr algn="l"/>
-            <a:fld id="{F7021451-1387-4CA6-816F-3879F97B5CBC}" type="slidenum">
-              <a:rPr b="0" lang="en-US"/>
+              <a:rPr lang="en-US" b="0"/>
               <a:t>11</a:t>
             </a:fld>
             <a:endParaRPr lang="en-US"/>
@@ -3713,494 +3024,6 @@
 </file>
 
 <file path=ppt/slides/slide12.xml><?xml version="1.0" encoding="utf-8"?>
-<p:sld xmlns:a="http://schemas.openxmlformats.org/drawingml/2006/main" xmlns:r="http://schemas.openxmlformats.org/officeDocument/2006/relationships" xmlns:p="http://schemas.openxmlformats.org/presentationml/2006/main">
-  <p:cSld name="Slide 12">
-    <p:spTree>
-      <p:nvGrpSpPr>
-        <p:cNvPr id="1" name=""/>
-        <p:cNvGrpSpPr/>
-        <p:nvPr/>
-      </p:nvGrpSpPr>
-      <p:grpSpPr>
-        <a:xfrm>
-          <a:off x="0" y="0"/>
-          <a:ext cx="0" cy="0"/>
-          <a:chOff x="0" y="0"/>
-          <a:chExt cx="0" cy="0"/>
-        </a:xfrm>
-      </p:grpSpPr>
-      <p:sp>
-        <p:nvSpPr>
-          <p:cNvPr id="2" name="Text 0"/>
-          <p:cNvSpPr txBox="1"/>
-          <p:nvPr/>
-        </p:nvSpPr>
-        <p:spPr>
-          <a:xfrm>
-            <a:off x="548640" y="320040"/>
-            <a:ext cx="8046720" cy="640080"/>
-          </a:xfrm>
-          <a:prstGeom prst="rect">
-            <a:avLst/>
-          </a:prstGeom>
-          <a:noFill/>
-          <a:ln/>
-        </p:spPr>
-        <p:txBody>
-          <a:bodyPr wrap="square" lIns="0" tIns="0" rIns="0" bIns="0" rtlCol="0" anchor="ctr"/>
-          <a:lstStyle/>
-          <a:p>
-            <a:pPr indent="0" marL="0">
-              <a:buNone/>
-            </a:pPr>
-            <a:r>
-              <a:rPr lang="en-US" sz="2800" b="1" dirty="0">
-                <a:solidFill>
-                  <a:srgbClr val="14213D"/>
-                </a:solidFill>
-                <a:latin typeface="Malgun Gothic" pitchFamily="34" charset="0"/>
-                <a:ea typeface="Malgun Gothic" pitchFamily="34" charset="-122"/>
-                <a:cs typeface="Malgun Gothic" pitchFamily="34" charset="-120"/>
-              </a:rPr>
-              <a:t>현황과 다음 단계</a:t>
-            </a:r>
-            <a:endParaRPr lang="en-US" sz="2800" dirty="0"/>
-          </a:p>
-        </p:txBody>
-      </p:sp>
-      <p:sp>
-        <p:nvSpPr>
-          <p:cNvPr id="3" name="Shape 1"/>
-          <p:cNvSpPr/>
-          <p:nvPr/>
-        </p:nvSpPr>
-        <p:spPr>
-          <a:xfrm>
-            <a:off x="548640" y="1280160"/>
-            <a:ext cx="3931920" cy="3200400"/>
-          </a:xfrm>
-          <a:prstGeom prst="roundRect">
-            <a:avLst>
-              <a:gd name="adj" fmla="val 2286"/>
-            </a:avLst>
-          </a:prstGeom>
-          <a:solidFill>
-            <a:srgbClr val="F3F4F6"/>
-          </a:solidFill>
-          <a:ln w="12700">
-            <a:solidFill>
-              <a:srgbClr val="F3F4F6"/>
-            </a:solidFill>
-            <a:prstDash val="solid"/>
-          </a:ln>
-        </p:spPr>
-      </p:sp>
-      <p:sp>
-        <p:nvSpPr>
-          <p:cNvPr id="4" name="Text 2"/>
-          <p:cNvSpPr txBox="1"/>
-          <p:nvPr/>
-        </p:nvSpPr>
-        <p:spPr>
-          <a:xfrm>
-            <a:off x="731520" y="1389888"/>
-            <a:ext cx="3566160" cy="365760"/>
-          </a:xfrm>
-          <a:prstGeom prst="rect">
-            <a:avLst/>
-          </a:prstGeom>
-          <a:noFill/>
-          <a:ln/>
-        </p:spPr>
-        <p:txBody>
-          <a:bodyPr wrap="square" lIns="0" tIns="0" rIns="0" bIns="0" rtlCol="0" anchor="ctr"/>
-          <a:lstStyle/>
-          <a:p>
-            <a:pPr indent="0" marL="0">
-              <a:buNone/>
-            </a:pPr>
-            <a:r>
-              <a:rPr lang="en-US" sz="1600" b="1" dirty="0">
-                <a:solidFill>
-                  <a:srgbClr val="14213D"/>
-                </a:solidFill>
-                <a:latin typeface="Malgun Gothic" pitchFamily="34" charset="0"/>
-                <a:ea typeface="Malgun Gothic" pitchFamily="34" charset="-122"/>
-                <a:cs typeface="Malgun Gothic" pitchFamily="34" charset="-120"/>
-              </a:rPr>
-              <a:t>완료</a:t>
-            </a:r>
-            <a:endParaRPr lang="en-US" sz="1600" dirty="0"/>
-          </a:p>
-        </p:txBody>
-      </p:sp>
-      <p:sp>
-        <p:nvSpPr>
-          <p:cNvPr id="5" name="Text 3"/>
-          <p:cNvSpPr txBox="1"/>
-          <p:nvPr/>
-        </p:nvSpPr>
-        <p:spPr>
-          <a:xfrm>
-            <a:off x="731520" y="1783080"/>
-            <a:ext cx="3566160" cy="2560320"/>
-          </a:xfrm>
-          <a:prstGeom prst="rect">
-            <a:avLst/>
-          </a:prstGeom>
-          <a:noFill/>
-          <a:ln/>
-        </p:spPr>
-        <p:txBody>
-          <a:bodyPr wrap="square" lIns="0" tIns="0" rIns="0" bIns="0" rtlCol="0" anchor="t"/>
-          <a:lstStyle/>
-          <a:p>
-            <a:pPr indent="0" marL="0">
-              <a:spcAft>
-                <a:spcPts val="400"/>
-              </a:spcAft>
-              <a:buNone/>
-            </a:pPr>
-            <a:r>
-              <a:rPr lang="en-US" sz="1300" dirty="0">
-                <a:solidFill>
-                  <a:srgbClr val="1F2937"/>
-                </a:solidFill>
-                <a:latin typeface="Malgun Gothic" pitchFamily="34" charset="0"/>
-                <a:ea typeface="Malgun Gothic" pitchFamily="34" charset="-122"/>
-                <a:cs typeface="Malgun Gothic" pitchFamily="34" charset="-120"/>
-              </a:rPr>
-              <a:t>룰·LLM·RAG 파이프라인</a:t>
-            </a:r>
-            <a:endParaRPr lang="en-US" sz="1300" dirty="0"/>
-          </a:p>
-          <a:p>
-            <a:pPr indent="0" marL="0">
-              <a:spcAft>
-                <a:spcPts val="400"/>
-              </a:spcAft>
-              <a:buNone/>
-            </a:pPr>
-            <a:r>
-              <a:rPr lang="en-US" sz="1300" dirty="0">
-                <a:solidFill>
-                  <a:srgbClr val="1F2937"/>
-                </a:solidFill>
-                <a:latin typeface="Malgun Gothic" pitchFamily="34" charset="0"/>
-                <a:ea typeface="Malgun Gothic" pitchFamily="34" charset="-122"/>
-                <a:cs typeface="Malgun Gothic" pitchFamily="34" charset="-120"/>
-              </a:rPr>
-              <a:t>룰별 통계와 LLM 가중치 조언</a:t>
-            </a:r>
-            <a:endParaRPr lang="en-US" sz="1300" dirty="0"/>
-          </a:p>
-          <a:p>
-            <a:pPr indent="0" marL="0">
-              <a:spcAft>
-                <a:spcPts val="400"/>
-              </a:spcAft>
-              <a:buNone/>
-            </a:pPr>
-            <a:r>
-              <a:rPr lang="en-US" sz="1300" dirty="0">
-                <a:solidFill>
-                  <a:srgbClr val="1F2937"/>
-                </a:solidFill>
-                <a:latin typeface="Malgun Gothic" pitchFamily="34" charset="0"/>
-                <a:ea typeface="Malgun Gothic" pitchFamily="34" charset="-122"/>
-                <a:cs typeface="Malgun Gothic" pitchFamily="34" charset="-120"/>
-              </a:rPr>
-              <a:t>신고 API, 수동/자동 처리, EML 보관</a:t>
-            </a:r>
-            <a:endParaRPr lang="en-US" sz="1300" dirty="0"/>
-          </a:p>
-          <a:p>
-            <a:pPr indent="0" marL="0">
-              <a:spcAft>
-                <a:spcPts val="400"/>
-              </a:spcAft>
-              <a:buNone/>
-            </a:pPr>
-            <a:r>
-              <a:rPr lang="en-US" sz="1300" dirty="0">
-                <a:solidFill>
-                  <a:srgbClr val="1F2937"/>
-                </a:solidFill>
-                <a:latin typeface="Malgun Gothic" pitchFamily="34" charset="0"/>
-                <a:ea typeface="Malgun Gothic" pitchFamily="34" charset="-122"/>
-                <a:cs typeface="Malgun Gothic" pitchFamily="34" charset="-120"/>
-              </a:rPr>
-              <a:t>로그인, 위조 헤더 제거</a:t>
-            </a:r>
-            <a:endParaRPr lang="en-US" sz="1300" dirty="0"/>
-          </a:p>
-          <a:p>
-            <a:pPr indent="0" marL="0">
-              <a:spcAft>
-                <a:spcPts val="400"/>
-              </a:spcAft>
-              <a:buNone/>
-            </a:pPr>
-            <a:r>
-              <a:rPr lang="en-US" sz="1300" dirty="0">
-                <a:solidFill>
-                  <a:srgbClr val="1F2937"/>
-                </a:solidFill>
-                <a:latin typeface="Malgun Gothic" pitchFamily="34" charset="0"/>
-                <a:ea typeface="Malgun Gothic" pitchFamily="34" charset="-122"/>
-                <a:cs typeface="Malgun Gothic" pitchFamily="34" charset="-120"/>
-              </a:rPr>
-              <a:t>Oracle 19c 전환, 탭 대시보드</a:t>
-            </a:r>
-            <a:endParaRPr lang="en-US" sz="1300" dirty="0"/>
-          </a:p>
-        </p:txBody>
-      </p:sp>
-      <p:sp>
-        <p:nvSpPr>
-          <p:cNvPr id="6" name="Shape 4"/>
-          <p:cNvSpPr/>
-          <p:nvPr/>
-        </p:nvSpPr>
-        <p:spPr>
-          <a:xfrm>
-            <a:off x="4663440" y="1280160"/>
-            <a:ext cx="3931920" cy="3200400"/>
-          </a:xfrm>
-          <a:prstGeom prst="roundRect">
-            <a:avLst>
-              <a:gd name="adj" fmla="val 2286"/>
-            </a:avLst>
-          </a:prstGeom>
-          <a:solidFill>
-            <a:srgbClr val="FEF3C7"/>
-          </a:solidFill>
-          <a:ln w="12700">
-            <a:solidFill>
-              <a:srgbClr val="FEF3C7"/>
-            </a:solidFill>
-            <a:prstDash val="solid"/>
-          </a:ln>
-        </p:spPr>
-      </p:sp>
-      <p:sp>
-        <p:nvSpPr>
-          <p:cNvPr id="7" name="Text 5"/>
-          <p:cNvSpPr txBox="1"/>
-          <p:nvPr/>
-        </p:nvSpPr>
-        <p:spPr>
-          <a:xfrm>
-            <a:off x="4846320" y="1389888"/>
-            <a:ext cx="3566160" cy="365760"/>
-          </a:xfrm>
-          <a:prstGeom prst="rect">
-            <a:avLst/>
-          </a:prstGeom>
-          <a:noFill/>
-          <a:ln/>
-        </p:spPr>
-        <p:txBody>
-          <a:bodyPr wrap="square" lIns="0" tIns="0" rIns="0" bIns="0" rtlCol="0" anchor="ctr"/>
-          <a:lstStyle/>
-          <a:p>
-            <a:pPr indent="0" marL="0">
-              <a:buNone/>
-            </a:pPr>
-            <a:r>
-              <a:rPr lang="en-US" sz="1600" b="1" dirty="0">
-                <a:solidFill>
-                  <a:srgbClr val="14213D"/>
-                </a:solidFill>
-                <a:latin typeface="Malgun Gothic" pitchFamily="34" charset="0"/>
-                <a:ea typeface="Malgun Gothic" pitchFamily="34" charset="-122"/>
-                <a:cs typeface="Malgun Gothic" pitchFamily="34" charset="-120"/>
-              </a:rPr>
-              <a:t>진행·예정</a:t>
-            </a:r>
-            <a:endParaRPr lang="en-US" sz="1600" dirty="0"/>
-          </a:p>
-        </p:txBody>
-      </p:sp>
-      <p:sp>
-        <p:nvSpPr>
-          <p:cNvPr id="8" name="Text 6"/>
-          <p:cNvSpPr txBox="1"/>
-          <p:nvPr/>
-        </p:nvSpPr>
-        <p:spPr>
-          <a:xfrm>
-            <a:off x="4846320" y="1783080"/>
-            <a:ext cx="3566160" cy="2560320"/>
-          </a:xfrm>
-          <a:prstGeom prst="rect">
-            <a:avLst/>
-          </a:prstGeom>
-          <a:noFill/>
-          <a:ln/>
-        </p:spPr>
-        <p:txBody>
-          <a:bodyPr wrap="square" lIns="0" tIns="0" rIns="0" bIns="0" rtlCol="0" anchor="t"/>
-          <a:lstStyle/>
-          <a:p>
-            <a:pPr indent="0" marL="0">
-              <a:spcAft>
-                <a:spcPts val="400"/>
-              </a:spcAft>
-              <a:buNone/>
-            </a:pPr>
-            <a:r>
-              <a:rPr lang="en-US" sz="1300" dirty="0">
-                <a:solidFill>
-                  <a:srgbClr val="1F2937"/>
-                </a:solidFill>
-                <a:latin typeface="Malgun Gothic" pitchFamily="34" charset="0"/>
-                <a:ea typeface="Malgun Gothic" pitchFamily="34" charset="-122"/>
-                <a:cs typeface="Malgun Gothic" pitchFamily="34" charset="-120"/>
-              </a:rPr>
-              <a:t>그룹웨어 신고 연동(진행 중)</a:t>
-            </a:r>
-            <a:endParaRPr lang="en-US" sz="1300" dirty="0"/>
-          </a:p>
-          <a:p>
-            <a:pPr indent="0" marL="0">
-              <a:spcAft>
-                <a:spcPts val="400"/>
-              </a:spcAft>
-              <a:buNone/>
-            </a:pPr>
-            <a:r>
-              <a:rPr lang="en-US" sz="1300" dirty="0">
-                <a:solidFill>
-                  <a:srgbClr val="1F2937"/>
-                </a:solidFill>
-                <a:latin typeface="Malgun Gothic" pitchFamily="34" charset="0"/>
-                <a:ea typeface="Malgun Gothic" pitchFamily="34" charset="-122"/>
-                <a:cs typeface="Malgun Gothic" pitchFamily="34" charset="-120"/>
-              </a:rPr>
-              <a:t>Gemini·관리자 키 교체</a:t>
-            </a:r>
-            <a:endParaRPr lang="en-US" sz="1300" dirty="0"/>
-          </a:p>
-          <a:p>
-            <a:pPr indent="0" marL="0">
-              <a:spcAft>
-                <a:spcPts val="400"/>
-              </a:spcAft>
-              <a:buNone/>
-            </a:pPr>
-            <a:r>
-              <a:rPr lang="en-US" sz="1300" dirty="0">
-                <a:solidFill>
-                  <a:srgbClr val="1F2937"/>
-                </a:solidFill>
-                <a:latin typeface="Malgun Gothic" pitchFamily="34" charset="0"/>
-                <a:ea typeface="Malgun Gothic" pitchFamily="34" charset="-122"/>
-                <a:cs typeface="Malgun Gothic" pitchFamily="34" charset="-120"/>
-              </a:rPr>
-              <a:t>적중 통계 누적 후 가중치 조정</a:t>
-            </a:r>
-            <a:endParaRPr lang="en-US" sz="1300" dirty="0"/>
-          </a:p>
-          <a:p>
-            <a:pPr indent="0" marL="0">
-              <a:spcAft>
-                <a:spcPts val="400"/>
-              </a:spcAft>
-              <a:buNone/>
-            </a:pPr>
-            <a:r>
-              <a:rPr lang="en-US" sz="1300" dirty="0">
-                <a:solidFill>
-                  <a:srgbClr val="1F2937"/>
-                </a:solidFill>
-                <a:latin typeface="Malgun Gothic" pitchFamily="34" charset="0"/>
-                <a:ea typeface="Malgun Gothic" pitchFamily="34" charset="-122"/>
-                <a:cs typeface="Malgun Gothic" pitchFamily="34" charset="-120"/>
-              </a:rPr>
-              <a:t>신고 API 구간 TLS 적용 검토</a:t>
-            </a:r>
-            <a:endParaRPr lang="en-US" sz="1300" dirty="0"/>
-          </a:p>
-          <a:p>
-            <a:pPr indent="0" marL="0">
-              <a:spcAft>
-                <a:spcPts val="400"/>
-              </a:spcAft>
-              <a:buNone/>
-            </a:pPr>
-            <a:r>
-              <a:rPr lang="en-US" sz="1300" dirty="0">
-                <a:solidFill>
-                  <a:srgbClr val="1F2937"/>
-                </a:solidFill>
-                <a:latin typeface="Malgun Gothic" pitchFamily="34" charset="0"/>
-                <a:ea typeface="Malgun Gothic" pitchFamily="34" charset="-122"/>
-                <a:cs typeface="Malgun Gothic" pitchFamily="34" charset="-120"/>
-              </a:rPr>
-              <a:t>EML 보관 기간 정책 결정</a:t>
-            </a:r>
-            <a:endParaRPr lang="en-US" sz="1300" dirty="0"/>
-          </a:p>
-        </p:txBody>
-      </p:sp>
-      <p:sp>
-        <p:nvSpPr>
-          <p:cNvPr id="25" name="Slide Number Placeholder 0"/>
-          <p:cNvSpPr>
-            <a:spLocks noGrp="1"/>
-          </p:cNvSpPr>
-          <p:nvPr>
-            <p:ph type="sldNum" sz="quarter" idx="4294967295"/>
-          </p:nvPr>
-        </p:nvSpPr>
-        <p:spPr>
-          <a:xfrm>
-            <a:off x="8321040" y="4800600"/>
-            <a:ext cx="457200" cy="274320"/>
-          </a:xfrm>
-          <a:prstGeom prst="rect">
-            <a:avLst/>
-          </a:prstGeom>
-          <a:extLst>
-            <a:ext uri="{C572A759-6A51-4108-AA02-DFA0A04FC94B}">
-              <ma14:wrappingTextBoxFlag xmlns:ma14="http://schemas.microsoft.com/office/mac/drawingml/2011/main" val="0"/>
-            </a:ext>
-          </a:extLst>
-        </p:spPr>
-        <p:txBody>
-          <a:bodyPr/>
-          <a:lstStyle>
-            <a:lvl1pPr>
-              <a:defRPr sz="1000">
-                <a:solidFill>
-                  <a:srgbClr val="6B7280"/>
-                </a:solidFill>
-                <a:latin typeface="Malgun Gothic"/>
-                <a:ea typeface="Malgun Gothic"/>
-                <a:cs typeface="Malgun Gothic"/>
-              </a:defRPr>
-            </a:lvl1pPr>
-          </a:lstStyle>
-          <a:p>
-            <a:pPr algn="l"/>
-            <a:fld id="{F7021451-1387-4CA6-816F-3879F97B5CBC}" type="slidenum">
-              <a:rPr b="0" lang="en-US"/>
-              <a:t>12</a:t>
-            </a:fld>
-            <a:endParaRPr lang="en-US"/>
-          </a:p>
-        </p:txBody>
-      </p:sp>
-    </p:spTree>
-  </p:cSld>
-  <p:clrMapOvr>
-    <a:masterClrMapping/>
-  </p:clrMapOvr>
-</p:sld>
-</file>
-
-<file path=ppt/slides/slide13.xml><?xml version="1.0" encoding="utf-8"?>
 <p:sld xmlns:a="http://schemas.openxmlformats.org/drawingml/2006/main" xmlns:r="http://schemas.openxmlformats.org/officeDocument/2006/relationships" xmlns:p="http://schemas.openxmlformats.org/presentationml/2006/main">
   <p:cSld name="Slide 13">
     <p:spTree>
@@ -4238,7 +3061,7 @@
           <a:bodyPr wrap="square" lIns="0" tIns="0" rIns="0" bIns="0" rtlCol="0" anchor="ctr"/>
           <a:lstStyle/>
           <a:p>
-            <a:pPr indent="0" marL="0">
+            <a:pPr marL="0" indent="0">
               <a:buNone/>
             </a:pPr>
             <a:r>
@@ -4277,7 +3100,7 @@
           <a:bodyPr wrap="square" lIns="0" tIns="0" rIns="0" bIns="0" rtlCol="0" anchor="ctr"/>
           <a:lstStyle/>
           <a:p>
-            <a:pPr indent="0" marL="0">
+            <a:pPr marL="0" indent="0">
               <a:buNone/>
             </a:pPr>
             <a:r>
@@ -4294,7 +3117,7 @@
             <a:endParaRPr lang="en-US" sz="1600" dirty="0"/>
           </a:p>
           <a:p>
-            <a:pPr indent="0" marL="0">
+            <a:pPr marL="0" indent="0">
               <a:buNone/>
             </a:pPr>
             <a:r>
@@ -4358,7 +3181,7 @@
           <a:bodyPr wrap="square" lIns="0" tIns="0" rIns="0" bIns="0" rtlCol="0" anchor="ctr"/>
           <a:lstStyle/>
           <a:p>
-            <a:pPr indent="0" marL="0">
+            <a:pPr marL="0" indent="0">
               <a:buNone/>
             </a:pPr>
             <a:r>
@@ -4402,6 +3225,13 @@
             <a:prstDash val="solid"/>
           </a:ln>
         </p:spPr>
+        <p:txBody>
+          <a:bodyPr/>
+          <a:lstStyle/>
+          <a:p>
+            <a:endParaRPr lang="ko-KR" altLang="en-US"/>
+          </a:p>
+        </p:txBody>
       </p:sp>
       <p:sp>
         <p:nvSpPr>
@@ -4424,7 +3254,7 @@
           <a:bodyPr wrap="square" lIns="0" tIns="0" rIns="0" bIns="0" rtlCol="0" anchor="ctr"/>
           <a:lstStyle/>
           <a:p>
-            <a:pPr indent="0" marL="0">
+            <a:pPr marL="0" indent="0">
               <a:buNone/>
             </a:pPr>
             <a:r>
@@ -4463,7 +3293,7 @@
           <a:bodyPr wrap="square" lIns="0" tIns="0" rIns="0" bIns="0" rtlCol="0" anchor="t"/>
           <a:lstStyle/>
           <a:p>
-            <a:pPr indent="0" marL="0">
+            <a:pPr marL="0" indent="0">
               <a:spcAft>
                 <a:spcPts val="400"/>
               </a:spcAft>
@@ -4510,6 +3340,13 @@
             <a:prstDash val="solid"/>
           </a:ln>
         </p:spPr>
+        <p:txBody>
+          <a:bodyPr/>
+          <a:lstStyle/>
+          <a:p>
+            <a:endParaRPr lang="ko-KR" altLang="en-US"/>
+          </a:p>
+        </p:txBody>
       </p:sp>
       <p:sp>
         <p:nvSpPr>
@@ -4532,7 +3369,7 @@
           <a:bodyPr wrap="square" lIns="0" tIns="0" rIns="0" bIns="0" rtlCol="0" anchor="ctr"/>
           <a:lstStyle/>
           <a:p>
-            <a:pPr indent="0" marL="0">
+            <a:pPr marL="0" indent="0">
               <a:buNone/>
             </a:pPr>
             <a:r>
@@ -4571,7 +3408,7 @@
           <a:bodyPr wrap="square" lIns="0" tIns="0" rIns="0" bIns="0" rtlCol="0" anchor="t"/>
           <a:lstStyle/>
           <a:p>
-            <a:pPr indent="0" marL="0">
+            <a:pPr marL="0" indent="0">
               <a:spcAft>
                 <a:spcPts val="400"/>
               </a:spcAft>
@@ -4618,6 +3455,13 @@
             <a:prstDash val="solid"/>
           </a:ln>
         </p:spPr>
+        <p:txBody>
+          <a:bodyPr/>
+          <a:lstStyle/>
+          <a:p>
+            <a:endParaRPr lang="ko-KR" altLang="en-US"/>
+          </a:p>
+        </p:txBody>
       </p:sp>
       <p:sp>
         <p:nvSpPr>
@@ -4640,7 +3484,7 @@
           <a:bodyPr wrap="square" lIns="0" tIns="0" rIns="0" bIns="0" rtlCol="0" anchor="ctr"/>
           <a:lstStyle/>
           <a:p>
-            <a:pPr indent="0" marL="0">
+            <a:pPr marL="0" indent="0">
               <a:buNone/>
             </a:pPr>
             <a:r>
@@ -4679,7 +3523,7 @@
           <a:bodyPr wrap="square" lIns="0" tIns="0" rIns="0" bIns="0" rtlCol="0" anchor="t"/>
           <a:lstStyle/>
           <a:p>
-            <a:pPr indent="0" marL="0">
+            <a:pPr marL="0" indent="0">
               <a:spcAft>
                 <a:spcPts val="400"/>
               </a:spcAft>
@@ -4720,7 +3564,7 @@
           </a:prstGeom>
           <a:extLst>
             <a:ext uri="{C572A759-6A51-4108-AA02-DFA0A04FC94B}">
-              <ma14:wrappingTextBoxFlag xmlns:ma14="http://schemas.microsoft.com/office/mac/drawingml/2011/main" val="0"/>
+              <ma14:wrappingTextBoxFlag xmlns="" xmlns:ma14="http://schemas.microsoft.com/office/mac/drawingml/2011/main" val="0"/>
             </a:ext>
           </a:extLst>
         </p:spPr>
@@ -4741,7 +3585,7 @@
           <a:p>
             <a:pPr algn="l"/>
             <a:fld id="{F7021451-1387-4CA6-816F-3879F97B5CBC}" type="slidenum">
-              <a:rPr b="0" lang="en-US"/>
+              <a:rPr lang="en-US" b="0"/>
               <a:t>2</a:t>
             </a:fld>
             <a:endParaRPr lang="en-US"/>
@@ -4757,6 +3601,505 @@
 </file>
 
 <file path=ppt/slides/slide3.xml><?xml version="1.0" encoding="utf-8"?>
+<p:sld xmlns:a="http://schemas.openxmlformats.org/drawingml/2006/main" xmlns:r="http://schemas.openxmlformats.org/officeDocument/2006/relationships" xmlns:p="http://schemas.openxmlformats.org/presentationml/2006/main">
+  <p:cSld>
+    <p:spTree>
+      <p:nvGrpSpPr>
+        <p:cNvPr id="1" name=""/>
+        <p:cNvGrpSpPr/>
+        <p:nvPr/>
+      </p:nvGrpSpPr>
+      <p:grpSpPr>
+        <a:xfrm>
+          <a:off x="0" y="0"/>
+          <a:ext cx="0" cy="0"/>
+          <a:chOff x="0" y="0"/>
+          <a:chExt cx="0" cy="0"/>
+        </a:xfrm>
+      </p:grpSpPr>
+      <p:sp>
+        <p:nvSpPr>
+          <p:cNvPr id="2" name="Text 0"/>
+          <p:cNvSpPr txBox="1"/>
+          <p:nvPr/>
+        </p:nvSpPr>
+        <p:spPr>
+          <a:xfrm>
+            <a:off x="548640" y="320040"/>
+            <a:ext cx="8046720" cy="640080"/>
+          </a:xfrm>
+          <a:prstGeom prst="rect">
+            <a:avLst/>
+          </a:prstGeom>
+          <a:noFill/>
+          <a:ln/>
+        </p:spPr>
+        <p:txBody>
+          <a:bodyPr wrap="square" lIns="0" tIns="0" rIns="0" bIns="0" rtlCol="0" anchor="ctr"/>
+          <a:lstStyle/>
+          <a:p>
+            <a:pPr marL="0" indent="0">
+              <a:buNone/>
+            </a:pPr>
+            <a:r>
+              <a:rPr lang="en-US" sz="2800" b="1" dirty="0">
+                <a:solidFill>
+                  <a:srgbClr val="14213D"/>
+                </a:solidFill>
+                <a:latin typeface="Malgun Gothic" pitchFamily="34" charset="0"/>
+                <a:ea typeface="Malgun Gothic" pitchFamily="34" charset="-122"/>
+                <a:cs typeface="Malgun Gothic" pitchFamily="34" charset="-120"/>
+              </a:rPr>
+              <a:t>멀티 인스턴스 로드밸런싱</a:t>
+            </a:r>
+            <a:endParaRPr lang="en-US" sz="2800" dirty="0"/>
+          </a:p>
+        </p:txBody>
+      </p:sp>
+      <p:sp>
+        <p:nvSpPr>
+          <p:cNvPr id="3" name="Shape 1"/>
+          <p:cNvSpPr/>
+          <p:nvPr/>
+        </p:nvSpPr>
+        <p:spPr>
+          <a:xfrm>
+            <a:off x="548640" y="1280160"/>
+            <a:ext cx="2514600" cy="2743200"/>
+          </a:xfrm>
+          <a:prstGeom prst="roundRect">
+            <a:avLst>
+              <a:gd name="adj" fmla="val 2909"/>
+            </a:avLst>
+          </a:prstGeom>
+          <a:solidFill>
+            <a:srgbClr val="F3F4F6"/>
+          </a:solidFill>
+          <a:ln w="12700">
+            <a:solidFill>
+              <a:srgbClr val="F3F4F6"/>
+            </a:solidFill>
+            <a:prstDash val="solid"/>
+          </a:ln>
+        </p:spPr>
+        <p:txBody>
+          <a:bodyPr/>
+          <a:lstStyle/>
+          <a:p>
+            <a:endParaRPr lang="ko-KR" altLang="en-US"/>
+          </a:p>
+        </p:txBody>
+      </p:sp>
+      <p:sp>
+        <p:nvSpPr>
+          <p:cNvPr id="4" name="Text 2"/>
+          <p:cNvSpPr txBox="1"/>
+          <p:nvPr/>
+        </p:nvSpPr>
+        <p:spPr>
+          <a:xfrm>
+            <a:off x="731520" y="1389888"/>
+            <a:ext cx="2148840" cy="365760"/>
+          </a:xfrm>
+          <a:prstGeom prst="rect">
+            <a:avLst/>
+          </a:prstGeom>
+          <a:noFill/>
+          <a:ln/>
+        </p:spPr>
+        <p:txBody>
+          <a:bodyPr wrap="square" lIns="0" tIns="0" rIns="0" bIns="0" rtlCol="0" anchor="ctr"/>
+          <a:lstStyle/>
+          <a:p>
+            <a:pPr marL="0" indent="0">
+              <a:buNone/>
+            </a:pPr>
+            <a:r>
+              <a:rPr lang="en-US" sz="1600" b="1" dirty="0">
+                <a:solidFill>
+                  <a:srgbClr val="14213D"/>
+                </a:solidFill>
+                <a:latin typeface="Malgun Gothic" pitchFamily="34" charset="0"/>
+                <a:ea typeface="Malgun Gothic" pitchFamily="34" charset="-122"/>
+                <a:cs typeface="Malgun Gothic" pitchFamily="34" charset="-120"/>
+              </a:rPr>
+              <a:t>커널이 접속을 분산</a:t>
+            </a:r>
+            <a:endParaRPr lang="en-US" sz="1600" dirty="0"/>
+          </a:p>
+        </p:txBody>
+      </p:sp>
+      <p:sp>
+        <p:nvSpPr>
+          <p:cNvPr id="5" name="Text 3"/>
+          <p:cNvSpPr txBox="1"/>
+          <p:nvPr/>
+        </p:nvSpPr>
+        <p:spPr>
+          <a:xfrm>
+            <a:off x="731520" y="1783080"/>
+            <a:ext cx="2148840" cy="2560320"/>
+          </a:xfrm>
+          <a:prstGeom prst="rect">
+            <a:avLst/>
+          </a:prstGeom>
+          <a:noFill/>
+          <a:ln/>
+        </p:spPr>
+        <p:txBody>
+          <a:bodyPr wrap="square" lIns="0" tIns="0" rIns="0" bIns="0" rtlCol="0" anchor="t"/>
+          <a:lstStyle/>
+          <a:p>
+            <a:pPr marL="0" indent="0">
+              <a:spcAft>
+                <a:spcPts val="400"/>
+              </a:spcAft>
+              <a:buNone/>
+            </a:pPr>
+            <a:r>
+              <a:rPr lang="en-US" sz="1300" dirty="0">
+                <a:solidFill>
+                  <a:srgbClr val="1F2937"/>
+                </a:solidFill>
+                <a:latin typeface="Malgun Gothic" pitchFamily="34" charset="0"/>
+                <a:ea typeface="Malgun Gothic" pitchFamily="34" charset="-122"/>
+                <a:cs typeface="Malgun Gothic" pitchFamily="34" charset="-120"/>
+              </a:rPr>
+              <a:t>Linux SO_REUSEPORT로 게이트웨이 여러 개가 같은 25번 포트를 공유하고, 커널이 새 접속을 나눠 줍니다. 별도 로드밸런서 장비가 필요 없습니다.</a:t>
+            </a:r>
+            <a:endParaRPr lang="en-US" sz="1300" dirty="0"/>
+          </a:p>
+        </p:txBody>
+      </p:sp>
+      <p:sp>
+        <p:nvSpPr>
+          <p:cNvPr id="6" name="Shape 4"/>
+          <p:cNvSpPr/>
+          <p:nvPr/>
+        </p:nvSpPr>
+        <p:spPr>
+          <a:xfrm>
+            <a:off x="3291840" y="1280160"/>
+            <a:ext cx="2514600" cy="2743200"/>
+          </a:xfrm>
+          <a:prstGeom prst="roundRect">
+            <a:avLst>
+              <a:gd name="adj" fmla="val 2909"/>
+            </a:avLst>
+          </a:prstGeom>
+          <a:solidFill>
+            <a:srgbClr val="F3F4F6"/>
+          </a:solidFill>
+          <a:ln w="12700">
+            <a:solidFill>
+              <a:srgbClr val="F3F4F6"/>
+            </a:solidFill>
+            <a:prstDash val="solid"/>
+          </a:ln>
+        </p:spPr>
+        <p:txBody>
+          <a:bodyPr/>
+          <a:lstStyle/>
+          <a:p>
+            <a:endParaRPr lang="ko-KR" altLang="en-US"/>
+          </a:p>
+        </p:txBody>
+      </p:sp>
+      <p:sp>
+        <p:nvSpPr>
+          <p:cNvPr id="7" name="Text 5"/>
+          <p:cNvSpPr txBox="1"/>
+          <p:nvPr/>
+        </p:nvSpPr>
+        <p:spPr>
+          <a:xfrm>
+            <a:off x="3474720" y="1389888"/>
+            <a:ext cx="2148840" cy="365760"/>
+          </a:xfrm>
+          <a:prstGeom prst="rect">
+            <a:avLst/>
+          </a:prstGeom>
+          <a:noFill/>
+          <a:ln/>
+        </p:spPr>
+        <p:txBody>
+          <a:bodyPr wrap="square" lIns="0" tIns="0" rIns="0" bIns="0" rtlCol="0" anchor="ctr"/>
+          <a:lstStyle/>
+          <a:p>
+            <a:pPr marL="0" indent="0">
+              <a:buNone/>
+            </a:pPr>
+            <a:r>
+              <a:rPr lang="en-US" sz="1600" b="1" dirty="0">
+                <a:solidFill>
+                  <a:srgbClr val="14213D"/>
+                </a:solidFill>
+                <a:latin typeface="Malgun Gothic" pitchFamily="34" charset="0"/>
+                <a:ea typeface="Malgun Gothic" pitchFamily="34" charset="-122"/>
+                <a:cs typeface="Malgun Gothic" pitchFamily="34" charset="-120"/>
+              </a:rPr>
+              <a:t>상태는 Oracle로 공유</a:t>
+            </a:r>
+            <a:endParaRPr lang="en-US" sz="1600" dirty="0"/>
+          </a:p>
+        </p:txBody>
+      </p:sp>
+      <p:sp>
+        <p:nvSpPr>
+          <p:cNvPr id="8" name="Text 6"/>
+          <p:cNvSpPr txBox="1"/>
+          <p:nvPr/>
+        </p:nvSpPr>
+        <p:spPr>
+          <a:xfrm>
+            <a:off x="3474720" y="1783080"/>
+            <a:ext cx="2148840" cy="2560320"/>
+          </a:xfrm>
+          <a:prstGeom prst="rect">
+            <a:avLst/>
+          </a:prstGeom>
+          <a:noFill/>
+          <a:ln/>
+        </p:spPr>
+        <p:txBody>
+          <a:bodyPr wrap="square" lIns="0" tIns="0" rIns="0" bIns="0" rtlCol="0" anchor="t"/>
+          <a:lstStyle/>
+          <a:p>
+            <a:pPr marL="0" indent="0">
+              <a:spcAft>
+                <a:spcPts val="400"/>
+              </a:spcAft>
+              <a:buNone/>
+            </a:pPr>
+            <a:r>
+              <a:rPr lang="en-US" sz="1300" dirty="0">
+                <a:solidFill>
+                  <a:srgbClr val="1F2937"/>
+                </a:solidFill>
+                <a:latin typeface="Malgun Gothic" pitchFamily="34" charset="0"/>
+                <a:ea typeface="Malgun Gothic" pitchFamily="34" charset="-122"/>
+                <a:cs typeface="Malgun Gothic" pitchFamily="34" charset="-120"/>
+              </a:rPr>
+              <a:t>밴 목록, 그레이리스팅, 룰, 신고를 DB에 두어, 재시도 메일이 다른 인스턴스로 가도 같은 판단을 합니다.</a:t>
+            </a:r>
+            <a:endParaRPr lang="en-US" sz="1300" dirty="0"/>
+          </a:p>
+        </p:txBody>
+      </p:sp>
+      <p:sp>
+        <p:nvSpPr>
+          <p:cNvPr id="9" name="Shape 7"/>
+          <p:cNvSpPr/>
+          <p:nvPr/>
+        </p:nvSpPr>
+        <p:spPr>
+          <a:xfrm>
+            <a:off x="6035040" y="1280160"/>
+            <a:ext cx="2560320" cy="2743200"/>
+          </a:xfrm>
+          <a:prstGeom prst="roundRect">
+            <a:avLst>
+              <a:gd name="adj" fmla="val 2857"/>
+            </a:avLst>
+          </a:prstGeom>
+          <a:solidFill>
+            <a:srgbClr val="F3F4F6"/>
+          </a:solidFill>
+          <a:ln w="12700">
+            <a:solidFill>
+              <a:srgbClr val="F3F4F6"/>
+            </a:solidFill>
+            <a:prstDash val="solid"/>
+          </a:ln>
+        </p:spPr>
+        <p:txBody>
+          <a:bodyPr/>
+          <a:lstStyle/>
+          <a:p>
+            <a:endParaRPr lang="ko-KR" altLang="en-US"/>
+          </a:p>
+        </p:txBody>
+      </p:sp>
+      <p:sp>
+        <p:nvSpPr>
+          <p:cNvPr id="10" name="Text 8"/>
+          <p:cNvSpPr txBox="1"/>
+          <p:nvPr/>
+        </p:nvSpPr>
+        <p:spPr>
+          <a:xfrm>
+            <a:off x="6217920" y="1389888"/>
+            <a:ext cx="2194560" cy="365760"/>
+          </a:xfrm>
+          <a:prstGeom prst="rect">
+            <a:avLst/>
+          </a:prstGeom>
+          <a:noFill/>
+          <a:ln/>
+        </p:spPr>
+        <p:txBody>
+          <a:bodyPr wrap="square" lIns="0" tIns="0" rIns="0" bIns="0" rtlCol="0" anchor="ctr"/>
+          <a:lstStyle/>
+          <a:p>
+            <a:pPr marL="0" indent="0">
+              <a:buNone/>
+            </a:pPr>
+            <a:r>
+              <a:rPr lang="en-US" sz="1600" b="1" dirty="0">
+                <a:solidFill>
+                  <a:srgbClr val="14213D"/>
+                </a:solidFill>
+                <a:latin typeface="Malgun Gothic" pitchFamily="34" charset="0"/>
+                <a:ea typeface="Malgun Gothic" pitchFamily="34" charset="-122"/>
+                <a:cs typeface="Malgun Gothic" pitchFamily="34" charset="-120"/>
+              </a:rPr>
+              <a:t>한 대가 멈춰도 계속</a:t>
+            </a:r>
+            <a:endParaRPr lang="en-US" sz="1600" dirty="0"/>
+          </a:p>
+        </p:txBody>
+      </p:sp>
+      <p:sp>
+        <p:nvSpPr>
+          <p:cNvPr id="11" name="Text 9"/>
+          <p:cNvSpPr txBox="1"/>
+          <p:nvPr/>
+        </p:nvSpPr>
+        <p:spPr>
+          <a:xfrm>
+            <a:off x="6217920" y="1783080"/>
+            <a:ext cx="2194560" cy="2560320"/>
+          </a:xfrm>
+          <a:prstGeom prst="rect">
+            <a:avLst/>
+          </a:prstGeom>
+          <a:noFill/>
+          <a:ln/>
+        </p:spPr>
+        <p:txBody>
+          <a:bodyPr wrap="square" lIns="0" tIns="0" rIns="0" bIns="0" rtlCol="0" anchor="t"/>
+          <a:lstStyle/>
+          <a:p>
+            <a:pPr marL="0" indent="0">
+              <a:spcAft>
+                <a:spcPts val="400"/>
+              </a:spcAft>
+              <a:buNone/>
+            </a:pPr>
+            <a:r>
+              <a:rPr lang="en-US" sz="1300" dirty="0">
+                <a:solidFill>
+                  <a:srgbClr val="1F2937"/>
+                </a:solidFill>
+                <a:latin typeface="Malgun Gothic" pitchFamily="34" charset="0"/>
+                <a:ea typeface="Malgun Gothic" pitchFamily="34" charset="-122"/>
+                <a:cs typeface="Malgun Gothic" pitchFamily="34" charset="-120"/>
+              </a:rPr>
+              <a:t>멈춘 인스턴스는 분산 대상에서 빠지고 나머지가 처리합니다. 검사 오류는 fail-open이라 메일은 통과합니다.</a:t>
+            </a:r>
+            <a:endParaRPr lang="en-US" sz="1300" dirty="0"/>
+          </a:p>
+        </p:txBody>
+      </p:sp>
+      <p:sp>
+        <p:nvSpPr>
+          <p:cNvPr id="25" name="Slide Number Placeholder 0"/>
+          <p:cNvSpPr>
+            <a:spLocks noGrp="1"/>
+          </p:cNvSpPr>
+          <p:nvPr>
+            <p:ph type="sldNum" sz="quarter" idx="4294967295"/>
+          </p:nvPr>
+        </p:nvSpPr>
+        <p:spPr>
+          <a:xfrm>
+            <a:off x="8321040" y="4800600"/>
+            <a:ext cx="457200" cy="274320"/>
+          </a:xfrm>
+          <a:prstGeom prst="rect">
+            <a:avLst/>
+          </a:prstGeom>
+          <a:extLst>
+            <a:ext uri="{C572A759-6A51-4108-AA02-DFA0A04FC94B}">
+              <ma14:wrappingTextBoxFlag xmlns="" xmlns:ma14="http://schemas.microsoft.com/office/mac/drawingml/2011/main" val="0"/>
+            </a:ext>
+          </a:extLst>
+        </p:spPr>
+        <p:txBody>
+          <a:bodyPr/>
+          <a:lstStyle>
+            <a:lvl1pPr>
+              <a:defRPr sz="1000">
+                <a:solidFill>
+                  <a:srgbClr val="6B7280"/>
+                </a:solidFill>
+                <a:latin typeface="Malgun Gothic"/>
+                <a:ea typeface="Malgun Gothic"/>
+                <a:cs typeface="Malgun Gothic"/>
+              </a:defRPr>
+            </a:lvl1pPr>
+          </a:lstStyle>
+          <a:p>
+            <a:pPr algn="l"/>
+            <a:fld id="{F7021451-1387-4CA6-816F-3879F97B5CBC}" type="slidenum">
+              <a:rPr lang="en-US" b="0"/>
+              <a:t>3</a:t>
+            </a:fld>
+            <a:endParaRPr lang="en-US"/>
+          </a:p>
+        </p:txBody>
+      </p:sp>
+      <p:sp>
+        <p:nvSpPr>
+          <p:cNvPr id="90" name="Text Note"/>
+          <p:cNvSpPr txBox="1"/>
+          <p:nvPr/>
+        </p:nvSpPr>
+        <p:spPr>
+          <a:xfrm>
+            <a:off x="548640" y="4572000"/>
+            <a:ext cx="7772400" cy="274320"/>
+          </a:xfrm>
+          <a:prstGeom prst="rect">
+            <a:avLst/>
+          </a:prstGeom>
+          <a:noFill/>
+          <a:ln/>
+        </p:spPr>
+        <p:txBody>
+          <a:bodyPr wrap="square" lIns="0" tIns="0" rIns="0" bIns="0" rtlCol="0" anchor="ctr"/>
+          <a:lstStyle/>
+          <a:p>
+            <a:pPr marL="0" indent="0">
+              <a:buNone/>
+            </a:pPr>
+            <a:r>
+              <a:rPr lang="ko-KR" sz="1200" dirty="0">
+                <a:solidFill>
+                  <a:srgbClr val="6B7280"/>
+                </a:solidFill>
+                <a:latin typeface="Malgun Gothic"/>
+                <a:ea typeface="Malgun Gothic"/>
+              </a:rPr>
+              <a:t>현재 운영은 단일 인스턴스입니다. Oracle 전환으로 다중 구동이 가능해졌으며, 운영 검증은 앞으로의 과제입니다.</a:t>
+            </a:r>
+          </a:p>
+        </p:txBody>
+      </p:sp>
+    </p:spTree>
+    <p:extLst>
+      <p:ext uri="{BB962C8B-B14F-4D97-AF65-F5344CB8AC3E}">
+        <p14:creationId xmlns:p14="http://schemas.microsoft.com/office/powerpoint/2010/main" val="2931199398"/>
+      </p:ext>
+    </p:extLst>
+  </p:cSld>
+  <p:clrMapOvr>
+    <a:masterClrMapping/>
+  </p:clrMapOvr>
+</p:sld>
+</file>
+
+<file path=ppt/slides/slide4.xml><?xml version="1.0" encoding="utf-8"?>
 <p:sld xmlns:a="http://schemas.openxmlformats.org/drawingml/2006/main" xmlns:r="http://schemas.openxmlformats.org/officeDocument/2006/relationships" xmlns:p="http://schemas.openxmlformats.org/presentationml/2006/main">
   <p:cSld name="Slide 3">
     <p:spTree>
@@ -4794,7 +4137,7 @@
           <a:bodyPr wrap="square" lIns="0" tIns="0" rIns="0" bIns="0" rtlCol="0" anchor="ctr"/>
           <a:lstStyle/>
           <a:p>
-            <a:pPr indent="0" marL="0">
+            <a:pPr marL="0" indent="0">
               <a:buNone/>
             </a:pPr>
             <a:r>
@@ -4838,6 +4181,13 @@
             <a:prstDash val="solid"/>
           </a:ln>
         </p:spPr>
+        <p:txBody>
+          <a:bodyPr/>
+          <a:lstStyle/>
+          <a:p>
+            <a:endParaRPr lang="ko-KR" altLang="en-US"/>
+          </a:p>
+        </p:txBody>
       </p:sp>
       <p:sp>
         <p:nvSpPr>
@@ -4860,7 +4210,7 @@
           <a:bodyPr wrap="square" lIns="635" tIns="635" rIns="635" bIns="635" rtlCol="0" anchor="ctr"/>
           <a:lstStyle/>
           <a:p>
-            <a:pPr algn="ctr" indent="0" marL="0">
+            <a:pPr marL="0" indent="0" algn="ctr">
               <a:buNone/>
             </a:pPr>
             <a:r>
@@ -4901,6 +4251,13 @@
             <a:tailEnd type="triangle"/>
           </a:ln>
         </p:spPr>
+        <p:txBody>
+          <a:bodyPr/>
+          <a:lstStyle/>
+          <a:p>
+            <a:endParaRPr lang="ko-KR" altLang="en-US"/>
+          </a:p>
+        </p:txBody>
       </p:sp>
       <p:sp>
         <p:nvSpPr>
@@ -4928,6 +4285,13 @@
             <a:prstDash val="solid"/>
           </a:ln>
         </p:spPr>
+        <p:txBody>
+          <a:bodyPr/>
+          <a:lstStyle/>
+          <a:p>
+            <a:endParaRPr lang="ko-KR" altLang="en-US"/>
+          </a:p>
+        </p:txBody>
       </p:sp>
       <p:sp>
         <p:nvSpPr>
@@ -4950,7 +4314,7 @@
           <a:bodyPr wrap="square" lIns="635" tIns="635" rIns="635" bIns="635" rtlCol="0" anchor="ctr"/>
           <a:lstStyle/>
           <a:p>
-            <a:pPr algn="ctr" indent="0" marL="0">
+            <a:pPr marL="0" indent="0" algn="ctr">
               <a:buNone/>
             </a:pPr>
             <a:r>
@@ -4991,6 +4355,13 @@
             <a:tailEnd type="triangle"/>
           </a:ln>
         </p:spPr>
+        <p:txBody>
+          <a:bodyPr/>
+          <a:lstStyle/>
+          <a:p>
+            <a:endParaRPr lang="ko-KR" altLang="en-US"/>
+          </a:p>
+        </p:txBody>
       </p:sp>
       <p:sp>
         <p:nvSpPr>
@@ -5018,6 +4389,13 @@
             <a:prstDash val="solid"/>
           </a:ln>
         </p:spPr>
+        <p:txBody>
+          <a:bodyPr/>
+          <a:lstStyle/>
+          <a:p>
+            <a:endParaRPr lang="ko-KR" altLang="en-US"/>
+          </a:p>
+        </p:txBody>
       </p:sp>
       <p:sp>
         <p:nvSpPr>
@@ -5040,7 +4418,7 @@
           <a:bodyPr wrap="square" lIns="635" tIns="635" rIns="635" bIns="635" rtlCol="0" anchor="ctr"/>
           <a:lstStyle/>
           <a:p>
-            <a:pPr algn="ctr" indent="0" marL="0">
+            <a:pPr marL="0" indent="0" algn="ctr">
               <a:buNone/>
             </a:pPr>
             <a:r>
@@ -5081,6 +4459,13 @@
             <a:tailEnd type="triangle"/>
           </a:ln>
         </p:spPr>
+        <p:txBody>
+          <a:bodyPr/>
+          <a:lstStyle/>
+          <a:p>
+            <a:endParaRPr lang="ko-KR" altLang="en-US"/>
+          </a:p>
+        </p:txBody>
       </p:sp>
       <p:sp>
         <p:nvSpPr>
@@ -5108,6 +4493,13 @@
             <a:prstDash val="solid"/>
           </a:ln>
         </p:spPr>
+        <p:txBody>
+          <a:bodyPr/>
+          <a:lstStyle/>
+          <a:p>
+            <a:endParaRPr lang="ko-KR" altLang="en-US"/>
+          </a:p>
+        </p:txBody>
       </p:sp>
       <p:sp>
         <p:nvSpPr>
@@ -5130,7 +4522,7 @@
           <a:bodyPr wrap="square" lIns="635" tIns="635" rIns="635" bIns="635" rtlCol="0" anchor="ctr"/>
           <a:lstStyle/>
           <a:p>
-            <a:pPr algn="ctr" indent="0" marL="0">
+            <a:pPr marL="0" indent="0" algn="ctr">
               <a:buNone/>
             </a:pPr>
             <a:r>
@@ -5171,6 +4563,13 @@
             <a:tailEnd type="triangle"/>
           </a:ln>
         </p:spPr>
+        <p:txBody>
+          <a:bodyPr/>
+          <a:lstStyle/>
+          <a:p>
+            <a:endParaRPr lang="ko-KR" altLang="en-US"/>
+          </a:p>
+        </p:txBody>
       </p:sp>
       <p:sp>
         <p:nvSpPr>
@@ -5198,6 +4597,13 @@
             <a:prstDash val="solid"/>
           </a:ln>
         </p:spPr>
+        <p:txBody>
+          <a:bodyPr/>
+          <a:lstStyle/>
+          <a:p>
+            <a:endParaRPr lang="ko-KR" altLang="en-US"/>
+          </a:p>
+        </p:txBody>
       </p:sp>
       <p:sp>
         <p:nvSpPr>
@@ -5220,7 +4626,7 @@
           <a:bodyPr wrap="square" lIns="635" tIns="635" rIns="635" bIns="635" rtlCol="0" anchor="ctr"/>
           <a:lstStyle/>
           <a:p>
-            <a:pPr algn="ctr" indent="0" marL="0">
+            <a:pPr marL="0" indent="0" algn="ctr">
               <a:buNone/>
             </a:pPr>
             <a:r>
@@ -5259,7 +4665,7 @@
           <a:bodyPr wrap="square" lIns="0" tIns="0" rIns="0" bIns="0" rtlCol="0" anchor="ctr"/>
           <a:lstStyle/>
           <a:p>
-            <a:pPr indent="0" marL="0">
+            <a:pPr marL="0" indent="0">
               <a:buNone/>
             </a:pPr>
             <a:r>
@@ -5303,6 +4709,13 @@
             <a:prstDash val="solid"/>
           </a:ln>
         </p:spPr>
+        <p:txBody>
+          <a:bodyPr/>
+          <a:lstStyle/>
+          <a:p>
+            <a:endParaRPr lang="ko-KR" altLang="en-US"/>
+          </a:p>
+        </p:txBody>
       </p:sp>
       <p:sp>
         <p:nvSpPr>
@@ -5325,7 +4738,7 @@
           <a:bodyPr wrap="square" lIns="0" tIns="0" rIns="0" bIns="0" rtlCol="0" anchor="ctr"/>
           <a:lstStyle/>
           <a:p>
-            <a:pPr indent="0" marL="0">
+            <a:pPr marL="0" indent="0">
               <a:buNone/>
             </a:pPr>
             <a:r>
@@ -5364,7 +4777,7 @@
           <a:bodyPr wrap="square" lIns="0" tIns="0" rIns="0" bIns="0" rtlCol="0" anchor="t"/>
           <a:lstStyle/>
           <a:p>
-            <a:pPr indent="0" marL="0">
+            <a:pPr marL="0" indent="0">
               <a:spcAft>
                 <a:spcPts val="400"/>
               </a:spcAft>
@@ -5411,6 +4824,13 @@
             <a:prstDash val="solid"/>
           </a:ln>
         </p:spPr>
+        <p:txBody>
+          <a:bodyPr/>
+          <a:lstStyle/>
+          <a:p>
+            <a:endParaRPr lang="ko-KR" altLang="en-US"/>
+          </a:p>
+        </p:txBody>
       </p:sp>
       <p:sp>
         <p:nvSpPr>
@@ -5433,7 +4853,7 @@
           <a:bodyPr wrap="square" lIns="0" tIns="0" rIns="0" bIns="0" rtlCol="0" anchor="ctr"/>
           <a:lstStyle/>
           <a:p>
-            <a:pPr indent="0" marL="0">
+            <a:pPr marL="0" indent="0">
               <a:buNone/>
             </a:pPr>
             <a:r>
@@ -5472,7 +4892,7 @@
           <a:bodyPr wrap="square" lIns="0" tIns="0" rIns="0" bIns="0" rtlCol="0" anchor="t"/>
           <a:lstStyle/>
           <a:p>
-            <a:pPr indent="0" marL="0">
+            <a:pPr marL="0" indent="0">
               <a:spcAft>
                 <a:spcPts val="400"/>
               </a:spcAft>
@@ -5513,7 +4933,7 @@
           </a:prstGeom>
           <a:extLst>
             <a:ext uri="{C572A759-6A51-4108-AA02-DFA0A04FC94B}">
-              <ma14:wrappingTextBoxFlag xmlns:ma14="http://schemas.microsoft.com/office/mac/drawingml/2011/main" val="0"/>
+              <ma14:wrappingTextBoxFlag xmlns="" xmlns:ma14="http://schemas.microsoft.com/office/mac/drawingml/2011/main" val="0"/>
             </a:ext>
           </a:extLst>
         </p:spPr>
@@ -5534,8 +4954,8 @@
           <a:p>
             <a:pPr algn="l"/>
             <a:fld id="{F7021451-1387-4CA6-816F-3879F97B5CBC}" type="slidenum">
-              <a:rPr b="0" lang="en-US"/>
-              <a:t>3</a:t>
+              <a:rPr lang="en-US" b="0"/>
+              <a:t>4</a:t>
             </a:fld>
             <a:endParaRPr lang="en-US"/>
           </a:p>
@@ -5549,7 +4969,7 @@
 </p:sld>
 </file>
 
-<file path=ppt/slides/slide4.xml><?xml version="1.0" encoding="utf-8"?>
+<file path=ppt/slides/slide5.xml><?xml version="1.0" encoding="utf-8"?>
 <p:sld xmlns:a="http://schemas.openxmlformats.org/drawingml/2006/main" xmlns:r="http://schemas.openxmlformats.org/officeDocument/2006/relationships" xmlns:p="http://schemas.openxmlformats.org/presentationml/2006/main">
   <p:cSld name="Slide 4">
     <p:spTree>
@@ -5587,7 +5007,7 @@
           <a:bodyPr wrap="square" lIns="0" tIns="0" rIns="0" bIns="0" rtlCol="0" anchor="ctr"/>
           <a:lstStyle/>
           <a:p>
-            <a:pPr indent="0" marL="0">
+            <a:pPr marL="0" indent="0">
               <a:buNone/>
             </a:pPr>
             <a:r>
@@ -5626,7 +5046,7 @@
           <a:bodyPr wrap="square" lIns="0" tIns="0" rIns="0" bIns="0" rtlCol="0" anchor="ctr"/>
           <a:lstStyle/>
           <a:p>
-            <a:pPr indent="0" marL="0">
+            <a:pPr marL="0" indent="0">
               <a:buNone/>
             </a:pPr>
             <a:r>
@@ -5665,7 +5085,7 @@
           <a:bodyPr wrap="square" lIns="0" tIns="0" rIns="0" bIns="0" rtlCol="0" anchor="t"/>
           <a:lstStyle/>
           <a:p>
-            <a:pPr indent="0" marL="0">
+            <a:pPr marL="0" indent="0">
               <a:buNone/>
             </a:pPr>
             <a:r>
@@ -5704,7 +5124,7 @@
           <a:bodyPr wrap="square" lIns="0" tIns="0" rIns="0" bIns="0" rtlCol="0" anchor="ctr"/>
           <a:lstStyle/>
           <a:p>
-            <a:pPr indent="0" marL="0">
+            <a:pPr marL="0" indent="0">
               <a:buNone/>
             </a:pPr>
             <a:r>
@@ -5743,7 +5163,7 @@
           <a:bodyPr wrap="square" lIns="0" tIns="0" rIns="0" bIns="0" rtlCol="0" anchor="t"/>
           <a:lstStyle/>
           <a:p>
-            <a:pPr indent="0" marL="0">
+            <a:pPr marL="0" indent="0">
               <a:buNone/>
             </a:pPr>
             <a:r>
@@ -5782,7 +5202,7 @@
           <a:bodyPr wrap="square" lIns="0" tIns="0" rIns="0" bIns="0" rtlCol="0" anchor="ctr"/>
           <a:lstStyle/>
           <a:p>
-            <a:pPr indent="0" marL="0">
+            <a:pPr marL="0" indent="0">
               <a:buNone/>
             </a:pPr>
             <a:r>
@@ -5821,7 +5241,7 @@
           <a:bodyPr wrap="square" lIns="0" tIns="0" rIns="0" bIns="0" rtlCol="0" anchor="t"/>
           <a:lstStyle/>
           <a:p>
-            <a:pPr indent="0" marL="0">
+            <a:pPr marL="0" indent="0">
               <a:buNone/>
             </a:pPr>
             <a:r>
@@ -5865,6 +5285,13 @@
             <a:prstDash val="solid"/>
           </a:ln>
         </p:spPr>
+        <p:txBody>
+          <a:bodyPr/>
+          <a:lstStyle/>
+          <a:p>
+            <a:endParaRPr lang="ko-KR" altLang="en-US"/>
+          </a:p>
+        </p:txBody>
       </p:sp>
       <p:sp>
         <p:nvSpPr>
@@ -5887,7 +5314,7 @@
           <a:bodyPr wrap="square" lIns="0" tIns="0" rIns="0" bIns="0" rtlCol="0" anchor="ctr"/>
           <a:lstStyle/>
           <a:p>
-            <a:pPr indent="0" marL="0">
+            <a:pPr marL="0" indent="0">
               <a:buNone/>
             </a:pPr>
             <a:r>
@@ -5926,7 +5353,7 @@
           <a:bodyPr wrap="square" lIns="0" tIns="0" rIns="0" bIns="0" rtlCol="0" anchor="t"/>
           <a:lstStyle/>
           <a:p>
-            <a:pPr indent="0" marL="0">
+            <a:pPr marL="0" indent="0">
               <a:spcAft>
                 <a:spcPts val="400"/>
               </a:spcAft>
@@ -5973,6 +5400,13 @@
             <a:prstDash val="solid"/>
           </a:ln>
         </p:spPr>
+        <p:txBody>
+          <a:bodyPr/>
+          <a:lstStyle/>
+          <a:p>
+            <a:endParaRPr lang="ko-KR" altLang="en-US"/>
+          </a:p>
+        </p:txBody>
       </p:sp>
       <p:sp>
         <p:nvSpPr>
@@ -5995,7 +5429,7 @@
           <a:bodyPr wrap="square" lIns="0" tIns="0" rIns="0" bIns="0" rtlCol="0" anchor="ctr"/>
           <a:lstStyle/>
           <a:p>
-            <a:pPr indent="0" marL="0">
+            <a:pPr marL="0" indent="0">
               <a:buNone/>
             </a:pPr>
             <a:r>
@@ -6034,7 +5468,7 @@
           <a:bodyPr wrap="square" lIns="0" tIns="0" rIns="0" bIns="0" rtlCol="0" anchor="t"/>
           <a:lstStyle/>
           <a:p>
-            <a:pPr indent="0" marL="0">
+            <a:pPr marL="0" indent="0">
               <a:spcAft>
                 <a:spcPts val="400"/>
               </a:spcAft>
@@ -6075,7 +5509,7 @@
           </a:prstGeom>
           <a:extLst>
             <a:ext uri="{C572A759-6A51-4108-AA02-DFA0A04FC94B}">
-              <ma14:wrappingTextBoxFlag xmlns:ma14="http://schemas.microsoft.com/office/mac/drawingml/2011/main" val="0"/>
+              <ma14:wrappingTextBoxFlag xmlns="" xmlns:ma14="http://schemas.microsoft.com/office/mac/drawingml/2011/main" val="0"/>
             </a:ext>
           </a:extLst>
         </p:spPr>
@@ -6096,8 +5530,8 @@
           <a:p>
             <a:pPr algn="l"/>
             <a:fld id="{F7021451-1387-4CA6-816F-3879F97B5CBC}" type="slidenum">
-              <a:rPr b="0" lang="en-US"/>
-              <a:t>4</a:t>
+              <a:rPr lang="en-US" b="0"/>
+              <a:t>5</a:t>
             </a:fld>
             <a:endParaRPr lang="en-US"/>
           </a:p>
@@ -6111,7 +5545,7 @@
 </p:sld>
 </file>
 
-<file path=ppt/slides/slide5.xml><?xml version="1.0" encoding="utf-8"?>
+<file path=ppt/slides/slide6.xml><?xml version="1.0" encoding="utf-8"?>
 <p:sld xmlns:a="http://schemas.openxmlformats.org/drawingml/2006/main" xmlns:r="http://schemas.openxmlformats.org/officeDocument/2006/relationships" xmlns:p="http://schemas.openxmlformats.org/presentationml/2006/main">
   <p:cSld name="Slide 5">
     <p:spTree>
@@ -6149,7 +5583,7 @@
           <a:bodyPr wrap="square" lIns="0" tIns="0" rIns="0" bIns="0" rtlCol="0" anchor="ctr"/>
           <a:lstStyle/>
           <a:p>
-            <a:pPr indent="0" marL="0">
+            <a:pPr marL="0" indent="0">
               <a:buNone/>
             </a:pPr>
             <a:r>
@@ -6193,6 +5627,13 @@
             <a:prstDash val="solid"/>
           </a:ln>
         </p:spPr>
+        <p:txBody>
+          <a:bodyPr/>
+          <a:lstStyle/>
+          <a:p>
+            <a:endParaRPr lang="ko-KR" altLang="en-US"/>
+          </a:p>
+        </p:txBody>
       </p:sp>
       <p:sp>
         <p:nvSpPr>
@@ -6215,7 +5656,7 @@
           <a:bodyPr wrap="square" lIns="0" tIns="0" rIns="0" bIns="0" rtlCol="0" anchor="ctr"/>
           <a:lstStyle/>
           <a:p>
-            <a:pPr indent="0" marL="0">
+            <a:pPr marL="0" indent="0">
               <a:buNone/>
             </a:pPr>
             <a:r>
@@ -6227,7 +5668,7 @@
                 <a:ea typeface="Malgun Gothic" pitchFamily="34" charset="-122"/>
                 <a:cs typeface="Malgun Gothic" pitchFamily="34" charset="-120"/>
               </a:rPr>
-              <a:t>Gemini 판정</a:t>
+              <a:t>LLM 판정</a:t>
             </a:r>
             <a:endParaRPr lang="en-US" sz="1600" dirty="0"/>
           </a:p>
@@ -6254,7 +5695,7 @@
           <a:bodyPr wrap="square" lIns="0" tIns="0" rIns="0" bIns="0" rtlCol="0" anchor="t"/>
           <a:lstStyle/>
           <a:p>
-            <a:pPr indent="0" marL="0">
+            <a:pPr marL="0" indent="0">
               <a:spcAft>
                 <a:spcPts val="400"/>
               </a:spcAft>
@@ -6274,7 +5715,7 @@
             <a:endParaRPr lang="en-US" sz="1300" dirty="0"/>
           </a:p>
           <a:p>
-            <a:pPr indent="0" marL="0">
+            <a:pPr marL="0" indent="0">
               <a:spcAft>
                 <a:spcPts val="400"/>
               </a:spcAft>
@@ -6283,7 +5724,7 @@
             <a:endParaRPr lang="en-US" sz="1300" dirty="0"/>
           </a:p>
           <a:p>
-            <a:pPr indent="0" marL="0">
+            <a:pPr marL="0" indent="0">
               <a:spcAft>
                 <a:spcPts val="400"/>
               </a:spcAft>
@@ -6303,7 +5744,7 @@
             <a:endParaRPr lang="en-US" sz="1300" dirty="0"/>
           </a:p>
           <a:p>
-            <a:pPr indent="0" marL="0">
+            <a:pPr marL="0" indent="0">
               <a:spcAft>
                 <a:spcPts val="400"/>
               </a:spcAft>
@@ -6312,7 +5753,7 @@
             <a:endParaRPr lang="en-US" sz="1300" dirty="0"/>
           </a:p>
           <a:p>
-            <a:pPr indent="0" marL="0">
+            <a:pPr marL="0" indent="0">
               <a:spcAft>
                 <a:spcPts val="400"/>
               </a:spcAft>
@@ -6359,6 +5800,13 @@
             <a:prstDash val="solid"/>
           </a:ln>
         </p:spPr>
+        <p:txBody>
+          <a:bodyPr/>
+          <a:lstStyle/>
+          <a:p>
+            <a:endParaRPr lang="ko-KR" altLang="en-US"/>
+          </a:p>
+        </p:txBody>
       </p:sp>
       <p:sp>
         <p:nvSpPr>
@@ -6381,9 +5829,20 @@
           <a:bodyPr wrap="square" lIns="0" tIns="0" rIns="0" bIns="0" rtlCol="0" anchor="ctr"/>
           <a:lstStyle/>
           <a:p>
-            <a:pPr indent="0" marL="0">
-              <a:buNone/>
-            </a:pPr>
+            <a:pPr marL="0" indent="0">
+              <a:buNone/>
+            </a:pPr>
+            <a:r>
+              <a:rPr lang="en-US" sz="1600" b="1" dirty="0" err="1">
+                <a:solidFill>
+                  <a:srgbClr val="14213D"/>
+                </a:solidFill>
+                <a:latin typeface="Malgun Gothic" pitchFamily="34" charset="0"/>
+                <a:ea typeface="Malgun Gothic" pitchFamily="34" charset="-122"/>
+                <a:cs typeface="Malgun Gothic" pitchFamily="34" charset="-120"/>
+              </a:rPr>
+              <a:t>RAG를</a:t>
+            </a:r>
             <a:r>
               <a:rPr lang="en-US" sz="1600" b="1" dirty="0">
                 <a:solidFill>
@@ -6393,7 +5852,106 @@
                 <a:ea typeface="Malgun Gothic" pitchFamily="34" charset="-122"/>
                 <a:cs typeface="Malgun Gothic" pitchFamily="34" charset="-120"/>
               </a:rPr>
-              <a:t>RAG는 기본 꺼짐</a:t>
+              <a:t> </a:t>
+            </a:r>
+            <a:r>
+              <a:rPr lang="en-US" sz="1600" b="1" dirty="0" err="1">
+                <a:solidFill>
+                  <a:srgbClr val="14213D"/>
+                </a:solidFill>
+                <a:latin typeface="Malgun Gothic" pitchFamily="34" charset="0"/>
+                <a:ea typeface="Malgun Gothic" pitchFamily="34" charset="-122"/>
+                <a:cs typeface="Malgun Gothic" pitchFamily="34" charset="-120"/>
+              </a:rPr>
+              <a:t>통한</a:t>
+            </a:r>
+            <a:r>
+              <a:rPr lang="en-US" sz="1600" b="1" dirty="0">
+                <a:solidFill>
+                  <a:srgbClr val="14213D"/>
+                </a:solidFill>
+                <a:latin typeface="Malgun Gothic" pitchFamily="34" charset="0"/>
+                <a:ea typeface="Malgun Gothic" pitchFamily="34" charset="-122"/>
+                <a:cs typeface="Malgun Gothic" pitchFamily="34" charset="-120"/>
+              </a:rPr>
+              <a:t> </a:t>
+            </a:r>
+            <a:r>
+              <a:rPr lang="en-US" sz="1600" b="1" dirty="0" err="1">
+                <a:solidFill>
+                  <a:srgbClr val="14213D"/>
+                </a:solidFill>
+                <a:latin typeface="Malgun Gothic" pitchFamily="34" charset="0"/>
+                <a:ea typeface="Malgun Gothic" pitchFamily="34" charset="-122"/>
+                <a:cs typeface="Malgun Gothic" pitchFamily="34" charset="-120"/>
+              </a:rPr>
+              <a:t>실시간</a:t>
+            </a:r>
+            <a:r>
+              <a:rPr lang="en-US" sz="1600" b="1" dirty="0">
+                <a:solidFill>
+                  <a:srgbClr val="14213D"/>
+                </a:solidFill>
+                <a:latin typeface="Malgun Gothic" pitchFamily="34" charset="0"/>
+                <a:ea typeface="Malgun Gothic" pitchFamily="34" charset="-122"/>
+                <a:cs typeface="Malgun Gothic" pitchFamily="34" charset="-120"/>
+              </a:rPr>
+              <a:t> </a:t>
+            </a:r>
+            <a:r>
+              <a:rPr lang="en-US" sz="1600" b="1" dirty="0" err="1">
+                <a:solidFill>
+                  <a:srgbClr val="14213D"/>
+                </a:solidFill>
+                <a:latin typeface="Malgun Gothic" pitchFamily="34" charset="0"/>
+                <a:ea typeface="Malgun Gothic" pitchFamily="34" charset="-122"/>
+                <a:cs typeface="Malgun Gothic" pitchFamily="34" charset="-120"/>
+              </a:rPr>
+              <a:t>스팸</a:t>
+            </a:r>
+            <a:r>
+              <a:rPr lang="en-US" sz="1600" b="1" dirty="0">
+                <a:solidFill>
+                  <a:srgbClr val="14213D"/>
+                </a:solidFill>
+                <a:latin typeface="Malgun Gothic" pitchFamily="34" charset="0"/>
+                <a:ea typeface="Malgun Gothic" pitchFamily="34" charset="-122"/>
+                <a:cs typeface="Malgun Gothic" pitchFamily="34" charset="-120"/>
+              </a:rPr>
+              <a:t> </a:t>
+            </a:r>
+            <a:r>
+              <a:rPr lang="en-US" sz="1600" b="1" dirty="0" err="1">
+                <a:solidFill>
+                  <a:srgbClr val="14213D"/>
+                </a:solidFill>
+                <a:latin typeface="Malgun Gothic" pitchFamily="34" charset="0"/>
+                <a:ea typeface="Malgun Gothic" pitchFamily="34" charset="-122"/>
+                <a:cs typeface="Malgun Gothic" pitchFamily="34" charset="-120"/>
+              </a:rPr>
+              <a:t>학습</a:t>
+            </a:r>
+            <a:r>
+              <a:rPr lang="en-US" sz="1600" b="1" dirty="0">
+                <a:solidFill>
+                  <a:srgbClr val="14213D"/>
+                </a:solidFill>
+                <a:latin typeface="Malgun Gothic" pitchFamily="34" charset="0"/>
+                <a:ea typeface="Malgun Gothic" pitchFamily="34" charset="-122"/>
+                <a:cs typeface="Malgun Gothic" pitchFamily="34" charset="-120"/>
+              </a:rPr>
+              <a:t> </a:t>
+            </a:r>
+            <a:r>
+              <a:rPr lang="en-US" sz="1600" b="1" dirty="0" err="1">
+                <a:solidFill>
+                  <a:srgbClr val="14213D"/>
+                </a:solidFill>
+                <a:latin typeface="Malgun Gothic" pitchFamily="34" charset="0"/>
+                <a:ea typeface="Malgun Gothic" pitchFamily="34" charset="-122"/>
+                <a:cs typeface="Malgun Gothic" pitchFamily="34" charset="-120"/>
+              </a:rPr>
+              <a:t>강화</a:t>
             </a:r>
             <a:endParaRPr lang="en-US" sz="1600" dirty="0"/>
           </a:p>
@@ -6420,7 +5978,7 @@
           <a:bodyPr wrap="square" lIns="0" tIns="0" rIns="0" bIns="0" rtlCol="0" anchor="t"/>
           <a:lstStyle/>
           <a:p>
-            <a:pPr indent="0" marL="0">
+            <a:pPr marL="0" indent="0">
               <a:spcAft>
                 <a:spcPts val="400"/>
               </a:spcAft>
@@ -6435,12 +5993,254 @@
                 <a:ea typeface="Malgun Gothic" pitchFamily="34" charset="-122"/>
                 <a:cs typeface="Malgun Gothic" pitchFamily="34" charset="-120"/>
               </a:rPr>
-              <a:t>과거 스팸 사례를 근거로 붙이는 RAG를 같은 메일 200건으로 비교했습니다.</a:t>
+              <a:t>과거 </a:t>
+            </a:r>
+            <a:r>
+              <a:rPr lang="en-US" sz="1300" dirty="0" err="1">
+                <a:solidFill>
+                  <a:srgbClr val="1F2937"/>
+                </a:solidFill>
+                <a:latin typeface="Malgun Gothic" pitchFamily="34" charset="0"/>
+                <a:ea typeface="Malgun Gothic" pitchFamily="34" charset="-122"/>
+                <a:cs typeface="Malgun Gothic" pitchFamily="34" charset="-120"/>
+              </a:rPr>
+              <a:t>스팸</a:t>
+            </a:r>
+            <a:r>
+              <a:rPr lang="en-US" sz="1300" dirty="0">
+                <a:solidFill>
+                  <a:srgbClr val="1F2937"/>
+                </a:solidFill>
+                <a:latin typeface="Malgun Gothic" pitchFamily="34" charset="0"/>
+                <a:ea typeface="Malgun Gothic" pitchFamily="34" charset="-122"/>
+                <a:cs typeface="Malgun Gothic" pitchFamily="34" charset="-120"/>
+              </a:rPr>
+              <a:t> </a:t>
+            </a:r>
+            <a:r>
+              <a:rPr lang="en-US" sz="1300" dirty="0" err="1">
+                <a:solidFill>
+                  <a:srgbClr val="1F2937"/>
+                </a:solidFill>
+                <a:latin typeface="Malgun Gothic" pitchFamily="34" charset="0"/>
+                <a:ea typeface="Malgun Gothic" pitchFamily="34" charset="-122"/>
+                <a:cs typeface="Malgun Gothic" pitchFamily="34" charset="-120"/>
+              </a:rPr>
+              <a:t>사례뿐</a:t>
+            </a:r>
+            <a:r>
+              <a:rPr lang="en-US" sz="1300" dirty="0">
+                <a:solidFill>
+                  <a:srgbClr val="1F2937"/>
+                </a:solidFill>
+                <a:latin typeface="Malgun Gothic" pitchFamily="34" charset="0"/>
+                <a:ea typeface="Malgun Gothic" pitchFamily="34" charset="-122"/>
+                <a:cs typeface="Malgun Gothic" pitchFamily="34" charset="-120"/>
+              </a:rPr>
+              <a:t> </a:t>
+            </a:r>
+            <a:r>
+              <a:rPr lang="en-US" sz="1300" dirty="0" err="1">
+                <a:solidFill>
+                  <a:srgbClr val="1F2937"/>
+                </a:solidFill>
+                <a:latin typeface="Malgun Gothic" pitchFamily="34" charset="0"/>
+                <a:ea typeface="Malgun Gothic" pitchFamily="34" charset="-122"/>
+                <a:cs typeface="Malgun Gothic" pitchFamily="34" charset="-120"/>
+              </a:rPr>
+              <a:t>지능화되는</a:t>
+            </a:r>
+            <a:r>
+              <a:rPr lang="en-US" sz="1300" dirty="0">
+                <a:solidFill>
+                  <a:srgbClr val="1F2937"/>
+                </a:solidFill>
+                <a:latin typeface="Malgun Gothic" pitchFamily="34" charset="0"/>
+                <a:ea typeface="Malgun Gothic" pitchFamily="34" charset="-122"/>
+                <a:cs typeface="Malgun Gothic" pitchFamily="34" charset="-120"/>
+              </a:rPr>
+              <a:t> </a:t>
+            </a:r>
+            <a:r>
+              <a:rPr lang="en-US" sz="1300" dirty="0" err="1">
+                <a:solidFill>
+                  <a:srgbClr val="1F2937"/>
+                </a:solidFill>
+                <a:latin typeface="Malgun Gothic" pitchFamily="34" charset="0"/>
+                <a:ea typeface="Malgun Gothic" pitchFamily="34" charset="-122"/>
+                <a:cs typeface="Malgun Gothic" pitchFamily="34" charset="-120"/>
+              </a:rPr>
+              <a:t>스팸</a:t>
+            </a:r>
+            <a:r>
+              <a:rPr lang="en-US" sz="1300" dirty="0">
+                <a:solidFill>
+                  <a:srgbClr val="1F2937"/>
+                </a:solidFill>
+                <a:latin typeface="Malgun Gothic" pitchFamily="34" charset="0"/>
+                <a:ea typeface="Malgun Gothic" pitchFamily="34" charset="-122"/>
+                <a:cs typeface="Malgun Gothic" pitchFamily="34" charset="-120"/>
+              </a:rPr>
+              <a:t> </a:t>
+            </a:r>
+            <a:r>
+              <a:rPr lang="en-US" sz="1300" dirty="0" err="1">
+                <a:solidFill>
+                  <a:srgbClr val="1F2937"/>
+                </a:solidFill>
+                <a:latin typeface="Malgun Gothic" pitchFamily="34" charset="0"/>
+                <a:ea typeface="Malgun Gothic" pitchFamily="34" charset="-122"/>
+                <a:cs typeface="Malgun Gothic" pitchFamily="34" charset="-120"/>
+              </a:rPr>
+              <a:t>정보를</a:t>
+            </a:r>
+            <a:r>
+              <a:rPr lang="en-US" sz="1300" dirty="0">
+                <a:solidFill>
+                  <a:srgbClr val="1F2937"/>
+                </a:solidFill>
+                <a:latin typeface="Malgun Gothic" pitchFamily="34" charset="0"/>
+                <a:ea typeface="Malgun Gothic" pitchFamily="34" charset="-122"/>
+                <a:cs typeface="Malgun Gothic" pitchFamily="34" charset="-120"/>
+              </a:rPr>
+              <a:t> </a:t>
+            </a:r>
+            <a:r>
+              <a:rPr lang="en-US" sz="1300" dirty="0" err="1">
+                <a:solidFill>
+                  <a:srgbClr val="1F2937"/>
+                </a:solidFill>
+                <a:latin typeface="Malgun Gothic" pitchFamily="34" charset="0"/>
+                <a:ea typeface="Malgun Gothic" pitchFamily="34" charset="-122"/>
+                <a:cs typeface="Malgun Gothic" pitchFamily="34" charset="-120"/>
+              </a:rPr>
+              <a:t>판단하여</a:t>
+            </a:r>
+            <a:r>
+              <a:rPr lang="en-US" sz="1300" dirty="0">
+                <a:solidFill>
+                  <a:srgbClr val="1F2937"/>
+                </a:solidFill>
+                <a:latin typeface="Malgun Gothic" pitchFamily="34" charset="0"/>
+                <a:ea typeface="Malgun Gothic" pitchFamily="34" charset="-122"/>
+                <a:cs typeface="Malgun Gothic" pitchFamily="34" charset="-120"/>
+              </a:rPr>
+              <a:t> RAG </a:t>
+            </a:r>
+            <a:r>
+              <a:rPr lang="en-US" sz="1300" dirty="0" err="1">
+                <a:solidFill>
+                  <a:srgbClr val="1F2937"/>
+                </a:solidFill>
+                <a:latin typeface="Malgun Gothic" pitchFamily="34" charset="0"/>
+                <a:ea typeface="Malgun Gothic" pitchFamily="34" charset="-122"/>
+                <a:cs typeface="Malgun Gothic" pitchFamily="34" charset="-120"/>
+              </a:rPr>
+              <a:t>데이터를</a:t>
+            </a:r>
+            <a:r>
+              <a:rPr lang="en-US" sz="1300" dirty="0">
+                <a:solidFill>
+                  <a:srgbClr val="1F2937"/>
+                </a:solidFill>
+                <a:latin typeface="Malgun Gothic" pitchFamily="34" charset="0"/>
+                <a:ea typeface="Malgun Gothic" pitchFamily="34" charset="-122"/>
+                <a:cs typeface="Malgun Gothic" pitchFamily="34" charset="-120"/>
+              </a:rPr>
+              <a:t> </a:t>
+            </a:r>
+            <a:r>
+              <a:rPr lang="en-US" sz="1300" dirty="0" err="1">
+                <a:solidFill>
+                  <a:srgbClr val="1F2937"/>
+                </a:solidFill>
+                <a:latin typeface="Malgun Gothic" pitchFamily="34" charset="0"/>
+                <a:ea typeface="Malgun Gothic" pitchFamily="34" charset="-122"/>
+                <a:cs typeface="Malgun Gothic" pitchFamily="34" charset="-120"/>
+              </a:rPr>
+              <a:t>추적보다</a:t>
+            </a:r>
+            <a:r>
+              <a:rPr lang="en-US" sz="1300" dirty="0">
+                <a:solidFill>
+                  <a:srgbClr val="1F2937"/>
+                </a:solidFill>
+                <a:latin typeface="Malgun Gothic" pitchFamily="34" charset="0"/>
+                <a:ea typeface="Malgun Gothic" pitchFamily="34" charset="-122"/>
+                <a:cs typeface="Malgun Gothic" pitchFamily="34" charset="-120"/>
+              </a:rPr>
+              <a:t> </a:t>
+            </a:r>
+            <a:r>
+              <a:rPr lang="en-US" sz="1300" dirty="0" err="1">
+                <a:solidFill>
+                  <a:srgbClr val="1F2937"/>
+                </a:solidFill>
+                <a:latin typeface="Malgun Gothic" pitchFamily="34" charset="0"/>
+                <a:ea typeface="Malgun Gothic" pitchFamily="34" charset="-122"/>
+                <a:cs typeface="Malgun Gothic" pitchFamily="34" charset="-120"/>
+              </a:rPr>
+              <a:t>세밀하게</a:t>
+            </a:r>
+            <a:r>
+              <a:rPr lang="en-US" sz="1300" dirty="0">
+                <a:solidFill>
+                  <a:srgbClr val="1F2937"/>
+                </a:solidFill>
+                <a:latin typeface="Malgun Gothic" pitchFamily="34" charset="0"/>
+                <a:ea typeface="Malgun Gothic" pitchFamily="34" charset="-122"/>
+                <a:cs typeface="Malgun Gothic" pitchFamily="34" charset="-120"/>
+              </a:rPr>
+              <a:t> </a:t>
+            </a:r>
+            <a:r>
+              <a:rPr lang="en-US" sz="1300" dirty="0" err="1">
+                <a:solidFill>
+                  <a:srgbClr val="1F2937"/>
+                </a:solidFill>
+                <a:latin typeface="Malgun Gothic" pitchFamily="34" charset="0"/>
+                <a:ea typeface="Malgun Gothic" pitchFamily="34" charset="-122"/>
+                <a:cs typeface="Malgun Gothic" pitchFamily="34" charset="-120"/>
+              </a:rPr>
+              <a:t>스팸을</a:t>
+            </a:r>
+            <a:r>
+              <a:rPr lang="en-US" sz="1300" dirty="0">
+                <a:solidFill>
+                  <a:srgbClr val="1F2937"/>
+                </a:solidFill>
+                <a:latin typeface="Malgun Gothic" pitchFamily="34" charset="0"/>
+                <a:ea typeface="Malgun Gothic" pitchFamily="34" charset="-122"/>
+                <a:cs typeface="Malgun Gothic" pitchFamily="34" charset="-120"/>
+              </a:rPr>
+              <a:t> </a:t>
+            </a:r>
+            <a:r>
+              <a:rPr lang="en-US" sz="1300" dirty="0" err="1">
+                <a:solidFill>
+                  <a:srgbClr val="1F2937"/>
+                </a:solidFill>
+                <a:latin typeface="Malgun Gothic" pitchFamily="34" charset="0"/>
+                <a:ea typeface="Malgun Gothic" pitchFamily="34" charset="-122"/>
+                <a:cs typeface="Malgun Gothic" pitchFamily="34" charset="-120"/>
+              </a:rPr>
+              <a:t>분석합니다</a:t>
+            </a:r>
+            <a:r>
+              <a:rPr lang="en-US" sz="1300" dirty="0">
+                <a:solidFill>
+                  <a:srgbClr val="1F2937"/>
+                </a:solidFill>
+                <a:latin typeface="Malgun Gothic" pitchFamily="34" charset="0"/>
+                <a:ea typeface="Malgun Gothic" pitchFamily="34" charset="-122"/>
+                <a:cs typeface="Malgun Gothic" pitchFamily="34" charset="-120"/>
+              </a:rPr>
+              <a:t>.  </a:t>
             </a:r>
             <a:endParaRPr lang="en-US" sz="1300" dirty="0"/>
           </a:p>
           <a:p>
-            <a:pPr indent="0" marL="0">
+            <a:pPr marL="0" indent="0">
               <a:spcAft>
                 <a:spcPts val="400"/>
               </a:spcAft>
@@ -6449,13 +6249,24 @@
             <a:endParaRPr lang="en-US" sz="1300" dirty="0"/>
           </a:p>
           <a:p>
-            <a:pPr indent="0" marL="0">
+            <a:pPr marL="0" indent="0">
               <a:spcAft>
                 <a:spcPts val="400"/>
               </a:spcAft>
               <a:buNone/>
             </a:pPr>
             <a:r>
+              <a:rPr lang="en-US" sz="1300" dirty="0" err="1">
+                <a:solidFill>
+                  <a:srgbClr val="1F2937"/>
+                </a:solidFill>
+                <a:latin typeface="Malgun Gothic" pitchFamily="34" charset="0"/>
+                <a:ea typeface="Malgun Gothic" pitchFamily="34" charset="-122"/>
+                <a:cs typeface="Malgun Gothic" pitchFamily="34" charset="-120"/>
+              </a:rPr>
+              <a:t>사용자</a:t>
+            </a:r>
+            <a:r>
               <a:rPr lang="en-US" sz="1300" dirty="0">
                 <a:solidFill>
                   <a:srgbClr val="1F2937"/>
@@ -6464,12 +6275,187 @@
                 <a:ea typeface="Malgun Gothic" pitchFamily="34" charset="-122"/>
                 <a:cs typeface="Malgun Gothic" pitchFamily="34" charset="-120"/>
               </a:rPr>
-              <a:t>정확도 89.5~90.0% 대 89.0~89.5%로 차이가 없어 기본값을 껐습니다.</a:t>
-            </a:r>
-            <a:endParaRPr lang="en-US" sz="1300" dirty="0"/>
-          </a:p>
-          <a:p>
-            <a:pPr indent="0" marL="0">
+              <a:t> </a:t>
+            </a:r>
+            <a:r>
+              <a:rPr lang="en-US" sz="1300" dirty="0" err="1">
+                <a:solidFill>
+                  <a:srgbClr val="1F2937"/>
+                </a:solidFill>
+                <a:latin typeface="Malgun Gothic" pitchFamily="34" charset="0"/>
+                <a:ea typeface="Malgun Gothic" pitchFamily="34" charset="-122"/>
+                <a:cs typeface="Malgun Gothic" pitchFamily="34" charset="-120"/>
+              </a:rPr>
+              <a:t>신고를</a:t>
+            </a:r>
+            <a:r>
+              <a:rPr lang="en-US" sz="1300" dirty="0">
+                <a:solidFill>
+                  <a:srgbClr val="1F2937"/>
+                </a:solidFill>
+                <a:latin typeface="Malgun Gothic" pitchFamily="34" charset="0"/>
+                <a:ea typeface="Malgun Gothic" pitchFamily="34" charset="-122"/>
+                <a:cs typeface="Malgun Gothic" pitchFamily="34" charset="-120"/>
+              </a:rPr>
+              <a:t> </a:t>
+            </a:r>
+            <a:r>
+              <a:rPr lang="en-US" sz="1300" dirty="0" err="1">
+                <a:solidFill>
+                  <a:srgbClr val="1F2937"/>
+                </a:solidFill>
+                <a:latin typeface="Malgun Gothic" pitchFamily="34" charset="0"/>
+                <a:ea typeface="Malgun Gothic" pitchFamily="34" charset="-122"/>
+                <a:cs typeface="Malgun Gothic" pitchFamily="34" charset="-120"/>
+              </a:rPr>
+              <a:t>통해</a:t>
+            </a:r>
+            <a:r>
+              <a:rPr lang="en-US" sz="1300" dirty="0">
+                <a:solidFill>
+                  <a:srgbClr val="1F2937"/>
+                </a:solidFill>
+                <a:latin typeface="Malgun Gothic" pitchFamily="34" charset="0"/>
+                <a:ea typeface="Malgun Gothic" pitchFamily="34" charset="-122"/>
+                <a:cs typeface="Malgun Gothic" pitchFamily="34" charset="-120"/>
+              </a:rPr>
+              <a:t> </a:t>
+            </a:r>
+            <a:r>
+              <a:rPr lang="en-US" sz="1300" dirty="0" err="1">
+                <a:solidFill>
+                  <a:srgbClr val="1F2937"/>
+                </a:solidFill>
+                <a:latin typeface="Malgun Gothic" pitchFamily="34" charset="0"/>
+                <a:ea typeface="Malgun Gothic" pitchFamily="34" charset="-122"/>
+                <a:cs typeface="Malgun Gothic" pitchFamily="34" charset="-120"/>
+              </a:rPr>
+              <a:t>AI놓친</a:t>
+            </a:r>
+            <a:r>
+              <a:rPr lang="en-US" sz="1300" dirty="0">
+                <a:solidFill>
+                  <a:srgbClr val="1F2937"/>
+                </a:solidFill>
+                <a:latin typeface="Malgun Gothic" pitchFamily="34" charset="0"/>
+                <a:ea typeface="Malgun Gothic" pitchFamily="34" charset="-122"/>
+                <a:cs typeface="Malgun Gothic" pitchFamily="34" charset="-120"/>
+              </a:rPr>
+              <a:t> </a:t>
+            </a:r>
+            <a:r>
+              <a:rPr lang="en-US" sz="1300" dirty="0" err="1">
+                <a:solidFill>
+                  <a:srgbClr val="1F2937"/>
+                </a:solidFill>
+                <a:latin typeface="Malgun Gothic" pitchFamily="34" charset="0"/>
+                <a:ea typeface="Malgun Gothic" pitchFamily="34" charset="-122"/>
+                <a:cs typeface="Malgun Gothic" pitchFamily="34" charset="-120"/>
+              </a:rPr>
+              <a:t>스팸</a:t>
+            </a:r>
+            <a:r>
+              <a:rPr lang="en-US" sz="1300" dirty="0">
+                <a:solidFill>
+                  <a:srgbClr val="1F2937"/>
+                </a:solidFill>
+                <a:latin typeface="Malgun Gothic" pitchFamily="34" charset="0"/>
+                <a:ea typeface="Malgun Gothic" pitchFamily="34" charset="-122"/>
+                <a:cs typeface="Malgun Gothic" pitchFamily="34" charset="-120"/>
+              </a:rPr>
+              <a:t> </a:t>
+            </a:r>
+            <a:r>
+              <a:rPr lang="en-US" sz="1300" dirty="0" err="1">
+                <a:solidFill>
+                  <a:srgbClr val="1F2937"/>
+                </a:solidFill>
+                <a:latin typeface="Malgun Gothic" pitchFamily="34" charset="0"/>
+                <a:ea typeface="Malgun Gothic" pitchFamily="34" charset="-122"/>
+                <a:cs typeface="Malgun Gothic" pitchFamily="34" charset="-120"/>
+              </a:rPr>
+              <a:t>데이터들에</a:t>
+            </a:r>
+            <a:r>
+              <a:rPr lang="en-US" sz="1300" dirty="0">
+                <a:solidFill>
+                  <a:srgbClr val="1F2937"/>
+                </a:solidFill>
+                <a:latin typeface="Malgun Gothic" pitchFamily="34" charset="0"/>
+                <a:ea typeface="Malgun Gothic" pitchFamily="34" charset="-122"/>
+                <a:cs typeface="Malgun Gothic" pitchFamily="34" charset="-120"/>
+              </a:rPr>
+              <a:t> </a:t>
+            </a:r>
+            <a:r>
+              <a:rPr lang="en-US" sz="1300" dirty="0" err="1">
+                <a:solidFill>
+                  <a:srgbClr val="1F2937"/>
+                </a:solidFill>
+                <a:latin typeface="Malgun Gothic" pitchFamily="34" charset="0"/>
+                <a:ea typeface="Malgun Gothic" pitchFamily="34" charset="-122"/>
+                <a:cs typeface="Malgun Gothic" pitchFamily="34" charset="-120"/>
+              </a:rPr>
+              <a:t>대한</a:t>
+            </a:r>
+            <a:r>
+              <a:rPr lang="en-US" sz="1300" dirty="0">
+                <a:solidFill>
+                  <a:srgbClr val="1F2937"/>
+                </a:solidFill>
+                <a:latin typeface="Malgun Gothic" pitchFamily="34" charset="0"/>
+                <a:ea typeface="Malgun Gothic" pitchFamily="34" charset="-122"/>
+                <a:cs typeface="Malgun Gothic" pitchFamily="34" charset="-120"/>
+              </a:rPr>
+              <a:t> </a:t>
+            </a:r>
+            <a:r>
+              <a:rPr lang="en-US" sz="1300" dirty="0" err="1">
+                <a:solidFill>
+                  <a:srgbClr val="1F2937"/>
+                </a:solidFill>
+                <a:latin typeface="Malgun Gothic" pitchFamily="34" charset="0"/>
+                <a:ea typeface="Malgun Gothic" pitchFamily="34" charset="-122"/>
+                <a:cs typeface="Malgun Gothic" pitchFamily="34" charset="-120"/>
+              </a:rPr>
+              <a:t>학습경험치를</a:t>
+            </a:r>
+            <a:r>
+              <a:rPr lang="en-US" sz="1300" dirty="0">
+                <a:solidFill>
+                  <a:srgbClr val="1F2937"/>
+                </a:solidFill>
+                <a:latin typeface="Malgun Gothic" pitchFamily="34" charset="0"/>
+                <a:ea typeface="Malgun Gothic" pitchFamily="34" charset="-122"/>
+                <a:cs typeface="Malgun Gothic" pitchFamily="34" charset="-120"/>
+              </a:rPr>
+              <a:t> </a:t>
+            </a:r>
+            <a:r>
+              <a:rPr lang="en-US" sz="1300" dirty="0" err="1">
+                <a:solidFill>
+                  <a:srgbClr val="1F2937"/>
+                </a:solidFill>
+                <a:latin typeface="Malgun Gothic" pitchFamily="34" charset="0"/>
+                <a:ea typeface="Malgun Gothic" pitchFamily="34" charset="-122"/>
+                <a:cs typeface="Malgun Gothic" pitchFamily="34" charset="-120"/>
+              </a:rPr>
+              <a:t>강화합니다</a:t>
+            </a:r>
+            <a:r>
+              <a:rPr lang="en-US" sz="1300" dirty="0">
+                <a:solidFill>
+                  <a:srgbClr val="1F2937"/>
+                </a:solidFill>
+                <a:latin typeface="Malgun Gothic" pitchFamily="34" charset="0"/>
+                <a:ea typeface="Malgun Gothic" pitchFamily="34" charset="-122"/>
+                <a:cs typeface="Malgun Gothic" pitchFamily="34" charset="-120"/>
+              </a:rPr>
+              <a:t>.</a:t>
+            </a:r>
+          </a:p>
+          <a:p>
+            <a:pPr marL="0" indent="0">
               <a:spcAft>
                 <a:spcPts val="400"/>
               </a:spcAft>
@@ -6478,23 +6464,12 @@
             <a:endParaRPr lang="en-US" sz="1300" dirty="0"/>
           </a:p>
           <a:p>
-            <a:pPr indent="0" marL="0">
+            <a:pPr marL="0" indent="0">
               <a:spcAft>
                 <a:spcPts val="400"/>
               </a:spcAft>
               <a:buNone/>
             </a:pPr>
-            <a:r>
-              <a:rPr lang="en-US" sz="1300" dirty="0">
-                <a:solidFill>
-                  <a:srgbClr val="1F2937"/>
-                </a:solidFill>
-                <a:latin typeface="Malgun Gothic" pitchFamily="34" charset="0"/>
-                <a:ea typeface="Malgun Gothic" pitchFamily="34" charset="-122"/>
-                <a:cs typeface="Malgun Gothic" pitchFamily="34" charset="-120"/>
-              </a:rPr>
-              <a:t>사용자 신고 사례를 쌓는 용도로는 켭니다.</a:t>
-            </a:r>
             <a:endParaRPr lang="en-US" sz="1300" dirty="0"/>
           </a:p>
         </p:txBody>
@@ -6519,7 +6494,7 @@
           </a:prstGeom>
           <a:extLst>
             <a:ext uri="{C572A759-6A51-4108-AA02-DFA0A04FC94B}">
-              <ma14:wrappingTextBoxFlag xmlns:ma14="http://schemas.microsoft.com/office/mac/drawingml/2011/main" val="0"/>
+              <ma14:wrappingTextBoxFlag xmlns="" xmlns:ma14="http://schemas.microsoft.com/office/mac/drawingml/2011/main" val="0"/>
             </a:ext>
           </a:extLst>
         </p:spPr>
@@ -6540,8 +6515,8 @@
           <a:p>
             <a:pPr algn="l"/>
             <a:fld id="{F7021451-1387-4CA6-816F-3879F97B5CBC}" type="slidenum">
-              <a:rPr b="0" lang="en-US"/>
-              <a:t>5</a:t>
+              <a:rPr lang="en-US" b="0"/>
+              <a:t>6</a:t>
             </a:fld>
             <a:endParaRPr lang="en-US"/>
           </a:p>
@@ -6555,7 +6530,7 @@
 </p:sld>
 </file>
 
-<file path=ppt/slides/slide6.xml><?xml version="1.0" encoding="utf-8"?>
+<file path=ppt/slides/slide7.xml><?xml version="1.0" encoding="utf-8"?>
 <p:sld xmlns:a="http://schemas.openxmlformats.org/drawingml/2006/main" xmlns:r="http://schemas.openxmlformats.org/officeDocument/2006/relationships" xmlns:p="http://schemas.openxmlformats.org/presentationml/2006/main">
   <p:cSld name="Slide 6">
     <p:spTree>
@@ -6593,7 +6568,7 @@
           <a:bodyPr wrap="square" lIns="0" tIns="0" rIns="0" bIns="0" rtlCol="0" anchor="ctr"/>
           <a:lstStyle/>
           <a:p>
-            <a:pPr indent="0" marL="0">
+            <a:pPr marL="0" indent="0">
               <a:buNone/>
             </a:pPr>
             <a:r>
@@ -6635,6 +6610,13 @@
             <a:prstDash val="solid"/>
           </a:ln>
         </p:spPr>
+        <p:txBody>
+          <a:bodyPr/>
+          <a:lstStyle/>
+          <a:p>
+            <a:endParaRPr lang="ko-KR" altLang="en-US"/>
+          </a:p>
+        </p:txBody>
       </p:sp>
       <p:sp>
         <p:nvSpPr>
@@ -6657,7 +6639,7 @@
           <a:bodyPr wrap="square" lIns="0" tIns="0" rIns="0" bIns="0" rtlCol="0" anchor="ctr"/>
           <a:lstStyle/>
           <a:p>
-            <a:pPr algn="ctr" indent="0" marL="0">
+            <a:pPr marL="0" indent="0" algn="ctr">
               <a:buNone/>
             </a:pPr>
             <a:r>
@@ -6696,7 +6678,7 @@
           <a:bodyPr wrap="square" lIns="0" tIns="0" rIns="0" bIns="0" rtlCol="0" anchor="ctr"/>
           <a:lstStyle/>
           <a:p>
-            <a:pPr indent="0" marL="0">
+            <a:pPr marL="0" indent="0">
               <a:buNone/>
             </a:pPr>
             <a:r>
@@ -6735,7 +6717,7 @@
           <a:bodyPr wrap="square" lIns="0" tIns="0" rIns="0" bIns="0" rtlCol="0" anchor="t"/>
           <a:lstStyle/>
           <a:p>
-            <a:pPr indent="0" marL="0">
+            <a:pPr marL="0" indent="0">
               <a:buNone/>
             </a:pPr>
             <a:r>
@@ -6777,6 +6759,13 @@
             <a:prstDash val="solid"/>
           </a:ln>
         </p:spPr>
+        <p:txBody>
+          <a:bodyPr/>
+          <a:lstStyle/>
+          <a:p>
+            <a:endParaRPr lang="ko-KR" altLang="en-US"/>
+          </a:p>
+        </p:txBody>
       </p:sp>
       <p:sp>
         <p:nvSpPr>
@@ -6799,7 +6788,7 @@
           <a:bodyPr wrap="square" lIns="0" tIns="0" rIns="0" bIns="0" rtlCol="0" anchor="ctr"/>
           <a:lstStyle/>
           <a:p>
-            <a:pPr algn="ctr" indent="0" marL="0">
+            <a:pPr marL="0" indent="0" algn="ctr">
               <a:buNone/>
             </a:pPr>
             <a:r>
@@ -6838,7 +6827,7 @@
           <a:bodyPr wrap="square" lIns="0" tIns="0" rIns="0" bIns="0" rtlCol="0" anchor="ctr"/>
           <a:lstStyle/>
           <a:p>
-            <a:pPr indent="0" marL="0">
+            <a:pPr marL="0" indent="0">
               <a:buNone/>
             </a:pPr>
             <a:r>
@@ -6877,7 +6866,7 @@
           <a:bodyPr wrap="square" lIns="0" tIns="0" rIns="0" bIns="0" rtlCol="0" anchor="t"/>
           <a:lstStyle/>
           <a:p>
-            <a:pPr indent="0" marL="0">
+            <a:pPr marL="0" indent="0">
               <a:buNone/>
             </a:pPr>
             <a:r>
@@ -6919,6 +6908,13 @@
             <a:prstDash val="solid"/>
           </a:ln>
         </p:spPr>
+        <p:txBody>
+          <a:bodyPr/>
+          <a:lstStyle/>
+          <a:p>
+            <a:endParaRPr lang="ko-KR" altLang="en-US"/>
+          </a:p>
+        </p:txBody>
       </p:sp>
       <p:sp>
         <p:nvSpPr>
@@ -6941,7 +6937,7 @@
           <a:bodyPr wrap="square" lIns="0" tIns="0" rIns="0" bIns="0" rtlCol="0" anchor="ctr"/>
           <a:lstStyle/>
           <a:p>
-            <a:pPr algn="ctr" indent="0" marL="0">
+            <a:pPr marL="0" indent="0" algn="ctr">
               <a:buNone/>
             </a:pPr>
             <a:r>
@@ -6980,7 +6976,7 @@
           <a:bodyPr wrap="square" lIns="0" tIns="0" rIns="0" bIns="0" rtlCol="0" anchor="ctr"/>
           <a:lstStyle/>
           <a:p>
-            <a:pPr indent="0" marL="0">
+            <a:pPr marL="0" indent="0">
               <a:buNone/>
             </a:pPr>
             <a:r>
@@ -7019,7 +7015,7 @@
           <a:bodyPr wrap="square" lIns="0" tIns="0" rIns="0" bIns="0" rtlCol="0" anchor="t"/>
           <a:lstStyle/>
           <a:p>
-            <a:pPr indent="0" marL="0">
+            <a:pPr marL="0" indent="0">
               <a:buNone/>
             </a:pPr>
             <a:r>
@@ -7058,7 +7054,7 @@
           <a:bodyPr wrap="square" lIns="0" tIns="0" rIns="0" bIns="0" rtlCol="0" anchor="ctr"/>
           <a:lstStyle/>
           <a:p>
-            <a:pPr indent="0" marL="0">
+            <a:pPr marL="0" indent="0">
               <a:buNone/>
             </a:pPr>
             <a:r>
@@ -7096,7 +7092,7 @@
           </a:prstGeom>
           <a:extLst>
             <a:ext uri="{C572A759-6A51-4108-AA02-DFA0A04FC94B}">
-              <ma14:wrappingTextBoxFlag xmlns:ma14="http://schemas.microsoft.com/office/mac/drawingml/2011/main" val="0"/>
+              <ma14:wrappingTextBoxFlag xmlns="" xmlns:ma14="http://schemas.microsoft.com/office/mac/drawingml/2011/main" val="0"/>
             </a:ext>
           </a:extLst>
         </p:spPr>
@@ -7117,8 +7113,8 @@
           <a:p>
             <a:pPr algn="l"/>
             <a:fld id="{F7021451-1387-4CA6-816F-3879F97B5CBC}" type="slidenum">
-              <a:rPr b="0" lang="en-US"/>
-              <a:t>6</a:t>
+              <a:rPr lang="en-US" b="0"/>
+              <a:t>7</a:t>
             </a:fld>
             <a:endParaRPr lang="en-US"/>
           </a:p>
@@ -7132,7 +7128,7 @@
 </p:sld>
 </file>
 
-<file path=ppt/slides/slide7.xml><?xml version="1.0" encoding="utf-8"?>
+<file path=ppt/slides/slide8.xml><?xml version="1.0" encoding="utf-8"?>
 <p:sld xmlns:a="http://schemas.openxmlformats.org/drawingml/2006/main" xmlns:r="http://schemas.openxmlformats.org/officeDocument/2006/relationships" xmlns:p="http://schemas.openxmlformats.org/presentationml/2006/main">
   <p:cSld name="Slide 7">
     <p:spTree>
@@ -7170,7 +7166,7 @@
           <a:bodyPr wrap="square" lIns="0" tIns="0" rIns="0" bIns="0" rtlCol="0" anchor="ctr"/>
           <a:lstStyle/>
           <a:p>
-            <a:pPr indent="0" marL="0">
+            <a:pPr marL="0" indent="0">
               <a:buNone/>
             </a:pPr>
             <a:r>
@@ -7214,6 +7210,13 @@
             <a:prstDash val="solid"/>
           </a:ln>
         </p:spPr>
+        <p:txBody>
+          <a:bodyPr/>
+          <a:lstStyle/>
+          <a:p>
+            <a:endParaRPr lang="ko-KR" altLang="en-US"/>
+          </a:p>
+        </p:txBody>
       </p:sp>
       <p:sp>
         <p:nvSpPr>
@@ -7236,7 +7239,7 @@
           <a:bodyPr wrap="square" lIns="635" tIns="635" rIns="635" bIns="635" rtlCol="0" anchor="ctr"/>
           <a:lstStyle/>
           <a:p>
-            <a:pPr algn="ctr" indent="0" marL="0">
+            <a:pPr marL="0" indent="0" algn="ctr">
               <a:buNone/>
             </a:pPr>
             <a:r>
@@ -7253,7 +7256,7 @@
             <a:endParaRPr lang="en-US" sz="1300" dirty="0"/>
           </a:p>
           <a:p>
-            <a:pPr algn="ctr" indent="0" marL="0">
+            <a:pPr marL="0" indent="0" algn="ctr">
               <a:buNone/>
             </a:pPr>
             <a:r>
@@ -7294,6 +7297,13 @@
             <a:tailEnd type="triangle"/>
           </a:ln>
         </p:spPr>
+        <p:txBody>
+          <a:bodyPr/>
+          <a:lstStyle/>
+          <a:p>
+            <a:endParaRPr lang="ko-KR" altLang="en-US"/>
+          </a:p>
+        </p:txBody>
       </p:sp>
       <p:sp>
         <p:nvSpPr>
@@ -7321,6 +7331,13 @@
             <a:prstDash val="solid"/>
           </a:ln>
         </p:spPr>
+        <p:txBody>
+          <a:bodyPr/>
+          <a:lstStyle/>
+          <a:p>
+            <a:endParaRPr lang="ko-KR" altLang="en-US"/>
+          </a:p>
+        </p:txBody>
       </p:sp>
       <p:sp>
         <p:nvSpPr>
@@ -7343,7 +7360,7 @@
           <a:bodyPr wrap="square" lIns="635" tIns="635" rIns="635" bIns="635" rtlCol="0" anchor="ctr"/>
           <a:lstStyle/>
           <a:p>
-            <a:pPr algn="ctr" indent="0" marL="0">
+            <a:pPr marL="0" indent="0" algn="ctr">
               <a:buNone/>
             </a:pPr>
             <a:r>
@@ -7360,7 +7377,7 @@
             <a:endParaRPr lang="en-US" sz="1300" dirty="0"/>
           </a:p>
           <a:p>
-            <a:pPr algn="ctr" indent="0" marL="0">
+            <a:pPr marL="0" indent="0" algn="ctr">
               <a:buNone/>
             </a:pPr>
             <a:r>
@@ -7401,6 +7418,13 @@
             <a:tailEnd type="triangle"/>
           </a:ln>
         </p:spPr>
+        <p:txBody>
+          <a:bodyPr/>
+          <a:lstStyle/>
+          <a:p>
+            <a:endParaRPr lang="ko-KR" altLang="en-US"/>
+          </a:p>
+        </p:txBody>
       </p:sp>
       <p:sp>
         <p:nvSpPr>
@@ -7428,6 +7452,13 @@
             <a:prstDash val="solid"/>
           </a:ln>
         </p:spPr>
+        <p:txBody>
+          <a:bodyPr/>
+          <a:lstStyle/>
+          <a:p>
+            <a:endParaRPr lang="ko-KR" altLang="en-US"/>
+          </a:p>
+        </p:txBody>
       </p:sp>
       <p:sp>
         <p:nvSpPr>
@@ -7450,7 +7481,7 @@
           <a:bodyPr wrap="square" lIns="635" tIns="635" rIns="635" bIns="635" rtlCol="0" anchor="ctr"/>
           <a:lstStyle/>
           <a:p>
-            <a:pPr algn="ctr" indent="0" marL="0">
+            <a:pPr marL="0" indent="0" algn="ctr">
               <a:buNone/>
             </a:pPr>
             <a:r>
@@ -7467,7 +7498,7 @@
             <a:endParaRPr lang="en-US" sz="1300" dirty="0"/>
           </a:p>
           <a:p>
-            <a:pPr algn="ctr" indent="0" marL="0">
+            <a:pPr marL="0" indent="0" algn="ctr">
               <a:buNone/>
             </a:pPr>
             <a:r>
@@ -7508,6 +7539,13 @@
             <a:tailEnd type="triangle"/>
           </a:ln>
         </p:spPr>
+        <p:txBody>
+          <a:bodyPr/>
+          <a:lstStyle/>
+          <a:p>
+            <a:endParaRPr lang="ko-KR" altLang="en-US"/>
+          </a:p>
+        </p:txBody>
       </p:sp>
       <p:sp>
         <p:nvSpPr>
@@ -7535,6 +7573,13 @@
             <a:prstDash val="solid"/>
           </a:ln>
         </p:spPr>
+        <p:txBody>
+          <a:bodyPr/>
+          <a:lstStyle/>
+          <a:p>
+            <a:endParaRPr lang="ko-KR" altLang="en-US"/>
+          </a:p>
+        </p:txBody>
       </p:sp>
       <p:sp>
         <p:nvSpPr>
@@ -7557,7 +7602,7 @@
           <a:bodyPr wrap="square" lIns="635" tIns="635" rIns="635" bIns="635" rtlCol="0" anchor="ctr"/>
           <a:lstStyle/>
           <a:p>
-            <a:pPr algn="ctr" indent="0" marL="0">
+            <a:pPr marL="0" indent="0" algn="ctr">
               <a:buNone/>
             </a:pPr>
             <a:r>
@@ -7574,7 +7619,7 @@
             <a:endParaRPr lang="en-US" sz="1300" dirty="0"/>
           </a:p>
           <a:p>
-            <a:pPr algn="ctr" indent="0" marL="0">
+            <a:pPr marL="0" indent="0" algn="ctr">
               <a:buNone/>
             </a:pPr>
             <a:r>
@@ -7615,6 +7660,13 @@
             <a:tailEnd type="triangle"/>
           </a:ln>
         </p:spPr>
+        <p:txBody>
+          <a:bodyPr/>
+          <a:lstStyle/>
+          <a:p>
+            <a:endParaRPr lang="ko-KR" altLang="en-US"/>
+          </a:p>
+        </p:txBody>
       </p:sp>
       <p:sp>
         <p:nvSpPr>
@@ -7642,6 +7694,13 @@
             <a:prstDash val="solid"/>
           </a:ln>
         </p:spPr>
+        <p:txBody>
+          <a:bodyPr/>
+          <a:lstStyle/>
+          <a:p>
+            <a:endParaRPr lang="ko-KR" altLang="en-US"/>
+          </a:p>
+        </p:txBody>
       </p:sp>
       <p:sp>
         <p:nvSpPr>
@@ -7664,7 +7723,7 @@
           <a:bodyPr wrap="square" lIns="635" tIns="635" rIns="635" bIns="635" rtlCol="0" anchor="ctr"/>
           <a:lstStyle/>
           <a:p>
-            <a:pPr algn="ctr" indent="0" marL="0">
+            <a:pPr marL="0" indent="0" algn="ctr">
               <a:buNone/>
             </a:pPr>
             <a:r>
@@ -7681,7 +7740,7 @@
             <a:endParaRPr lang="en-US" sz="1300" dirty="0"/>
           </a:p>
           <a:p>
-            <a:pPr algn="ctr" indent="0" marL="0">
+            <a:pPr marL="0" indent="0" algn="ctr">
               <a:buNone/>
             </a:pPr>
             <a:r>
@@ -7698,7 +7757,7 @@
             <a:endParaRPr lang="en-US" sz="1300" dirty="0"/>
           </a:p>
           <a:p>
-            <a:pPr algn="ctr" indent="0" marL="0">
+            <a:pPr marL="0" indent="0" algn="ctr">
               <a:buNone/>
             </a:pPr>
             <a:r>
@@ -7742,6 +7801,13 @@
             <a:prstDash val="solid"/>
           </a:ln>
         </p:spPr>
+        <p:txBody>
+          <a:bodyPr/>
+          <a:lstStyle/>
+          <a:p>
+            <a:endParaRPr lang="ko-KR" altLang="en-US"/>
+          </a:p>
+        </p:txBody>
       </p:sp>
       <p:sp>
         <p:nvSpPr>
@@ -7764,7 +7830,7 @@
           <a:bodyPr wrap="square" lIns="0" tIns="0" rIns="0" bIns="0" rtlCol="0" anchor="ctr"/>
           <a:lstStyle/>
           <a:p>
-            <a:pPr indent="0" marL="0">
+            <a:pPr marL="0" indent="0">
               <a:buNone/>
             </a:pPr>
             <a:r>
@@ -7803,7 +7869,7 @@
           <a:bodyPr wrap="square" lIns="0" tIns="0" rIns="0" bIns="0" rtlCol="0" anchor="t"/>
           <a:lstStyle/>
           <a:p>
-            <a:pPr indent="0" marL="0">
+            <a:pPr marL="0" indent="0">
               <a:spcAft>
                 <a:spcPts val="400"/>
               </a:spcAft>
@@ -7850,6 +7916,13 @@
             <a:prstDash val="solid"/>
           </a:ln>
         </p:spPr>
+        <p:txBody>
+          <a:bodyPr/>
+          <a:lstStyle/>
+          <a:p>
+            <a:endParaRPr lang="ko-KR" altLang="en-US"/>
+          </a:p>
+        </p:txBody>
       </p:sp>
       <p:sp>
         <p:nvSpPr>
@@ -7872,7 +7945,7 @@
           <a:bodyPr wrap="square" lIns="0" tIns="0" rIns="0" bIns="0" rtlCol="0" anchor="ctr"/>
           <a:lstStyle/>
           <a:p>
-            <a:pPr indent="0" marL="0">
+            <a:pPr marL="0" indent="0">
               <a:buNone/>
             </a:pPr>
             <a:r>
@@ -7911,7 +7984,7 @@
           <a:bodyPr wrap="square" lIns="0" tIns="0" rIns="0" bIns="0" rtlCol="0" anchor="t"/>
           <a:lstStyle/>
           <a:p>
-            <a:pPr indent="0" marL="0">
+            <a:pPr marL="0" indent="0">
               <a:spcAft>
                 <a:spcPts val="400"/>
               </a:spcAft>
@@ -7952,7 +8025,7 @@
           </a:prstGeom>
           <a:extLst>
             <a:ext uri="{C572A759-6A51-4108-AA02-DFA0A04FC94B}">
-              <ma14:wrappingTextBoxFlag xmlns:ma14="http://schemas.microsoft.com/office/mac/drawingml/2011/main" val="0"/>
+              <ma14:wrappingTextBoxFlag xmlns="" xmlns:ma14="http://schemas.microsoft.com/office/mac/drawingml/2011/main" val="0"/>
             </a:ext>
           </a:extLst>
         </p:spPr>
@@ -7973,8 +8046,8 @@
           <a:p>
             <a:pPr algn="l"/>
             <a:fld id="{F7021451-1387-4CA6-816F-3879F97B5CBC}" type="slidenum">
-              <a:rPr b="0" lang="en-US"/>
-              <a:t>7</a:t>
+              <a:rPr lang="en-US" b="0"/>
+              <a:t>8</a:t>
             </a:fld>
             <a:endParaRPr lang="en-US"/>
           </a:p>
@@ -7988,7 +8061,7 @@
 </p:sld>
 </file>
 
-<file path=ppt/slides/slide8.xml><?xml version="1.0" encoding="utf-8"?>
+<file path=ppt/slides/slide9.xml><?xml version="1.0" encoding="utf-8"?>
 <p:sld xmlns:a="http://schemas.openxmlformats.org/drawingml/2006/main" xmlns:r="http://schemas.openxmlformats.org/officeDocument/2006/relationships" xmlns:p="http://schemas.openxmlformats.org/presentationml/2006/main">
   <p:cSld name="Slide 8">
     <p:spTree>
@@ -8026,7 +8099,7 @@
           <a:bodyPr wrap="square" lIns="0" tIns="0" rIns="0" bIns="0" rtlCol="0" anchor="ctr"/>
           <a:lstStyle/>
           <a:p>
-            <a:pPr indent="0" marL="0">
+            <a:pPr marL="0" indent="0">
               <a:buNone/>
             </a:pPr>
             <a:r>
@@ -8070,6 +8143,13 @@
             <a:prstDash val="solid"/>
           </a:ln>
         </p:spPr>
+        <p:txBody>
+          <a:bodyPr/>
+          <a:lstStyle/>
+          <a:p>
+            <a:endParaRPr lang="ko-KR" altLang="en-US"/>
+          </a:p>
+        </p:txBody>
       </p:sp>
       <p:sp>
         <p:nvSpPr>
@@ -8092,7 +8172,7 @@
           <a:bodyPr wrap="square" lIns="0" tIns="0" rIns="0" bIns="0" rtlCol="0" anchor="ctr"/>
           <a:lstStyle/>
           <a:p>
-            <a:pPr indent="0" marL="0">
+            <a:pPr marL="0" indent="0">
               <a:buNone/>
             </a:pPr>
             <a:r>
@@ -8136,6 +8216,13 @@
             <a:prstDash val="solid"/>
           </a:ln>
         </p:spPr>
+        <p:txBody>
+          <a:bodyPr/>
+          <a:lstStyle/>
+          <a:p>
+            <a:endParaRPr lang="ko-KR" altLang="en-US"/>
+          </a:p>
+        </p:txBody>
       </p:sp>
       <p:sp>
         <p:nvSpPr>
@@ -8158,7 +8245,7 @@
           <a:bodyPr wrap="square" lIns="0" tIns="0" rIns="0" bIns="0" rtlCol="0" anchor="ctr"/>
           <a:lstStyle/>
           <a:p>
-            <a:pPr algn="ctr" indent="0" marL="0">
+            <a:pPr marL="0" indent="0" algn="ctr">
               <a:buNone/>
             </a:pPr>
             <a:r>
@@ -8202,6 +8289,13 @@
             <a:prstDash val="solid"/>
           </a:ln>
         </p:spPr>
+        <p:txBody>
+          <a:bodyPr/>
+          <a:lstStyle/>
+          <a:p>
+            <a:endParaRPr lang="ko-KR" altLang="en-US"/>
+          </a:p>
+        </p:txBody>
       </p:sp>
       <p:sp>
         <p:nvSpPr>
@@ -8224,7 +8318,7 @@
           <a:bodyPr wrap="square" lIns="0" tIns="0" rIns="0" bIns="0" rtlCol="0" anchor="ctr"/>
           <a:lstStyle/>
           <a:p>
-            <a:pPr algn="ctr" indent="0" marL="0">
+            <a:pPr marL="0" indent="0" algn="ctr">
               <a:buNone/>
             </a:pPr>
             <a:r>
@@ -8268,6 +8362,13 @@
             <a:prstDash val="solid"/>
           </a:ln>
         </p:spPr>
+        <p:txBody>
+          <a:bodyPr/>
+          <a:lstStyle/>
+          <a:p>
+            <a:endParaRPr lang="ko-KR" altLang="en-US"/>
+          </a:p>
+        </p:txBody>
       </p:sp>
       <p:sp>
         <p:nvSpPr>
@@ -8290,7 +8391,7 @@
           <a:bodyPr wrap="square" lIns="0" tIns="0" rIns="0" bIns="0" rtlCol="0" anchor="ctr"/>
           <a:lstStyle/>
           <a:p>
-            <a:pPr algn="ctr" indent="0" marL="0">
+            <a:pPr marL="0" indent="0" algn="ctr">
               <a:buNone/>
             </a:pPr>
             <a:r>
@@ -8334,6 +8435,13 @@
             <a:prstDash val="solid"/>
           </a:ln>
         </p:spPr>
+        <p:txBody>
+          <a:bodyPr/>
+          <a:lstStyle/>
+          <a:p>
+            <a:endParaRPr lang="ko-KR" altLang="en-US"/>
+          </a:p>
+        </p:txBody>
       </p:sp>
       <p:sp>
         <p:nvSpPr>
@@ -8356,7 +8464,7 @@
           <a:bodyPr wrap="square" lIns="0" tIns="0" rIns="0" bIns="0" rtlCol="0" anchor="ctr"/>
           <a:lstStyle/>
           <a:p>
-            <a:pPr algn="ctr" indent="0" marL="0">
+            <a:pPr marL="0" indent="0" algn="ctr">
               <a:buNone/>
             </a:pPr>
             <a:r>
@@ -8400,6 +8508,13 @@
             <a:prstDash val="solid"/>
           </a:ln>
         </p:spPr>
+        <p:txBody>
+          <a:bodyPr/>
+          <a:lstStyle/>
+          <a:p>
+            <a:endParaRPr lang="ko-KR" altLang="en-US"/>
+          </a:p>
+        </p:txBody>
       </p:sp>
       <p:sp>
         <p:nvSpPr>
@@ -8422,7 +8537,7 @@
           <a:bodyPr wrap="square" lIns="0" tIns="0" rIns="0" bIns="0" rtlCol="0" anchor="ctr"/>
           <a:lstStyle/>
           <a:p>
-            <a:pPr algn="ctr" indent="0" marL="0">
+            <a:pPr marL="0" indent="0" algn="ctr">
               <a:buNone/>
             </a:pPr>
             <a:r>
@@ -8466,6 +8581,13 @@
             <a:prstDash val="solid"/>
           </a:ln>
         </p:spPr>
+        <p:txBody>
+          <a:bodyPr/>
+          <a:lstStyle/>
+          <a:p>
+            <a:endParaRPr lang="ko-KR" altLang="en-US"/>
+          </a:p>
+        </p:txBody>
       </p:sp>
       <p:sp>
         <p:nvSpPr>
@@ -8488,7 +8610,7 @@
           <a:bodyPr wrap="square" lIns="0" tIns="0" rIns="0" bIns="0" rtlCol="0" anchor="ctr"/>
           <a:lstStyle/>
           <a:p>
-            <a:pPr algn="ctr" indent="0" marL="0">
+            <a:pPr marL="0" indent="0" algn="ctr">
               <a:buNone/>
             </a:pPr>
             <a:r>
@@ -8532,6 +8654,13 @@
             <a:prstDash val="solid"/>
           </a:ln>
         </p:spPr>
+        <p:txBody>
+          <a:bodyPr/>
+          <a:lstStyle/>
+          <a:p>
+            <a:endParaRPr lang="ko-KR" altLang="en-US"/>
+          </a:p>
+        </p:txBody>
       </p:sp>
       <p:sp>
         <p:nvSpPr>
@@ -8554,7 +8683,7 @@
           <a:bodyPr wrap="square" lIns="0" tIns="0" rIns="0" bIns="0" rtlCol="0" anchor="ctr"/>
           <a:lstStyle/>
           <a:p>
-            <a:pPr algn="ctr" indent="0" marL="0">
+            <a:pPr marL="0" indent="0" algn="ctr">
               <a:buNone/>
             </a:pPr>
             <a:r>
@@ -8598,6 +8727,13 @@
             <a:prstDash val="solid"/>
           </a:ln>
         </p:spPr>
+        <p:txBody>
+          <a:bodyPr/>
+          <a:lstStyle/>
+          <a:p>
+            <a:endParaRPr lang="ko-KR" altLang="en-US"/>
+          </a:p>
+        </p:txBody>
       </p:sp>
       <p:sp>
         <p:nvSpPr>
@@ -8620,7 +8756,7 @@
           <a:bodyPr wrap="square" lIns="0" tIns="0" rIns="0" bIns="0" rtlCol="0" anchor="ctr"/>
           <a:lstStyle/>
           <a:p>
-            <a:pPr algn="ctr" indent="0" marL="0">
+            <a:pPr marL="0" indent="0" algn="ctr">
               <a:buNone/>
             </a:pPr>
             <a:r>
@@ -8659,7 +8795,7 @@
           <a:bodyPr wrap="square" lIns="0" tIns="0" rIns="0" bIns="0" rtlCol="0" anchor="t"/>
           <a:lstStyle/>
           <a:p>
-            <a:pPr indent="0" marL="0">
+            <a:pPr marL="0" indent="0">
               <a:buNone/>
             </a:pPr>
             <a:r>
@@ -8676,7 +8812,7 @@
             <a:endParaRPr lang="en-US" sz="1400" dirty="0"/>
           </a:p>
           <a:p>
-            <a:pPr indent="0" marL="0">
+            <a:pPr marL="0" indent="0">
               <a:buNone/>
             </a:pPr>
             <a:r>
@@ -8714,7 +8850,7 @@
           </a:prstGeom>
           <a:extLst>
             <a:ext uri="{C572A759-6A51-4108-AA02-DFA0A04FC94B}">
-              <ma14:wrappingTextBoxFlag xmlns:ma14="http://schemas.microsoft.com/office/mac/drawingml/2011/main" val="0"/>
+              <ma14:wrappingTextBoxFlag xmlns="" xmlns:ma14="http://schemas.microsoft.com/office/mac/drawingml/2011/main" val="0"/>
             </a:ext>
           </a:extLst>
         </p:spPr>
@@ -8735,443 +8871,7 @@
           <a:p>
             <a:pPr algn="l"/>
             <a:fld id="{F7021451-1387-4CA6-816F-3879F97B5CBC}" type="slidenum">
-              <a:rPr b="0" lang="en-US"/>
-              <a:t>8</a:t>
-            </a:fld>
-            <a:endParaRPr lang="en-US"/>
-          </a:p>
-        </p:txBody>
-      </p:sp>
-    </p:spTree>
-  </p:cSld>
-  <p:clrMapOvr>
-    <a:masterClrMapping/>
-  </p:clrMapOvr>
-</p:sld>
-</file>
-
-<file path=ppt/slides/slide9.xml><?xml version="1.0" encoding="utf-8"?>
-<p:sld xmlns:a="http://schemas.openxmlformats.org/drawingml/2006/main" xmlns:r="http://schemas.openxmlformats.org/officeDocument/2006/relationships" xmlns:p="http://schemas.openxmlformats.org/presentationml/2006/main">
-  <p:cSld name="Slide 9">
-    <p:spTree>
-      <p:nvGrpSpPr>
-        <p:cNvPr id="1" name=""/>
-        <p:cNvGrpSpPr/>
-        <p:nvPr/>
-      </p:nvGrpSpPr>
-      <p:grpSpPr>
-        <a:xfrm>
-          <a:off x="0" y="0"/>
-          <a:ext cx="0" cy="0"/>
-          <a:chOff x="0" y="0"/>
-          <a:chExt cx="0" cy="0"/>
-        </a:xfrm>
-      </p:grpSpPr>
-      <p:sp>
-        <p:nvSpPr>
-          <p:cNvPr id="2" name="Text 0"/>
-          <p:cNvSpPr txBox="1"/>
-          <p:nvPr/>
-        </p:nvSpPr>
-        <p:spPr>
-          <a:xfrm>
-            <a:off x="548640" y="320040"/>
-            <a:ext cx="8046720" cy="640080"/>
-          </a:xfrm>
-          <a:prstGeom prst="rect">
-            <a:avLst/>
-          </a:prstGeom>
-          <a:noFill/>
-          <a:ln/>
-        </p:spPr>
-        <p:txBody>
-          <a:bodyPr wrap="square" lIns="0" tIns="0" rIns="0" bIns="0" rtlCol="0" anchor="ctr"/>
-          <a:lstStyle/>
-          <a:p>
-            <a:pPr indent="0" marL="0">
-              <a:buNone/>
-            </a:pPr>
-            <a:r>
-              <a:rPr lang="en-US" sz="2800" b="1" dirty="0">
-                <a:solidFill>
-                  <a:srgbClr val="14213D"/>
-                </a:solidFill>
-                <a:latin typeface="Malgun Gothic" pitchFamily="34" charset="0"/>
-                <a:ea typeface="Malgun Gothic" pitchFamily="34" charset="-122"/>
-                <a:cs typeface="Malgun Gothic" pitchFamily="34" charset="-120"/>
-              </a:rPr>
-              <a:t>보안: 신고와 헤더를 믿지 않습니다</a:t>
-            </a:r>
-            <a:endParaRPr lang="en-US" sz="2800" dirty="0"/>
-          </a:p>
-        </p:txBody>
-      </p:sp>
-      <p:sp>
-        <p:nvSpPr>
-          <p:cNvPr id="3" name="Shape 1"/>
-          <p:cNvSpPr/>
-          <p:nvPr/>
-        </p:nvSpPr>
-        <p:spPr>
-          <a:xfrm>
-            <a:off x="548640" y="1280160"/>
-            <a:ext cx="2514600" cy="3200400"/>
-          </a:xfrm>
-          <a:prstGeom prst="roundRect">
-            <a:avLst>
-              <a:gd name="adj" fmla="val 2909"/>
-            </a:avLst>
-          </a:prstGeom>
-          <a:solidFill>
-            <a:srgbClr val="F3F4F6"/>
-          </a:solidFill>
-          <a:ln w="12700">
-            <a:solidFill>
-              <a:srgbClr val="F3F4F6"/>
-            </a:solidFill>
-            <a:prstDash val="solid"/>
-          </a:ln>
-        </p:spPr>
-      </p:sp>
-      <p:sp>
-        <p:nvSpPr>
-          <p:cNvPr id="4" name="Text 2"/>
-          <p:cNvSpPr txBox="1"/>
-          <p:nvPr/>
-        </p:nvSpPr>
-        <p:spPr>
-          <a:xfrm>
-            <a:off x="731520" y="1389888"/>
-            <a:ext cx="2148840" cy="365760"/>
-          </a:xfrm>
-          <a:prstGeom prst="rect">
-            <a:avLst/>
-          </a:prstGeom>
-          <a:noFill/>
-          <a:ln/>
-        </p:spPr>
-        <p:txBody>
-          <a:bodyPr wrap="square" lIns="0" tIns="0" rIns="0" bIns="0" rtlCol="0" anchor="ctr"/>
-          <a:lstStyle/>
-          <a:p>
-            <a:pPr indent="0" marL="0">
-              <a:buNone/>
-            </a:pPr>
-            <a:r>
-              <a:rPr lang="en-US" sz="1600" b="1" dirty="0">
-                <a:solidFill>
-                  <a:srgbClr val="14213D"/>
-                </a:solidFill>
-                <a:latin typeface="Malgun Gothic" pitchFamily="34" charset="0"/>
-                <a:ea typeface="Malgun Gothic" pitchFamily="34" charset="-122"/>
-                <a:cs typeface="Malgun Gothic" pitchFamily="34" charset="-120"/>
-              </a:rPr>
-              <a:t>위조 헤더 제거</a:t>
-            </a:r>
-            <a:endParaRPr lang="en-US" sz="1600" dirty="0"/>
-          </a:p>
-        </p:txBody>
-      </p:sp>
-      <p:sp>
-        <p:nvSpPr>
-          <p:cNvPr id="5" name="Text 3"/>
-          <p:cNvSpPr txBox="1"/>
-          <p:nvPr/>
-        </p:nvSpPr>
-        <p:spPr>
-          <a:xfrm>
-            <a:off x="731520" y="1783080"/>
-            <a:ext cx="2148840" cy="2560320"/>
-          </a:xfrm>
-          <a:prstGeom prst="rect">
-            <a:avLst/>
-          </a:prstGeom>
-          <a:noFill/>
-          <a:ln/>
-        </p:spPr>
-        <p:txBody>
-          <a:bodyPr wrap="square" lIns="0" tIns="0" rIns="0" bIns="0" rtlCol="0" anchor="t"/>
-          <a:lstStyle/>
-          <a:p>
-            <a:pPr indent="0" marL="0">
-              <a:spcAft>
-                <a:spcPts val="400"/>
-              </a:spcAft>
-              <a:buNone/>
-            </a:pPr>
-            <a:r>
-              <a:rPr lang="en-US" sz="1300" dirty="0">
-                <a:solidFill>
-                  <a:srgbClr val="1F2937"/>
-                </a:solidFill>
-                <a:latin typeface="Malgun Gothic" pitchFamily="34" charset="0"/>
-                <a:ea typeface="Malgun Gothic" pitchFamily="34" charset="-122"/>
-                <a:cs typeface="Malgun Gothic" pitchFamily="34" charset="-120"/>
-              </a:rPr>
-              <a:t>외부 메일이 미리 달고 온 X-Spam-* 헤더는 판정 전에 지웁니다. Hedwig가 이 헤더로 스팸함 이동을 정하기 때문입니다.</a:t>
-            </a:r>
-            <a:endParaRPr lang="en-US" sz="1300" dirty="0"/>
-          </a:p>
-        </p:txBody>
-      </p:sp>
-      <p:sp>
-        <p:nvSpPr>
-          <p:cNvPr id="6" name="Shape 4"/>
-          <p:cNvSpPr/>
-          <p:nvPr/>
-        </p:nvSpPr>
-        <p:spPr>
-          <a:xfrm>
-            <a:off x="3291840" y="1280160"/>
-            <a:ext cx="2514600" cy="3200400"/>
-          </a:xfrm>
-          <a:prstGeom prst="roundRect">
-            <a:avLst>
-              <a:gd name="adj" fmla="val 2909"/>
-            </a:avLst>
-          </a:prstGeom>
-          <a:solidFill>
-            <a:srgbClr val="F3F4F6"/>
-          </a:solidFill>
-          <a:ln w="12700">
-            <a:solidFill>
-              <a:srgbClr val="F3F4F6"/>
-            </a:solidFill>
-            <a:prstDash val="solid"/>
-          </a:ln>
-        </p:spPr>
-      </p:sp>
-      <p:sp>
-        <p:nvSpPr>
-          <p:cNvPr id="7" name="Text 5"/>
-          <p:cNvSpPr txBox="1"/>
-          <p:nvPr/>
-        </p:nvSpPr>
-        <p:spPr>
-          <a:xfrm>
-            <a:off x="3474720" y="1389888"/>
-            <a:ext cx="2148840" cy="365760"/>
-          </a:xfrm>
-          <a:prstGeom prst="rect">
-            <a:avLst/>
-          </a:prstGeom>
-          <a:noFill/>
-          <a:ln/>
-        </p:spPr>
-        <p:txBody>
-          <a:bodyPr wrap="square" lIns="0" tIns="0" rIns="0" bIns="0" rtlCol="0" anchor="ctr"/>
-          <a:lstStyle/>
-          <a:p>
-            <a:pPr indent="0" marL="0">
-              <a:buNone/>
-            </a:pPr>
-            <a:r>
-              <a:rPr lang="en-US" sz="1600" b="1" dirty="0">
-                <a:solidFill>
-                  <a:srgbClr val="14213D"/>
-                </a:solidFill>
-                <a:latin typeface="Malgun Gothic" pitchFamily="34" charset="0"/>
-                <a:ea typeface="Malgun Gothic" pitchFamily="34" charset="-122"/>
-                <a:cs typeface="Malgun Gothic" pitchFamily="34" charset="-120"/>
-              </a:rPr>
-              <a:t>관리자 로그인</a:t>
-            </a:r>
-            <a:endParaRPr lang="en-US" sz="1600" dirty="0"/>
-          </a:p>
-        </p:txBody>
-      </p:sp>
-      <p:sp>
-        <p:nvSpPr>
-          <p:cNvPr id="8" name="Text 6"/>
-          <p:cNvSpPr txBox="1"/>
-          <p:nvPr/>
-        </p:nvSpPr>
-        <p:spPr>
-          <a:xfrm>
-            <a:off x="3474720" y="1783080"/>
-            <a:ext cx="2148840" cy="2560320"/>
-          </a:xfrm>
-          <a:prstGeom prst="rect">
-            <a:avLst/>
-          </a:prstGeom>
-          <a:noFill/>
-          <a:ln/>
-        </p:spPr>
-        <p:txBody>
-          <a:bodyPr wrap="square" lIns="0" tIns="0" rIns="0" bIns="0" rtlCol="0" anchor="t"/>
-          <a:lstStyle/>
-          <a:p>
-            <a:pPr indent="0" marL="0">
-              <a:spcAft>
-                <a:spcPts val="400"/>
-              </a:spcAft>
-              <a:buNone/>
-            </a:pPr>
-            <a:r>
-              <a:rPr lang="en-US" sz="1300" dirty="0">
-                <a:solidFill>
-                  <a:srgbClr val="1F2937"/>
-                </a:solidFill>
-                <a:latin typeface="Malgun Gothic" pitchFamily="34" charset="0"/>
-                <a:ea typeface="Malgun Gothic" pitchFamily="34" charset="-122"/>
-                <a:cs typeface="Malgun Gothic" pitchFamily="34" charset="-120"/>
-              </a:rPr>
-              <a:t>ID/PW 로그인과 BCrypt 해시, HttpOnly 세션 쿠키, CSRF 토큰을 쓰고 연속 실패하면 잠급니다.</a:t>
-            </a:r>
-            <a:endParaRPr lang="en-US" sz="1300" dirty="0"/>
-          </a:p>
-        </p:txBody>
-      </p:sp>
-      <p:sp>
-        <p:nvSpPr>
-          <p:cNvPr id="9" name="Shape 7"/>
-          <p:cNvSpPr/>
-          <p:nvPr/>
-        </p:nvSpPr>
-        <p:spPr>
-          <a:xfrm>
-            <a:off x="6035040" y="1280160"/>
-            <a:ext cx="2560320" cy="3200400"/>
-          </a:xfrm>
-          <a:prstGeom prst="roundRect">
-            <a:avLst>
-              <a:gd name="adj" fmla="val 2857"/>
-            </a:avLst>
-          </a:prstGeom>
-          <a:solidFill>
-            <a:srgbClr val="F3F4F6"/>
-          </a:solidFill>
-          <a:ln w="12700">
-            <a:solidFill>
-              <a:srgbClr val="F3F4F6"/>
-            </a:solidFill>
-            <a:prstDash val="solid"/>
-          </a:ln>
-        </p:spPr>
-      </p:sp>
-      <p:sp>
-        <p:nvSpPr>
-          <p:cNvPr id="10" name="Text 8"/>
-          <p:cNvSpPr txBox="1"/>
-          <p:nvPr/>
-        </p:nvSpPr>
-        <p:spPr>
-          <a:xfrm>
-            <a:off x="6217920" y="1389888"/>
-            <a:ext cx="2194560" cy="365760"/>
-          </a:xfrm>
-          <a:prstGeom prst="rect">
-            <a:avLst/>
-          </a:prstGeom>
-          <a:noFill/>
-          <a:ln/>
-        </p:spPr>
-        <p:txBody>
-          <a:bodyPr wrap="square" lIns="0" tIns="0" rIns="0" bIns="0" rtlCol="0" anchor="ctr"/>
-          <a:lstStyle/>
-          <a:p>
-            <a:pPr indent="0" marL="0">
-              <a:buNone/>
-            </a:pPr>
-            <a:r>
-              <a:rPr lang="en-US" sz="1600" b="1" dirty="0">
-                <a:solidFill>
-                  <a:srgbClr val="14213D"/>
-                </a:solidFill>
-                <a:latin typeface="Malgun Gothic" pitchFamily="34" charset="0"/>
-                <a:ea typeface="Malgun Gothic" pitchFamily="34" charset="-122"/>
-                <a:cs typeface="Malgun Gothic" pitchFamily="34" charset="-120"/>
-              </a:rPr>
-              <a:t>신고는 조작될 수 있다</a:t>
-            </a:r>
-            <a:endParaRPr lang="en-US" sz="1600" dirty="0"/>
-          </a:p>
-        </p:txBody>
-      </p:sp>
-      <p:sp>
-        <p:nvSpPr>
-          <p:cNvPr id="11" name="Text 9"/>
-          <p:cNvSpPr txBox="1"/>
-          <p:nvPr/>
-        </p:nvSpPr>
-        <p:spPr>
-          <a:xfrm>
-            <a:off x="6217920" y="1783080"/>
-            <a:ext cx="2194560" cy="2560320"/>
-          </a:xfrm>
-          <a:prstGeom prst="rect">
-            <a:avLst/>
-          </a:prstGeom>
-          <a:noFill/>
-          <a:ln/>
-        </p:spPr>
-        <p:txBody>
-          <a:bodyPr wrap="square" lIns="0" tIns="0" rIns="0" bIns="0" rtlCol="0" anchor="t"/>
-          <a:lstStyle/>
-          <a:p>
-            <a:pPr indent="0" marL="0">
-              <a:spcAft>
-                <a:spcPts val="400"/>
-              </a:spcAft>
-              <a:buNone/>
-            </a:pPr>
-            <a:r>
-              <a:rPr lang="en-US" sz="1300" dirty="0">
-                <a:solidFill>
-                  <a:srgbClr val="1F2937"/>
-                </a:solidFill>
-                <a:latin typeface="Malgun Gothic" pitchFamily="34" charset="0"/>
-                <a:ea typeface="Malgun Gothic" pitchFamily="34" charset="-122"/>
-                <a:cs typeface="Malgun Gothic" pitchFamily="34" charset="-120"/>
-              </a:rPr>
-              <a:t>신고 본문은 외부 텍스트로 취급하고 개인정보를 가려 저장합니다. 신고 키는 관리자 키와 분리했습니다.</a:t>
-            </a:r>
-            <a:endParaRPr lang="en-US" sz="1300" dirty="0"/>
-          </a:p>
-        </p:txBody>
-      </p:sp>
-      <p:sp>
-        <p:nvSpPr>
-          <p:cNvPr id="25" name="Slide Number Placeholder 0"/>
-          <p:cNvSpPr>
-            <a:spLocks noGrp="1"/>
-          </p:cNvSpPr>
-          <p:nvPr>
-            <p:ph type="sldNum" sz="quarter" idx="4294967295"/>
-          </p:nvPr>
-        </p:nvSpPr>
-        <p:spPr>
-          <a:xfrm>
-            <a:off x="8321040" y="4800600"/>
-            <a:ext cx="457200" cy="274320"/>
-          </a:xfrm>
-          <a:prstGeom prst="rect">
-            <a:avLst/>
-          </a:prstGeom>
-          <a:extLst>
-            <a:ext uri="{C572A759-6A51-4108-AA02-DFA0A04FC94B}">
-              <ma14:wrappingTextBoxFlag xmlns:ma14="http://schemas.microsoft.com/office/mac/drawingml/2011/main" val="0"/>
-            </a:ext>
-          </a:extLst>
-        </p:spPr>
-        <p:txBody>
-          <a:bodyPr/>
-          <a:lstStyle>
-            <a:lvl1pPr>
-              <a:defRPr sz="1000">
-                <a:solidFill>
-                  <a:srgbClr val="6B7280"/>
-                </a:solidFill>
-                <a:latin typeface="Malgun Gothic"/>
-                <a:ea typeface="Malgun Gothic"/>
-                <a:cs typeface="Malgun Gothic"/>
-              </a:defRPr>
-            </a:lvl1pPr>
-          </a:lstStyle>
-          <a:p>
-            <a:pPr algn="l"/>
-            <a:fld id="{F7021451-1387-4CA6-816F-3879F97B5CBC}" type="slidenum">
-              <a:rPr b="0" lang="en-US"/>
+              <a:rPr lang="en-US" b="0"/>
               <a:t>9</a:t>
             </a:fld>
             <a:endParaRPr lang="en-US"/>
@@ -9479,4 +9179,319 @@
     </a:ext>
   </a:extLst>
 </a:theme>
+</file>
+
+<file path=ppt/theme/theme2.xml><?xml version="1.0" encoding="utf-8"?>
+<a:theme xmlns:a="http://schemas.openxmlformats.org/drawingml/2006/main" name="Office 테마">
+  <a:themeElements>
+    <a:clrScheme name="Office">
+      <a:dk1>
+        <a:sysClr val="windowText" lastClr="000000"/>
+      </a:dk1>
+      <a:lt1>
+        <a:sysClr val="window" lastClr="FFFFFF"/>
+      </a:lt1>
+      <a:dk2>
+        <a:srgbClr val="0E2841"/>
+      </a:dk2>
+      <a:lt2>
+        <a:srgbClr val="E8E8E8"/>
+      </a:lt2>
+      <a:accent1>
+        <a:srgbClr val="156082"/>
+      </a:accent1>
+      <a:accent2>
+        <a:srgbClr val="E97132"/>
+      </a:accent2>
+      <a:accent3>
+        <a:srgbClr val="196B24"/>
+      </a:accent3>
+      <a:accent4>
+        <a:srgbClr val="0F9ED5"/>
+      </a:accent4>
+      <a:accent5>
+        <a:srgbClr val="A02B93"/>
+      </a:accent5>
+      <a:accent6>
+        <a:srgbClr val="4EA72E"/>
+      </a:accent6>
+      <a:hlink>
+        <a:srgbClr val="467886"/>
+      </a:hlink>
+      <a:folHlink>
+        <a:srgbClr val="96607D"/>
+      </a:folHlink>
+    </a:clrScheme>
+    <a:fontScheme name="Office">
+      <a:majorFont>
+        <a:latin typeface="맑은 고딕" panose="02110004020202020204"/>
+        <a:ea typeface=""/>
+        <a:cs typeface=""/>
+        <a:font script="Jpan" typeface="游ゴシック Light"/>
+        <a:font script="Hang" typeface="맑은 고딕"/>
+        <a:font script="Hans" typeface="等线 Light"/>
+        <a:font script="Hant" typeface="新細明體"/>
+        <a:font script="Arab" typeface="Times New Roman"/>
+        <a:font script="Hebr" typeface="Times New Roman"/>
+        <a:font script="Thai" typeface="Angsana New"/>
+        <a:font script="Ethi" typeface="Nyala"/>
+        <a:font script="Beng" typeface="Vrinda"/>
+        <a:font script="Gujr" typeface="Shruti"/>
+        <a:font script="Khmr" typeface="MoolBoran"/>
+        <a:font script="Knda" typeface="Tunga"/>
+        <a:font script="Guru" typeface="Raavi"/>
+        <a:font script="Cans" typeface="Euphemia"/>
+        <a:font script="Cher" typeface="Plantagenet Cherokee"/>
+        <a:font script="Yiii" typeface="Microsoft Yi Baiti"/>
+        <a:font script="Tibt" typeface="Microsoft Himalaya"/>
+        <a:font script="Thaa" typeface="MV Boli"/>
+        <a:font script="Deva" typeface="Mangal"/>
+        <a:font script="Telu" typeface="Gautami"/>
+        <a:font script="Taml" typeface="Latha"/>
+        <a:font script="Syrc" typeface="Estrangelo Edessa"/>
+        <a:font script="Orya" typeface="Kalinga"/>
+        <a:font script="Mlym" typeface="Kartika"/>
+        <a:font script="Laoo" typeface="DokChampa"/>
+        <a:font script="Sinh" typeface="Iskoola Pota"/>
+        <a:font script="Mong" typeface="Mongolian Baiti"/>
+        <a:font script="Viet" typeface="Times New Roman"/>
+        <a:font script="Uigh" typeface="Microsoft Uighur"/>
+        <a:font script="Geor" typeface="Sylfaen"/>
+        <a:font script="Armn" typeface="Arial"/>
+        <a:font script="Bugi" typeface="Leelawadee UI"/>
+        <a:font script="Bopo" typeface="Microsoft JhengHei"/>
+        <a:font script="Java" typeface="Javanese Text"/>
+        <a:font script="Lisu" typeface="Segoe UI"/>
+        <a:font script="Mymr" typeface="Myanmar Text"/>
+        <a:font script="Nkoo" typeface="Ebrima"/>
+        <a:font script="Olck" typeface="Nirmala UI"/>
+        <a:font script="Osma" typeface="Ebrima"/>
+        <a:font script="Phag" typeface="Phagspa"/>
+        <a:font script="Syrn" typeface="Estrangelo Edessa"/>
+        <a:font script="Syrj" typeface="Estrangelo Edessa"/>
+        <a:font script="Syre" typeface="Estrangelo Edessa"/>
+        <a:font script="Sora" typeface="Nirmala UI"/>
+        <a:font script="Tale" typeface="Microsoft Tai Le"/>
+        <a:font script="Talu" typeface="Microsoft New Tai Lue"/>
+        <a:font script="Tfng" typeface="Ebrima"/>
+      </a:majorFont>
+      <a:minorFont>
+        <a:latin typeface="맑은 고딕" panose="02110004020202020204"/>
+        <a:ea typeface=""/>
+        <a:cs typeface=""/>
+        <a:font script="Jpan" typeface="游ゴシック"/>
+        <a:font script="Hang" typeface="맑은 고딕"/>
+        <a:font script="Hans" typeface="等线"/>
+        <a:font script="Hant" typeface="新細明體"/>
+        <a:font script="Arab" typeface="Arial"/>
+        <a:font script="Hebr" typeface="Arial"/>
+        <a:font script="Thai" typeface="Cordia New"/>
+        <a:font script="Ethi" typeface="Nyala"/>
+        <a:font script="Beng" typeface="Vrinda"/>
+        <a:font script="Gujr" typeface="Shruti"/>
+        <a:font script="Khmr" typeface="DaunPenh"/>
+        <a:font script="Knda" typeface="Tunga"/>
+        <a:font script="Guru" typeface="Raavi"/>
+        <a:font script="Cans" typeface="Euphemia"/>
+        <a:font script="Cher" typeface="Plantagenet Cherokee"/>
+        <a:font script="Yiii" typeface="Microsoft Yi Baiti"/>
+        <a:font script="Tibt" typeface="Microsoft Himalaya"/>
+        <a:font script="Thaa" typeface="MV Boli"/>
+        <a:font script="Deva" typeface="Mangal"/>
+        <a:font script="Telu" typeface="Gautami"/>
+        <a:font script="Taml" typeface="Latha"/>
+        <a:font script="Syrc" typeface="Estrangelo Edessa"/>
+        <a:font script="Orya" typeface="Kalinga"/>
+        <a:font script="Mlym" typeface="Kartika"/>
+        <a:font script="Laoo" typeface="DokChampa"/>
+        <a:font script="Sinh" typeface="Iskoola Pota"/>
+        <a:font script="Mong" typeface="Mongolian Baiti"/>
+        <a:font script="Viet" typeface="Arial"/>
+        <a:font script="Uigh" typeface="Microsoft Uighur"/>
+        <a:font script="Geor" typeface="Sylfaen"/>
+        <a:font script="Armn" typeface="Arial"/>
+        <a:font script="Bugi" typeface="Leelawadee UI"/>
+        <a:font script="Bopo" typeface="Microsoft JhengHei"/>
+        <a:font script="Java" typeface="Javanese Text"/>
+        <a:font script="Lisu" typeface="Segoe UI"/>
+        <a:font script="Mymr" typeface="Myanmar Text"/>
+        <a:font script="Nkoo" typeface="Ebrima"/>
+        <a:font script="Olck" typeface="Nirmala UI"/>
+        <a:font script="Osma" typeface="Ebrima"/>
+        <a:font script="Phag" typeface="Phagspa"/>
+        <a:font script="Syrn" typeface="Estrangelo Edessa"/>
+        <a:font script="Syrj" typeface="Estrangelo Edessa"/>
+        <a:font script="Syre" typeface="Estrangelo Edessa"/>
+        <a:font script="Sora" typeface="Nirmala UI"/>
+        <a:font script="Tale" typeface="Microsoft Tai Le"/>
+        <a:font script="Talu" typeface="Microsoft New Tai Lue"/>
+        <a:font script="Tfng" typeface="Ebrima"/>
+      </a:minorFont>
+    </a:fontScheme>
+    <a:fmtScheme name="Office">
+      <a:fillStyleLst>
+        <a:solidFill>
+          <a:schemeClr val="phClr"/>
+        </a:solidFill>
+        <a:gradFill rotWithShape="1">
+          <a:gsLst>
+            <a:gs pos="0">
+              <a:schemeClr val="phClr">
+                <a:lumMod val="110000"/>
+                <a:satMod val="105000"/>
+                <a:tint val="67000"/>
+              </a:schemeClr>
+            </a:gs>
+            <a:gs pos="50000">
+              <a:schemeClr val="phClr">
+                <a:lumMod val="105000"/>
+                <a:satMod val="103000"/>
+                <a:tint val="73000"/>
+              </a:schemeClr>
+            </a:gs>
+            <a:gs pos="100000">
+              <a:schemeClr val="phClr">
+                <a:lumMod val="105000"/>
+                <a:satMod val="109000"/>
+                <a:tint val="81000"/>
+              </a:schemeClr>
+            </a:gs>
+          </a:gsLst>
+          <a:lin ang="5400000" scaled="0"/>
+        </a:gradFill>
+        <a:gradFill rotWithShape="1">
+          <a:gsLst>
+            <a:gs pos="0">
+              <a:schemeClr val="phClr">
+                <a:satMod val="103000"/>
+                <a:lumMod val="102000"/>
+                <a:tint val="94000"/>
+              </a:schemeClr>
+            </a:gs>
+            <a:gs pos="50000">
+              <a:schemeClr val="phClr">
+                <a:satMod val="110000"/>
+                <a:lumMod val="100000"/>
+                <a:shade val="100000"/>
+              </a:schemeClr>
+            </a:gs>
+            <a:gs pos="100000">
+              <a:schemeClr val="phClr">
+                <a:lumMod val="99000"/>
+                <a:satMod val="120000"/>
+                <a:shade val="78000"/>
+              </a:schemeClr>
+            </a:gs>
+          </a:gsLst>
+          <a:lin ang="5400000" scaled="0"/>
+        </a:gradFill>
+      </a:fillStyleLst>
+      <a:lnStyleLst>
+        <a:ln w="12700" cap="flat" cmpd="sng" algn="ctr">
+          <a:solidFill>
+            <a:schemeClr val="phClr"/>
+          </a:solidFill>
+          <a:prstDash val="solid"/>
+          <a:miter lim="800000"/>
+        </a:ln>
+        <a:ln w="19050" cap="flat" cmpd="sng" algn="ctr">
+          <a:solidFill>
+            <a:schemeClr val="phClr"/>
+          </a:solidFill>
+          <a:prstDash val="solid"/>
+          <a:miter lim="800000"/>
+        </a:ln>
+        <a:ln w="25400" cap="flat" cmpd="sng" algn="ctr">
+          <a:solidFill>
+            <a:schemeClr val="phClr"/>
+          </a:solidFill>
+          <a:prstDash val="solid"/>
+          <a:miter lim="800000"/>
+        </a:ln>
+      </a:lnStyleLst>
+      <a:effectStyleLst>
+        <a:effectStyle>
+          <a:effectLst/>
+        </a:effectStyle>
+        <a:effectStyle>
+          <a:effectLst/>
+        </a:effectStyle>
+        <a:effectStyle>
+          <a:effectLst>
+            <a:outerShdw blurRad="57150" dist="19050" dir="5400000" algn="ctr" rotWithShape="0">
+              <a:srgbClr val="000000">
+                <a:alpha val="63000"/>
+              </a:srgbClr>
+            </a:outerShdw>
+          </a:effectLst>
+        </a:effectStyle>
+      </a:effectStyleLst>
+      <a:bgFillStyleLst>
+        <a:solidFill>
+          <a:schemeClr val="phClr"/>
+        </a:solidFill>
+        <a:solidFill>
+          <a:schemeClr val="phClr">
+            <a:tint val="95000"/>
+            <a:satMod val="170000"/>
+          </a:schemeClr>
+        </a:solidFill>
+        <a:gradFill rotWithShape="1">
+          <a:gsLst>
+            <a:gs pos="0">
+              <a:schemeClr val="phClr">
+                <a:tint val="93000"/>
+                <a:satMod val="150000"/>
+                <a:shade val="98000"/>
+                <a:lumMod val="102000"/>
+              </a:schemeClr>
+            </a:gs>
+            <a:gs pos="50000">
+              <a:schemeClr val="phClr">
+                <a:tint val="98000"/>
+                <a:satMod val="130000"/>
+                <a:shade val="90000"/>
+                <a:lumMod val="103000"/>
+              </a:schemeClr>
+            </a:gs>
+            <a:gs pos="100000">
+              <a:schemeClr val="phClr">
+                <a:shade val="63000"/>
+                <a:satMod val="120000"/>
+              </a:schemeClr>
+            </a:gs>
+          </a:gsLst>
+          <a:lin ang="5400000" scaled="0"/>
+        </a:gradFill>
+      </a:bgFillStyleLst>
+    </a:fmtScheme>
+  </a:themeElements>
+  <a:objectDefaults>
+    <a:lnDef>
+      <a:spPr/>
+      <a:bodyPr/>
+      <a:lstStyle/>
+      <a:style>
+        <a:lnRef idx="2">
+          <a:schemeClr val="accent1"/>
+        </a:lnRef>
+        <a:fillRef idx="0">
+          <a:schemeClr val="accent1"/>
+        </a:fillRef>
+        <a:effectRef idx="1">
+          <a:schemeClr val="accent1"/>
+        </a:effectRef>
+        <a:fontRef idx="minor">
+          <a:schemeClr val="tx1"/>
+        </a:fontRef>
+      </a:style>
+    </a:lnDef>
+  </a:objectDefaults>
+  <a:extraClrSchemeLst/>
+  <a:extLst>
+    <a:ext uri="{05A4C25C-085E-4340-85A3-A5531E510DB2}">
+      <thm15:themeFamily xmlns:thm15="http://schemas.microsoft.com/office/thememl/2012/main" name="Office Theme" id="{2E142A2C-CD16-42D6-873A-C26D2A0506FA}" vid="{1BDDFF52-6CD6-40A5-AB3C-68EB2F1E4D0A}"/>
+    </a:ext>
+  </a:extLst>
+</a:theme>
 </file>